--- a/examples/slides/miles-templates.pptx
+++ b/examples/slides/miles-templates.pptx
@@ -17,6 +17,14 @@
     <p:sldId id="265" r:id="rId16"/>
     <p:sldId id="266" r:id="rId17"/>
     <p:sldId id="267" r:id="rId18"/>
+    <p:sldId id="268" r:id="rId19"/>
+    <p:sldId id="269" r:id="rId20"/>
+    <p:sldId id="270" r:id="rId21"/>
+    <p:sldId id="271" r:id="rId22"/>
+    <p:sldId id="272" r:id="rId23"/>
+    <p:sldId id="273" r:id="rId24"/>
+    <p:sldId id="274" r:id="rId25"/>
+    <p:sldId id="275" r:id="rId26"/>
   </p:sldIdLst>
   <p:sldSz cx="12191695" cy="6858000" type="screen4x3"/>
   <p:notesSz cx="6858000" cy="9144000"/>
@@ -116,6 +124,4388 @@
     </a:lvl9pPr>
   </p:defaultTextStyle>
 </p:presentation>
+</file>
+
+<file path=ppt/charts/chart1.xml><?xml version="1.0" encoding="utf-8"?>
+<c:chartSpace xmlns:c="http://schemas.openxmlformats.org/drawingml/2006/chart" xmlns:a="http://schemas.openxmlformats.org/drawingml/2006/main" xmlns:r="http://schemas.openxmlformats.org/officeDocument/2006/relationships">
+  <c:date1904 val="0"/>
+  <c:chart>
+    <c:autoTitleDeleted val="1"/>
+    <c:plotArea>
+      <c:lineChart>
+        <c:grouping val="standard"/>
+        <c:varyColors val="0"/>
+        <c:ser>
+          <c:idx val="0"/>
+          <c:order val="0"/>
+          <c:tx>
+            <c:strRef>
+              <c:f>Sheet1!$B$1</c:f>
+              <c:strCache>
+                <c:ptCount val="1"/>
+                <c:pt idx="0">
+                  <c:v>s</c:v>
+                </c:pt>
+              </c:strCache>
+            </c:strRef>
+          </c:tx>
+          <c:spPr>
+            <a:ln w="22225">
+              <a:solidFill>
+                <a:srgbClr val="450D21"/>
+              </a:solidFill>
+            </a:ln>
+          </c:spPr>
+          <c:marker>
+            <c:symbol val="none"/>
+          </c:marker>
+          <c:dPt>
+            <c:idx val="7"/>
+            <c:marker>
+              <c:symbol val="circle"/>
+              <c:size val="6"/>
+              <c:spPr>
+                <a:solidFill>
+                  <a:srgbClr val="FF303B"/>
+                </a:solidFill>
+              </c:spPr>
+            </c:marker>
+          </c:dPt>
+          <c:cat>
+            <c:strRef>
+              <c:f>Sheet1!$A$2:$A$9</c:f>
+              <c:strCache>
+                <c:ptCount val="8"/>
+                <c:pt idx="0">
+                  <c:v>0</c:v>
+                </c:pt>
+                <c:pt idx="1">
+                  <c:v>1</c:v>
+                </c:pt>
+                <c:pt idx="2">
+                  <c:v>2</c:v>
+                </c:pt>
+                <c:pt idx="3">
+                  <c:v>3</c:v>
+                </c:pt>
+                <c:pt idx="4">
+                  <c:v>4</c:v>
+                </c:pt>
+                <c:pt idx="5">
+                  <c:v>5</c:v>
+                </c:pt>
+                <c:pt idx="6">
+                  <c:v>6</c:v>
+                </c:pt>
+                <c:pt idx="7">
+                  <c:v>7</c:v>
+                </c:pt>
+              </c:strCache>
+            </c:strRef>
+          </c:cat>
+          <c:val>
+            <c:numRef>
+              <c:f>Sheet1!$B$2:$B$9</c:f>
+              <c:numCache>
+                <c:formatCode>0</c:formatCode>
+                <c:ptCount val="8"/>
+                <c:pt idx="0">
+                  <c:v>4.2</c:v>
+                </c:pt>
+                <c:pt idx="1">
+                  <c:v>4.3</c:v>
+                </c:pt>
+                <c:pt idx="2">
+                  <c:v>4.4</c:v>
+                </c:pt>
+                <c:pt idx="3">
+                  <c:v>4.4</c:v>
+                </c:pt>
+                <c:pt idx="4">
+                  <c:v>4.5</c:v>
+                </c:pt>
+                <c:pt idx="5">
+                  <c:v>4.6</c:v>
+                </c:pt>
+                <c:pt idx="6">
+                  <c:v>4.6</c:v>
+                </c:pt>
+                <c:pt idx="7">
+                  <c:v>4.7</c:v>
+                </c:pt>
+              </c:numCache>
+            </c:numRef>
+          </c:val>
+          <c:smooth val="0"/>
+        </c:ser>
+        <c:marker val="1"/>
+        <c:smooth val="0"/>
+        <c:axId val="2118791784"/>
+        <c:axId val="2140495176"/>
+      </c:lineChart>
+      <c:catAx>
+        <c:axId val="2118791784"/>
+        <c:scaling>
+          <c:orientation val="minMax"/>
+        </c:scaling>
+        <c:delete/>
+        <c:axPos val="b"/>
+        <c:majorTickMark val="none"/>
+        <c:minorTickMark val="none"/>
+        <c:tickLblPos val="nextTo"/>
+        <c:spPr>
+          <a:ln>
+            <a:noFill/>
+          </a:ln>
+        </c:spPr>
+        <c:txPr>
+          <a:bodyPr/>
+          <a:lstStyle/>
+          <a:p>
+            <a:pPr>
+              <a:defRPr sz="1100">
+                <a:solidFill>
+                  <a:srgbClr val="8F5265"/>
+                </a:solidFill>
+                <a:latin typeface="DM Sans"/>
+              </a:defRPr>
+            </a:pPr>
+          </a:p>
+        </c:txPr>
+        <c:crossAx val="2140495176"/>
+        <c:crosses val="autoZero"/>
+        <c:auto val="1"/>
+        <c:lblAlgn val="ctr"/>
+        <c:lblOffset val="100"/>
+        <c:noMultiLvlLbl val="0"/>
+      </c:catAx>
+      <c:valAx>
+        <c:axId val="2140495176"/>
+        <c:scaling/>
+        <c:delete/>
+        <c:axPos val="l"/>
+        <c:majorTickMark val="none"/>
+        <c:minorTickMark val="none"/>
+        <c:tickLblPos val="nextTo"/>
+        <c:spPr>
+          <a:ln>
+            <a:noFill/>
+          </a:ln>
+        </c:spPr>
+        <c:txPr>
+          <a:bodyPr/>
+          <a:lstStyle/>
+          <a:p>
+            <a:pPr>
+              <a:defRPr sz="1100">
+                <a:solidFill>
+                  <a:srgbClr val="8F5265"/>
+                </a:solidFill>
+                <a:latin typeface="DM Sans"/>
+              </a:defRPr>
+            </a:pPr>
+          </a:p>
+        </c:txPr>
+        <c:crossAx val="2118791784"/>
+        <c:crosses val="autoZero"/>
+      </c:valAx>
+      <c:spPr>
+        <a:noFill/>
+        <a:ln>
+          <a:noFill/>
+        </a:ln>
+      </c:spPr>
+    </c:plotArea>
+    <c:plotVisOnly val="1"/>
+    <c:dispBlanksAs val="gap"/>
+    <c:showDLblsOverMax val="0"/>
+  </c:chart>
+  <c:spPr>
+    <a:noFill/>
+    <a:ln>
+      <a:noFill/>
+    </a:ln>
+  </c:spPr>
+  <c:txPr>
+    <a:bodyPr/>
+    <a:lstStyle/>
+    <a:p>
+      <a:pPr>
+        <a:defRPr sz="1100">
+          <a:solidFill>
+            <a:srgbClr val="450D21"/>
+          </a:solidFill>
+          <a:latin typeface="DM Sans"/>
+        </a:defRPr>
+      </a:pPr>
+      <a:endParaRPr lang="en-US"/>
+    </a:p>
+  </c:txPr>
+  <c:externalData r:id="rId1">
+    <c:autoUpdate val="0"/>
+  </c:externalData>
+</c:chartSpace>
+</file>
+
+<file path=ppt/charts/chart10.xml><?xml version="1.0" encoding="utf-8"?>
+<c:chartSpace xmlns:c="http://schemas.openxmlformats.org/drawingml/2006/chart" xmlns:a="http://schemas.openxmlformats.org/drawingml/2006/main" xmlns:r="http://schemas.openxmlformats.org/officeDocument/2006/relationships">
+  <c:date1904 val="0"/>
+  <c:chart>
+    <c:autoTitleDeleted val="1"/>
+    <c:plotArea>
+      <c:lineChart>
+        <c:grouping val="standard"/>
+        <c:varyColors val="0"/>
+        <c:ser>
+          <c:idx val="0"/>
+          <c:order val="0"/>
+          <c:tx>
+            <c:strRef>
+              <c:f>Sheet1!$B$1</c:f>
+              <c:strCache>
+                <c:ptCount val="1"/>
+                <c:pt idx="0">
+                  <c:v>s</c:v>
+                </c:pt>
+              </c:strCache>
+            </c:strRef>
+          </c:tx>
+          <c:spPr>
+            <a:ln w="22225">
+              <a:solidFill>
+                <a:srgbClr val="450D21"/>
+              </a:solidFill>
+            </a:ln>
+          </c:spPr>
+          <c:marker>
+            <c:symbol val="none"/>
+          </c:marker>
+          <c:dPt>
+            <c:idx val="5"/>
+            <c:marker>
+              <c:symbol val="circle"/>
+              <c:size val="6"/>
+              <c:spPr>
+                <a:solidFill>
+                  <a:srgbClr val="FF303B"/>
+                </a:solidFill>
+              </c:spPr>
+            </c:marker>
+          </c:dPt>
+          <c:cat>
+            <c:strRef>
+              <c:f>Sheet1!$A$2:$A$7</c:f>
+              <c:strCache>
+                <c:ptCount val="6"/>
+                <c:pt idx="0">
+                  <c:v>0</c:v>
+                </c:pt>
+                <c:pt idx="1">
+                  <c:v>1</c:v>
+                </c:pt>
+                <c:pt idx="2">
+                  <c:v>2</c:v>
+                </c:pt>
+                <c:pt idx="3">
+                  <c:v>3</c:v>
+                </c:pt>
+                <c:pt idx="4">
+                  <c:v>4</c:v>
+                </c:pt>
+                <c:pt idx="5">
+                  <c:v>5</c:v>
+                </c:pt>
+              </c:strCache>
+            </c:strRef>
+          </c:cat>
+          <c:val>
+            <c:numRef>
+              <c:f>Sheet1!$B$2:$B$7</c:f>
+              <c:numCache>
+                <c:formatCode>0</c:formatCode>
+                <c:ptCount val="6"/>
+                <c:pt idx="0">
+                  <c:v>98</c:v>
+                </c:pt>
+                <c:pt idx="1">
+                  <c:v>104</c:v>
+                </c:pt>
+                <c:pt idx="2">
+                  <c:v>109</c:v>
+                </c:pt>
+                <c:pt idx="3">
+                  <c:v>112</c:v>
+                </c:pt>
+                <c:pt idx="4">
+                  <c:v>117</c:v>
+                </c:pt>
+                <c:pt idx="5">
+                  <c:v>121</c:v>
+                </c:pt>
+              </c:numCache>
+            </c:numRef>
+          </c:val>
+          <c:smooth val="0"/>
+        </c:ser>
+        <c:marker val="1"/>
+        <c:smooth val="0"/>
+        <c:axId val="2118791784"/>
+        <c:axId val="2140495176"/>
+      </c:lineChart>
+      <c:catAx>
+        <c:axId val="2118791784"/>
+        <c:scaling>
+          <c:orientation val="minMax"/>
+        </c:scaling>
+        <c:delete/>
+        <c:axPos val="b"/>
+        <c:majorTickMark val="none"/>
+        <c:minorTickMark val="none"/>
+        <c:tickLblPos val="nextTo"/>
+        <c:spPr>
+          <a:ln>
+            <a:noFill/>
+          </a:ln>
+        </c:spPr>
+        <c:txPr>
+          <a:bodyPr/>
+          <a:lstStyle/>
+          <a:p>
+            <a:pPr>
+              <a:defRPr sz="1100">
+                <a:solidFill>
+                  <a:srgbClr val="8F5265"/>
+                </a:solidFill>
+                <a:latin typeface="DM Sans"/>
+              </a:defRPr>
+            </a:pPr>
+          </a:p>
+        </c:txPr>
+        <c:crossAx val="2140495176"/>
+        <c:crosses val="autoZero"/>
+        <c:auto val="1"/>
+        <c:lblAlgn val="ctr"/>
+        <c:lblOffset val="100"/>
+        <c:noMultiLvlLbl val="0"/>
+      </c:catAx>
+      <c:valAx>
+        <c:axId val="2140495176"/>
+        <c:scaling>
+          <c:max val="125.0"/>
+          <c:min val="0.0"/>
+        </c:scaling>
+        <c:delete/>
+        <c:axPos val="l"/>
+        <c:majorTickMark val="none"/>
+        <c:minorTickMark val="none"/>
+        <c:tickLblPos val="nextTo"/>
+        <c:spPr>
+          <a:ln>
+            <a:noFill/>
+          </a:ln>
+        </c:spPr>
+        <c:txPr>
+          <a:bodyPr/>
+          <a:lstStyle/>
+          <a:p>
+            <a:pPr>
+              <a:defRPr sz="1100">
+                <a:solidFill>
+                  <a:srgbClr val="8F5265"/>
+                </a:solidFill>
+                <a:latin typeface="DM Sans"/>
+              </a:defRPr>
+            </a:pPr>
+          </a:p>
+        </c:txPr>
+        <c:crossAx val="2118791784"/>
+        <c:crosses val="autoZero"/>
+      </c:valAx>
+      <c:spPr>
+        <a:noFill/>
+        <a:ln>
+          <a:noFill/>
+        </a:ln>
+      </c:spPr>
+    </c:plotArea>
+    <c:plotVisOnly val="1"/>
+    <c:dispBlanksAs val="gap"/>
+    <c:showDLblsOverMax val="0"/>
+  </c:chart>
+  <c:spPr>
+    <a:noFill/>
+    <a:ln>
+      <a:noFill/>
+    </a:ln>
+  </c:spPr>
+  <c:txPr>
+    <a:bodyPr/>
+    <a:lstStyle/>
+    <a:p>
+      <a:pPr>
+        <a:defRPr sz="1100">
+          <a:solidFill>
+            <a:srgbClr val="450D21"/>
+          </a:solidFill>
+          <a:latin typeface="DM Sans"/>
+        </a:defRPr>
+      </a:pPr>
+      <a:endParaRPr lang="en-US"/>
+    </a:p>
+  </c:txPr>
+  <c:externalData r:id="rId1">
+    <c:autoUpdate val="0"/>
+  </c:externalData>
+</c:chartSpace>
+</file>
+
+<file path=ppt/charts/chart11.xml><?xml version="1.0" encoding="utf-8"?>
+<c:chartSpace xmlns:c="http://schemas.openxmlformats.org/drawingml/2006/chart" xmlns:a="http://schemas.openxmlformats.org/drawingml/2006/main" xmlns:r="http://schemas.openxmlformats.org/officeDocument/2006/relationships">
+  <c:date1904 val="0"/>
+  <c:chart>
+    <c:autoTitleDeleted val="1"/>
+    <c:plotArea>
+      <c:lineChart>
+        <c:grouping val="standard"/>
+        <c:varyColors val="0"/>
+        <c:ser>
+          <c:idx val="0"/>
+          <c:order val="0"/>
+          <c:tx>
+            <c:strRef>
+              <c:f>Sheet1!$B$1</c:f>
+              <c:strCache>
+                <c:ptCount val="1"/>
+                <c:pt idx="0">
+                  <c:v>s</c:v>
+                </c:pt>
+              </c:strCache>
+            </c:strRef>
+          </c:tx>
+          <c:spPr>
+            <a:ln w="22225">
+              <a:solidFill>
+                <a:srgbClr val="450D21"/>
+              </a:solidFill>
+            </a:ln>
+          </c:spPr>
+          <c:marker>
+            <c:symbol val="none"/>
+          </c:marker>
+          <c:dPt>
+            <c:idx val="5"/>
+            <c:marker>
+              <c:symbol val="circle"/>
+              <c:size val="6"/>
+              <c:spPr>
+                <a:solidFill>
+                  <a:srgbClr val="FF303B"/>
+                </a:solidFill>
+              </c:spPr>
+            </c:marker>
+          </c:dPt>
+          <c:cat>
+            <c:strRef>
+              <c:f>Sheet1!$A$2:$A$7</c:f>
+              <c:strCache>
+                <c:ptCount val="6"/>
+                <c:pt idx="0">
+                  <c:v>0</c:v>
+                </c:pt>
+                <c:pt idx="1">
+                  <c:v>1</c:v>
+                </c:pt>
+                <c:pt idx="2">
+                  <c:v>2</c:v>
+                </c:pt>
+                <c:pt idx="3">
+                  <c:v>3</c:v>
+                </c:pt>
+                <c:pt idx="4">
+                  <c:v>4</c:v>
+                </c:pt>
+                <c:pt idx="5">
+                  <c:v>5</c:v>
+                </c:pt>
+              </c:strCache>
+            </c:strRef>
+          </c:cat>
+          <c:val>
+            <c:numRef>
+              <c:f>Sheet1!$B$2:$B$7</c:f>
+              <c:numCache>
+                <c:formatCode>0</c:formatCode>
+                <c:ptCount val="6"/>
+                <c:pt idx="0">
+                  <c:v>44</c:v>
+                </c:pt>
+                <c:pt idx="1">
+                  <c:v>47</c:v>
+                </c:pt>
+                <c:pt idx="2">
+                  <c:v>50</c:v>
+                </c:pt>
+                <c:pt idx="3">
+                  <c:v>54</c:v>
+                </c:pt>
+                <c:pt idx="4">
+                  <c:v>56</c:v>
+                </c:pt>
+                <c:pt idx="5">
+                  <c:v>58</c:v>
+                </c:pt>
+              </c:numCache>
+            </c:numRef>
+          </c:val>
+          <c:smooth val="0"/>
+        </c:ser>
+        <c:marker val="1"/>
+        <c:smooth val="0"/>
+        <c:axId val="2118791784"/>
+        <c:axId val="2140495176"/>
+      </c:lineChart>
+      <c:catAx>
+        <c:axId val="2118791784"/>
+        <c:scaling>
+          <c:orientation val="minMax"/>
+        </c:scaling>
+        <c:delete/>
+        <c:axPos val="b"/>
+        <c:majorTickMark val="none"/>
+        <c:minorTickMark val="none"/>
+        <c:tickLblPos val="nextTo"/>
+        <c:spPr>
+          <a:ln>
+            <a:noFill/>
+          </a:ln>
+        </c:spPr>
+        <c:txPr>
+          <a:bodyPr/>
+          <a:lstStyle/>
+          <a:p>
+            <a:pPr>
+              <a:defRPr sz="1100">
+                <a:solidFill>
+                  <a:srgbClr val="8F5265"/>
+                </a:solidFill>
+                <a:latin typeface="DM Sans"/>
+              </a:defRPr>
+            </a:pPr>
+          </a:p>
+        </c:txPr>
+        <c:crossAx val="2140495176"/>
+        <c:crosses val="autoZero"/>
+        <c:auto val="1"/>
+        <c:lblAlgn val="ctr"/>
+        <c:lblOffset val="100"/>
+        <c:noMultiLvlLbl val="0"/>
+      </c:catAx>
+      <c:valAx>
+        <c:axId val="2140495176"/>
+        <c:scaling>
+          <c:max val="125.0"/>
+          <c:min val="0.0"/>
+        </c:scaling>
+        <c:delete/>
+        <c:axPos val="l"/>
+        <c:majorTickMark val="none"/>
+        <c:minorTickMark val="none"/>
+        <c:tickLblPos val="nextTo"/>
+        <c:spPr>
+          <a:ln>
+            <a:noFill/>
+          </a:ln>
+        </c:spPr>
+        <c:txPr>
+          <a:bodyPr/>
+          <a:lstStyle/>
+          <a:p>
+            <a:pPr>
+              <a:defRPr sz="1100">
+                <a:solidFill>
+                  <a:srgbClr val="8F5265"/>
+                </a:solidFill>
+                <a:latin typeface="DM Sans"/>
+              </a:defRPr>
+            </a:pPr>
+          </a:p>
+        </c:txPr>
+        <c:crossAx val="2118791784"/>
+        <c:crosses val="autoZero"/>
+      </c:valAx>
+      <c:spPr>
+        <a:noFill/>
+        <a:ln>
+          <a:noFill/>
+        </a:ln>
+      </c:spPr>
+    </c:plotArea>
+    <c:plotVisOnly val="1"/>
+    <c:dispBlanksAs val="gap"/>
+    <c:showDLblsOverMax val="0"/>
+  </c:chart>
+  <c:spPr>
+    <a:noFill/>
+    <a:ln>
+      <a:noFill/>
+    </a:ln>
+  </c:spPr>
+  <c:txPr>
+    <a:bodyPr/>
+    <a:lstStyle/>
+    <a:p>
+      <a:pPr>
+        <a:defRPr sz="1100">
+          <a:solidFill>
+            <a:srgbClr val="450D21"/>
+          </a:solidFill>
+          <a:latin typeface="DM Sans"/>
+        </a:defRPr>
+      </a:pPr>
+      <a:endParaRPr lang="en-US"/>
+    </a:p>
+  </c:txPr>
+  <c:externalData r:id="rId1">
+    <c:autoUpdate val="0"/>
+  </c:externalData>
+</c:chartSpace>
+</file>
+
+<file path=ppt/charts/chart12.xml><?xml version="1.0" encoding="utf-8"?>
+<c:chartSpace xmlns:c="http://schemas.openxmlformats.org/drawingml/2006/chart" xmlns:a="http://schemas.openxmlformats.org/drawingml/2006/main" xmlns:r="http://schemas.openxmlformats.org/officeDocument/2006/relationships">
+  <c:date1904 val="0"/>
+  <c:chart>
+    <c:autoTitleDeleted val="1"/>
+    <c:plotArea>
+      <c:lineChart>
+        <c:grouping val="standard"/>
+        <c:varyColors val="0"/>
+        <c:ser>
+          <c:idx val="0"/>
+          <c:order val="0"/>
+          <c:tx>
+            <c:strRef>
+              <c:f>Sheet1!$B$1</c:f>
+              <c:strCache>
+                <c:ptCount val="1"/>
+                <c:pt idx="0">
+                  <c:v>s</c:v>
+                </c:pt>
+              </c:strCache>
+            </c:strRef>
+          </c:tx>
+          <c:spPr>
+            <a:ln w="22225">
+              <a:solidFill>
+                <a:srgbClr val="450D21"/>
+              </a:solidFill>
+            </a:ln>
+          </c:spPr>
+          <c:marker>
+            <c:symbol val="none"/>
+          </c:marker>
+          <c:dPt>
+            <c:idx val="5"/>
+            <c:marker>
+              <c:symbol val="circle"/>
+              <c:size val="6"/>
+              <c:spPr>
+                <a:solidFill>
+                  <a:srgbClr val="FF303B"/>
+                </a:solidFill>
+              </c:spPr>
+            </c:marker>
+          </c:dPt>
+          <c:cat>
+            <c:strRef>
+              <c:f>Sheet1!$A$2:$A$7</c:f>
+              <c:strCache>
+                <c:ptCount val="6"/>
+                <c:pt idx="0">
+                  <c:v>0</c:v>
+                </c:pt>
+                <c:pt idx="1">
+                  <c:v>1</c:v>
+                </c:pt>
+                <c:pt idx="2">
+                  <c:v>2</c:v>
+                </c:pt>
+                <c:pt idx="3">
+                  <c:v>3</c:v>
+                </c:pt>
+                <c:pt idx="4">
+                  <c:v>4</c:v>
+                </c:pt>
+                <c:pt idx="5">
+                  <c:v>5</c:v>
+                </c:pt>
+              </c:strCache>
+            </c:strRef>
+          </c:cat>
+          <c:val>
+            <c:numRef>
+              <c:f>Sheet1!$B$2:$B$7</c:f>
+              <c:numCache>
+                <c:formatCode>0</c:formatCode>
+                <c:ptCount val="6"/>
+                <c:pt idx="0">
+                  <c:v>22</c:v>
+                </c:pt>
+                <c:pt idx="1">
+                  <c:v>25</c:v>
+                </c:pt>
+                <c:pt idx="2">
+                  <c:v>27</c:v>
+                </c:pt>
+                <c:pt idx="3">
+                  <c:v>30</c:v>
+                </c:pt>
+                <c:pt idx="4">
+                  <c:v>32</c:v>
+                </c:pt>
+                <c:pt idx="5">
+                  <c:v>34</c:v>
+                </c:pt>
+              </c:numCache>
+            </c:numRef>
+          </c:val>
+          <c:smooth val="0"/>
+        </c:ser>
+        <c:marker val="1"/>
+        <c:smooth val="0"/>
+        <c:axId val="2118791784"/>
+        <c:axId val="2140495176"/>
+      </c:lineChart>
+      <c:catAx>
+        <c:axId val="2118791784"/>
+        <c:scaling>
+          <c:orientation val="minMax"/>
+        </c:scaling>
+        <c:delete/>
+        <c:axPos val="b"/>
+        <c:majorTickMark val="none"/>
+        <c:minorTickMark val="none"/>
+        <c:tickLblPos val="nextTo"/>
+        <c:spPr>
+          <a:ln>
+            <a:noFill/>
+          </a:ln>
+        </c:spPr>
+        <c:txPr>
+          <a:bodyPr/>
+          <a:lstStyle/>
+          <a:p>
+            <a:pPr>
+              <a:defRPr sz="1100">
+                <a:solidFill>
+                  <a:srgbClr val="8F5265"/>
+                </a:solidFill>
+                <a:latin typeface="DM Sans"/>
+              </a:defRPr>
+            </a:pPr>
+          </a:p>
+        </c:txPr>
+        <c:crossAx val="2140495176"/>
+        <c:crosses val="autoZero"/>
+        <c:auto val="1"/>
+        <c:lblAlgn val="ctr"/>
+        <c:lblOffset val="100"/>
+        <c:noMultiLvlLbl val="0"/>
+      </c:catAx>
+      <c:valAx>
+        <c:axId val="2140495176"/>
+        <c:scaling>
+          <c:max val="125.0"/>
+          <c:min val="0.0"/>
+        </c:scaling>
+        <c:delete/>
+        <c:axPos val="l"/>
+        <c:majorTickMark val="none"/>
+        <c:minorTickMark val="none"/>
+        <c:tickLblPos val="nextTo"/>
+        <c:spPr>
+          <a:ln>
+            <a:noFill/>
+          </a:ln>
+        </c:spPr>
+        <c:txPr>
+          <a:bodyPr/>
+          <a:lstStyle/>
+          <a:p>
+            <a:pPr>
+              <a:defRPr sz="1100">
+                <a:solidFill>
+                  <a:srgbClr val="8F5265"/>
+                </a:solidFill>
+                <a:latin typeface="DM Sans"/>
+              </a:defRPr>
+            </a:pPr>
+          </a:p>
+        </c:txPr>
+        <c:crossAx val="2118791784"/>
+        <c:crosses val="autoZero"/>
+      </c:valAx>
+      <c:spPr>
+        <a:noFill/>
+        <a:ln>
+          <a:noFill/>
+        </a:ln>
+      </c:spPr>
+    </c:plotArea>
+    <c:plotVisOnly val="1"/>
+    <c:dispBlanksAs val="gap"/>
+    <c:showDLblsOverMax val="0"/>
+  </c:chart>
+  <c:spPr>
+    <a:noFill/>
+    <a:ln>
+      <a:noFill/>
+    </a:ln>
+  </c:spPr>
+  <c:txPr>
+    <a:bodyPr/>
+    <a:lstStyle/>
+    <a:p>
+      <a:pPr>
+        <a:defRPr sz="1100">
+          <a:solidFill>
+            <a:srgbClr val="450D21"/>
+          </a:solidFill>
+          <a:latin typeface="DM Sans"/>
+        </a:defRPr>
+      </a:pPr>
+      <a:endParaRPr lang="en-US"/>
+    </a:p>
+  </c:txPr>
+  <c:externalData r:id="rId1">
+    <c:autoUpdate val="0"/>
+  </c:externalData>
+</c:chartSpace>
+</file>
+
+<file path=ppt/charts/chart13.xml><?xml version="1.0" encoding="utf-8"?>
+<c:chartSpace xmlns:c="http://schemas.openxmlformats.org/drawingml/2006/chart" xmlns:a="http://schemas.openxmlformats.org/drawingml/2006/main" xmlns:r="http://schemas.openxmlformats.org/officeDocument/2006/relationships">
+  <c:date1904 val="0"/>
+  <c:chart>
+    <c:autoTitleDeleted val="1"/>
+    <c:plotArea>
+      <c:lineChart>
+        <c:grouping val="standard"/>
+        <c:varyColors val="0"/>
+        <c:ser>
+          <c:idx val="0"/>
+          <c:order val="0"/>
+          <c:tx>
+            <c:strRef>
+              <c:f>Sheet1!$B$1</c:f>
+              <c:strCache>
+                <c:ptCount val="1"/>
+                <c:pt idx="0">
+                  <c:v>s</c:v>
+                </c:pt>
+              </c:strCache>
+            </c:strRef>
+          </c:tx>
+          <c:spPr>
+            <a:ln w="22225">
+              <a:solidFill>
+                <a:srgbClr val="450D21"/>
+              </a:solidFill>
+            </a:ln>
+          </c:spPr>
+          <c:marker>
+            <c:symbol val="none"/>
+          </c:marker>
+          <c:dPt>
+            <c:idx val="5"/>
+            <c:marker>
+              <c:symbol val="circle"/>
+              <c:size val="6"/>
+              <c:spPr>
+                <a:solidFill>
+                  <a:srgbClr val="FF303B"/>
+                </a:solidFill>
+              </c:spPr>
+            </c:marker>
+          </c:dPt>
+          <c:cat>
+            <c:strRef>
+              <c:f>Sheet1!$A$2:$A$7</c:f>
+              <c:strCache>
+                <c:ptCount val="6"/>
+                <c:pt idx="0">
+                  <c:v>0</c:v>
+                </c:pt>
+                <c:pt idx="1">
+                  <c:v>1</c:v>
+                </c:pt>
+                <c:pt idx="2">
+                  <c:v>2</c:v>
+                </c:pt>
+                <c:pt idx="3">
+                  <c:v>3</c:v>
+                </c:pt>
+                <c:pt idx="4">
+                  <c:v>4</c:v>
+                </c:pt>
+                <c:pt idx="5">
+                  <c:v>5</c:v>
+                </c:pt>
+              </c:strCache>
+            </c:strRef>
+          </c:cat>
+          <c:val>
+            <c:numRef>
+              <c:f>Sheet1!$B$2:$B$7</c:f>
+              <c:numCache>
+                <c:formatCode>0</c:formatCode>
+                <c:ptCount val="6"/>
+                <c:pt idx="0">
+                  <c:v>27</c:v>
+                </c:pt>
+                <c:pt idx="1">
+                  <c:v>28</c:v>
+                </c:pt>
+                <c:pt idx="2">
+                  <c:v>30</c:v>
+                </c:pt>
+                <c:pt idx="3">
+                  <c:v>31</c:v>
+                </c:pt>
+                <c:pt idx="4">
+                  <c:v>30</c:v>
+                </c:pt>
+                <c:pt idx="5">
+                  <c:v>29</c:v>
+                </c:pt>
+              </c:numCache>
+            </c:numRef>
+          </c:val>
+          <c:smooth val="0"/>
+        </c:ser>
+        <c:marker val="1"/>
+        <c:smooth val="0"/>
+        <c:axId val="2118791784"/>
+        <c:axId val="2140495176"/>
+      </c:lineChart>
+      <c:catAx>
+        <c:axId val="2118791784"/>
+        <c:scaling>
+          <c:orientation val="minMax"/>
+        </c:scaling>
+        <c:delete/>
+        <c:axPos val="b"/>
+        <c:majorTickMark val="none"/>
+        <c:minorTickMark val="none"/>
+        <c:tickLblPos val="nextTo"/>
+        <c:spPr>
+          <a:ln>
+            <a:noFill/>
+          </a:ln>
+        </c:spPr>
+        <c:txPr>
+          <a:bodyPr/>
+          <a:lstStyle/>
+          <a:p>
+            <a:pPr>
+              <a:defRPr sz="1100">
+                <a:solidFill>
+                  <a:srgbClr val="8F5265"/>
+                </a:solidFill>
+                <a:latin typeface="DM Sans"/>
+              </a:defRPr>
+            </a:pPr>
+          </a:p>
+        </c:txPr>
+        <c:crossAx val="2140495176"/>
+        <c:crosses val="autoZero"/>
+        <c:auto val="1"/>
+        <c:lblAlgn val="ctr"/>
+        <c:lblOffset val="100"/>
+        <c:noMultiLvlLbl val="0"/>
+      </c:catAx>
+      <c:valAx>
+        <c:axId val="2140495176"/>
+        <c:scaling>
+          <c:max val="125.0"/>
+          <c:min val="0.0"/>
+        </c:scaling>
+        <c:delete/>
+        <c:axPos val="l"/>
+        <c:majorTickMark val="none"/>
+        <c:minorTickMark val="none"/>
+        <c:tickLblPos val="nextTo"/>
+        <c:spPr>
+          <a:ln>
+            <a:noFill/>
+          </a:ln>
+        </c:spPr>
+        <c:txPr>
+          <a:bodyPr/>
+          <a:lstStyle/>
+          <a:p>
+            <a:pPr>
+              <a:defRPr sz="1100">
+                <a:solidFill>
+                  <a:srgbClr val="8F5265"/>
+                </a:solidFill>
+                <a:latin typeface="DM Sans"/>
+              </a:defRPr>
+            </a:pPr>
+          </a:p>
+        </c:txPr>
+        <c:crossAx val="2118791784"/>
+        <c:crosses val="autoZero"/>
+      </c:valAx>
+      <c:spPr>
+        <a:noFill/>
+        <a:ln>
+          <a:noFill/>
+        </a:ln>
+      </c:spPr>
+    </c:plotArea>
+    <c:plotVisOnly val="1"/>
+    <c:dispBlanksAs val="gap"/>
+    <c:showDLblsOverMax val="0"/>
+  </c:chart>
+  <c:spPr>
+    <a:noFill/>
+    <a:ln>
+      <a:noFill/>
+    </a:ln>
+  </c:spPr>
+  <c:txPr>
+    <a:bodyPr/>
+    <a:lstStyle/>
+    <a:p>
+      <a:pPr>
+        <a:defRPr sz="1100">
+          <a:solidFill>
+            <a:srgbClr val="450D21"/>
+          </a:solidFill>
+          <a:latin typeface="DM Sans"/>
+        </a:defRPr>
+      </a:pPr>
+      <a:endParaRPr lang="en-US"/>
+    </a:p>
+  </c:txPr>
+  <c:externalData r:id="rId1">
+    <c:autoUpdate val="0"/>
+  </c:externalData>
+</c:chartSpace>
+</file>
+
+<file path=ppt/charts/chart14.xml><?xml version="1.0" encoding="utf-8"?>
+<c:chartSpace xmlns:c="http://schemas.openxmlformats.org/drawingml/2006/chart" xmlns:a="http://schemas.openxmlformats.org/drawingml/2006/main" xmlns:r="http://schemas.openxmlformats.org/officeDocument/2006/relationships">
+  <c:date1904 val="0"/>
+  <c:chart>
+    <c:autoTitleDeleted val="1"/>
+    <c:plotArea>
+      <c:lineChart>
+        <c:grouping val="standard"/>
+        <c:varyColors val="0"/>
+        <c:ser>
+          <c:idx val="0"/>
+          <c:order val="0"/>
+          <c:tx>
+            <c:strRef>
+              <c:f>Sheet1!$B$1</c:f>
+              <c:strCache>
+                <c:ptCount val="1"/>
+                <c:pt idx="0">
+                  <c:v>s</c:v>
+                </c:pt>
+              </c:strCache>
+            </c:strRef>
+          </c:tx>
+          <c:spPr>
+            <a:ln w="22225">
+              <a:solidFill>
+                <a:srgbClr val="450D21"/>
+              </a:solidFill>
+            </a:ln>
+          </c:spPr>
+          <c:marker>
+            <c:symbol val="none"/>
+          </c:marker>
+          <c:dPt>
+            <c:idx val="5"/>
+            <c:marker>
+              <c:symbol val="circle"/>
+              <c:size val="6"/>
+              <c:spPr>
+                <a:solidFill>
+                  <a:srgbClr val="FF303B"/>
+                </a:solidFill>
+              </c:spPr>
+            </c:marker>
+          </c:dPt>
+          <c:cat>
+            <c:strRef>
+              <c:f>Sheet1!$A$2:$A$7</c:f>
+              <c:strCache>
+                <c:ptCount val="6"/>
+                <c:pt idx="0">
+                  <c:v>0</c:v>
+                </c:pt>
+                <c:pt idx="1">
+                  <c:v>1</c:v>
+                </c:pt>
+                <c:pt idx="2">
+                  <c:v>2</c:v>
+                </c:pt>
+                <c:pt idx="3">
+                  <c:v>3</c:v>
+                </c:pt>
+                <c:pt idx="4">
+                  <c:v>4</c:v>
+                </c:pt>
+                <c:pt idx="5">
+                  <c:v>5</c:v>
+                </c:pt>
+              </c:strCache>
+            </c:strRef>
+          </c:cat>
+          <c:val>
+            <c:numRef>
+              <c:f>Sheet1!$B$2:$B$7</c:f>
+              <c:numCache>
+                <c:formatCode>0</c:formatCode>
+                <c:ptCount val="6"/>
+                <c:pt idx="0">
+                  <c:v>4</c:v>
+                </c:pt>
+                <c:pt idx="1">
+                  <c:v>7</c:v>
+                </c:pt>
+                <c:pt idx="2">
+                  <c:v>10</c:v>
+                </c:pt>
+                <c:pt idx="3">
+                  <c:v>14</c:v>
+                </c:pt>
+                <c:pt idx="4">
+                  <c:v>20</c:v>
+                </c:pt>
+                <c:pt idx="5">
+                  <c:v>26</c:v>
+                </c:pt>
+              </c:numCache>
+            </c:numRef>
+          </c:val>
+          <c:smooth val="0"/>
+        </c:ser>
+        <c:marker val="1"/>
+        <c:smooth val="0"/>
+        <c:axId val="2118791784"/>
+        <c:axId val="2140495176"/>
+      </c:lineChart>
+      <c:catAx>
+        <c:axId val="2118791784"/>
+        <c:scaling>
+          <c:orientation val="minMax"/>
+        </c:scaling>
+        <c:delete/>
+        <c:axPos val="b"/>
+        <c:majorTickMark val="none"/>
+        <c:minorTickMark val="none"/>
+        <c:tickLblPos val="nextTo"/>
+        <c:spPr>
+          <a:ln>
+            <a:noFill/>
+          </a:ln>
+        </c:spPr>
+        <c:txPr>
+          <a:bodyPr/>
+          <a:lstStyle/>
+          <a:p>
+            <a:pPr>
+              <a:defRPr sz="1100">
+                <a:solidFill>
+                  <a:srgbClr val="8F5265"/>
+                </a:solidFill>
+                <a:latin typeface="DM Sans"/>
+              </a:defRPr>
+            </a:pPr>
+          </a:p>
+        </c:txPr>
+        <c:crossAx val="2140495176"/>
+        <c:crosses val="autoZero"/>
+        <c:auto val="1"/>
+        <c:lblAlgn val="ctr"/>
+        <c:lblOffset val="100"/>
+        <c:noMultiLvlLbl val="0"/>
+      </c:catAx>
+      <c:valAx>
+        <c:axId val="2140495176"/>
+        <c:scaling>
+          <c:max val="125.0"/>
+          <c:min val="0.0"/>
+        </c:scaling>
+        <c:delete/>
+        <c:axPos val="l"/>
+        <c:majorTickMark val="none"/>
+        <c:minorTickMark val="none"/>
+        <c:tickLblPos val="nextTo"/>
+        <c:spPr>
+          <a:ln>
+            <a:noFill/>
+          </a:ln>
+        </c:spPr>
+        <c:txPr>
+          <a:bodyPr/>
+          <a:lstStyle/>
+          <a:p>
+            <a:pPr>
+              <a:defRPr sz="1100">
+                <a:solidFill>
+                  <a:srgbClr val="8F5265"/>
+                </a:solidFill>
+                <a:latin typeface="DM Sans"/>
+              </a:defRPr>
+            </a:pPr>
+          </a:p>
+        </c:txPr>
+        <c:crossAx val="2118791784"/>
+        <c:crosses val="autoZero"/>
+      </c:valAx>
+      <c:spPr>
+        <a:noFill/>
+        <a:ln>
+          <a:noFill/>
+        </a:ln>
+      </c:spPr>
+    </c:plotArea>
+    <c:plotVisOnly val="1"/>
+    <c:dispBlanksAs val="gap"/>
+    <c:showDLblsOverMax val="0"/>
+  </c:chart>
+  <c:spPr>
+    <a:noFill/>
+    <a:ln>
+      <a:noFill/>
+    </a:ln>
+  </c:spPr>
+  <c:txPr>
+    <a:bodyPr/>
+    <a:lstStyle/>
+    <a:p>
+      <a:pPr>
+        <a:defRPr sz="1100">
+          <a:solidFill>
+            <a:srgbClr val="450D21"/>
+          </a:solidFill>
+          <a:latin typeface="DM Sans"/>
+        </a:defRPr>
+      </a:pPr>
+      <a:endParaRPr lang="en-US"/>
+    </a:p>
+  </c:txPr>
+  <c:externalData r:id="rId1">
+    <c:autoUpdate val="0"/>
+  </c:externalData>
+</c:chartSpace>
+</file>
+
+<file path=ppt/charts/chart15.xml><?xml version="1.0" encoding="utf-8"?>
+<c:chartSpace xmlns:c="http://schemas.openxmlformats.org/drawingml/2006/chart" xmlns:a="http://schemas.openxmlformats.org/drawingml/2006/main" xmlns:r="http://schemas.openxmlformats.org/officeDocument/2006/relationships">
+  <c:date1904 val="0"/>
+  <c:chart>
+    <c:autoTitleDeleted val="1"/>
+    <c:plotArea>
+      <c:lineChart>
+        <c:grouping val="standard"/>
+        <c:varyColors val="0"/>
+        <c:ser>
+          <c:idx val="0"/>
+          <c:order val="0"/>
+          <c:tx>
+            <c:strRef>
+              <c:f>Sheet1!$B$1</c:f>
+              <c:strCache>
+                <c:ptCount val="1"/>
+                <c:pt idx="0">
+                  <c:v>s</c:v>
+                </c:pt>
+              </c:strCache>
+            </c:strRef>
+          </c:tx>
+          <c:spPr>
+            <a:ln w="22225">
+              <a:solidFill>
+                <a:srgbClr val="450D21"/>
+              </a:solidFill>
+            </a:ln>
+          </c:spPr>
+          <c:marker>
+            <c:symbol val="none"/>
+          </c:marker>
+          <c:dPt>
+            <c:idx val="5"/>
+            <c:marker>
+              <c:symbol val="circle"/>
+              <c:size val="6"/>
+              <c:spPr>
+                <a:solidFill>
+                  <a:srgbClr val="FF303B"/>
+                </a:solidFill>
+              </c:spPr>
+            </c:marker>
+          </c:dPt>
+          <c:cat>
+            <c:strRef>
+              <c:f>Sheet1!$A$2:$A$7</c:f>
+              <c:strCache>
+                <c:ptCount val="6"/>
+                <c:pt idx="0">
+                  <c:v>0</c:v>
+                </c:pt>
+                <c:pt idx="1">
+                  <c:v>1</c:v>
+                </c:pt>
+                <c:pt idx="2">
+                  <c:v>2</c:v>
+                </c:pt>
+                <c:pt idx="3">
+                  <c:v>3</c:v>
+                </c:pt>
+                <c:pt idx="4">
+                  <c:v>4</c:v>
+                </c:pt>
+                <c:pt idx="5">
+                  <c:v>5</c:v>
+                </c:pt>
+              </c:strCache>
+            </c:strRef>
+          </c:cat>
+          <c:val>
+            <c:numRef>
+              <c:f>Sheet1!$B$2:$B$7</c:f>
+              <c:numCache>
+                <c:formatCode>0</c:formatCode>
+                <c:ptCount val="6"/>
+                <c:pt idx="0">
+                  <c:v>8</c:v>
+                </c:pt>
+                <c:pt idx="1">
+                  <c:v>9</c:v>
+                </c:pt>
+                <c:pt idx="2">
+                  <c:v>10</c:v>
+                </c:pt>
+                <c:pt idx="3">
+                  <c:v>11</c:v>
+                </c:pt>
+                <c:pt idx="4">
+                  <c:v>12</c:v>
+                </c:pt>
+                <c:pt idx="5">
+                  <c:v>12</c:v>
+                </c:pt>
+              </c:numCache>
+            </c:numRef>
+          </c:val>
+          <c:smooth val="0"/>
+        </c:ser>
+        <c:marker val="1"/>
+        <c:smooth val="0"/>
+        <c:axId val="2118791784"/>
+        <c:axId val="2140495176"/>
+      </c:lineChart>
+      <c:catAx>
+        <c:axId val="2118791784"/>
+        <c:scaling>
+          <c:orientation val="minMax"/>
+        </c:scaling>
+        <c:delete/>
+        <c:axPos val="b"/>
+        <c:majorTickMark val="none"/>
+        <c:minorTickMark val="none"/>
+        <c:tickLblPos val="nextTo"/>
+        <c:spPr>
+          <a:ln>
+            <a:noFill/>
+          </a:ln>
+        </c:spPr>
+        <c:txPr>
+          <a:bodyPr/>
+          <a:lstStyle/>
+          <a:p>
+            <a:pPr>
+              <a:defRPr sz="1100">
+                <a:solidFill>
+                  <a:srgbClr val="8F5265"/>
+                </a:solidFill>
+                <a:latin typeface="DM Sans"/>
+              </a:defRPr>
+            </a:pPr>
+          </a:p>
+        </c:txPr>
+        <c:crossAx val="2140495176"/>
+        <c:crosses val="autoZero"/>
+        <c:auto val="1"/>
+        <c:lblAlgn val="ctr"/>
+        <c:lblOffset val="100"/>
+        <c:noMultiLvlLbl val="0"/>
+      </c:catAx>
+      <c:valAx>
+        <c:axId val="2140495176"/>
+        <c:scaling>
+          <c:max val="125.0"/>
+          <c:min val="0.0"/>
+        </c:scaling>
+        <c:delete/>
+        <c:axPos val="l"/>
+        <c:majorTickMark val="none"/>
+        <c:minorTickMark val="none"/>
+        <c:tickLblPos val="nextTo"/>
+        <c:spPr>
+          <a:ln>
+            <a:noFill/>
+          </a:ln>
+        </c:spPr>
+        <c:txPr>
+          <a:bodyPr/>
+          <a:lstStyle/>
+          <a:p>
+            <a:pPr>
+              <a:defRPr sz="1100">
+                <a:solidFill>
+                  <a:srgbClr val="8F5265"/>
+                </a:solidFill>
+                <a:latin typeface="DM Sans"/>
+              </a:defRPr>
+            </a:pPr>
+          </a:p>
+        </c:txPr>
+        <c:crossAx val="2118791784"/>
+        <c:crosses val="autoZero"/>
+      </c:valAx>
+      <c:spPr>
+        <a:noFill/>
+        <a:ln>
+          <a:noFill/>
+        </a:ln>
+      </c:spPr>
+    </c:plotArea>
+    <c:plotVisOnly val="1"/>
+    <c:dispBlanksAs val="gap"/>
+    <c:showDLblsOverMax val="0"/>
+  </c:chart>
+  <c:spPr>
+    <a:noFill/>
+    <a:ln>
+      <a:noFill/>
+    </a:ln>
+  </c:spPr>
+  <c:txPr>
+    <a:bodyPr/>
+    <a:lstStyle/>
+    <a:p>
+      <a:pPr>
+        <a:defRPr sz="1100">
+          <a:solidFill>
+            <a:srgbClr val="450D21"/>
+          </a:solidFill>
+          <a:latin typeface="DM Sans"/>
+        </a:defRPr>
+      </a:pPr>
+      <a:endParaRPr lang="en-US"/>
+    </a:p>
+  </c:txPr>
+  <c:externalData r:id="rId1">
+    <c:autoUpdate val="0"/>
+  </c:externalData>
+</c:chartSpace>
+</file>
+
+<file path=ppt/charts/chart16.xml><?xml version="1.0" encoding="utf-8"?>
+<c:chartSpace xmlns:c="http://schemas.openxmlformats.org/drawingml/2006/chart" xmlns:a="http://schemas.openxmlformats.org/drawingml/2006/main" xmlns:r="http://schemas.openxmlformats.org/officeDocument/2006/relationships">
+  <c:date1904 val="0"/>
+  <c:chart>
+    <c:autoTitleDeleted val="1"/>
+    <c:plotArea>
+      <c:lineChart>
+        <c:grouping val="standard"/>
+        <c:varyColors val="0"/>
+        <c:ser>
+          <c:idx val="0"/>
+          <c:order val="0"/>
+          <c:tx>
+            <c:strRef>
+              <c:f>Sheet1!$B$1</c:f>
+              <c:strCache>
+                <c:ptCount val="1"/>
+                <c:pt idx="0">
+                  <c:v>s</c:v>
+                </c:pt>
+              </c:strCache>
+            </c:strRef>
+          </c:tx>
+          <c:spPr>
+            <a:ln w="22225">
+              <a:solidFill>
+                <a:srgbClr val="450D21"/>
+              </a:solidFill>
+            </a:ln>
+          </c:spPr>
+          <c:marker>
+            <c:symbol val="none"/>
+          </c:marker>
+          <c:dPt>
+            <c:idx val="5"/>
+            <c:marker>
+              <c:symbol val="circle"/>
+              <c:size val="6"/>
+              <c:spPr>
+                <a:solidFill>
+                  <a:srgbClr val="FF303B"/>
+                </a:solidFill>
+              </c:spPr>
+            </c:marker>
+          </c:dPt>
+          <c:cat>
+            <c:strRef>
+              <c:f>Sheet1!$A$2:$A$7</c:f>
+              <c:strCache>
+                <c:ptCount val="6"/>
+                <c:pt idx="0">
+                  <c:v>0</c:v>
+                </c:pt>
+                <c:pt idx="1">
+                  <c:v>1</c:v>
+                </c:pt>
+                <c:pt idx="2">
+                  <c:v>2</c:v>
+                </c:pt>
+                <c:pt idx="3">
+                  <c:v>3</c:v>
+                </c:pt>
+                <c:pt idx="4">
+                  <c:v>4</c:v>
+                </c:pt>
+                <c:pt idx="5">
+                  <c:v>5</c:v>
+                </c:pt>
+              </c:strCache>
+            </c:strRef>
+          </c:cat>
+          <c:val>
+            <c:numRef>
+              <c:f>Sheet1!$B$2:$B$7</c:f>
+              <c:numCache>
+                <c:formatCode>0</c:formatCode>
+                <c:ptCount val="6"/>
+                <c:pt idx="0">
+                  <c:v>6</c:v>
+                </c:pt>
+                <c:pt idx="1">
+                  <c:v>7</c:v>
+                </c:pt>
+                <c:pt idx="2">
+                  <c:v>8</c:v>
+                </c:pt>
+                <c:pt idx="3">
+                  <c:v>9</c:v>
+                </c:pt>
+                <c:pt idx="4">
+                  <c:v>9</c:v>
+                </c:pt>
+                <c:pt idx="5">
+                  <c:v>9</c:v>
+                </c:pt>
+              </c:numCache>
+            </c:numRef>
+          </c:val>
+          <c:smooth val="0"/>
+        </c:ser>
+        <c:marker val="1"/>
+        <c:smooth val="0"/>
+        <c:axId val="2118791784"/>
+        <c:axId val="2140495176"/>
+      </c:lineChart>
+      <c:catAx>
+        <c:axId val="2118791784"/>
+        <c:scaling>
+          <c:orientation val="minMax"/>
+        </c:scaling>
+        <c:delete/>
+        <c:axPos val="b"/>
+        <c:majorTickMark val="none"/>
+        <c:minorTickMark val="none"/>
+        <c:tickLblPos val="nextTo"/>
+        <c:spPr>
+          <a:ln>
+            <a:noFill/>
+          </a:ln>
+        </c:spPr>
+        <c:txPr>
+          <a:bodyPr/>
+          <a:lstStyle/>
+          <a:p>
+            <a:pPr>
+              <a:defRPr sz="1100">
+                <a:solidFill>
+                  <a:srgbClr val="8F5265"/>
+                </a:solidFill>
+                <a:latin typeface="DM Sans"/>
+              </a:defRPr>
+            </a:pPr>
+          </a:p>
+        </c:txPr>
+        <c:crossAx val="2140495176"/>
+        <c:crosses val="autoZero"/>
+        <c:auto val="1"/>
+        <c:lblAlgn val="ctr"/>
+        <c:lblOffset val="100"/>
+        <c:noMultiLvlLbl val="0"/>
+      </c:catAx>
+      <c:valAx>
+        <c:axId val="2140495176"/>
+        <c:scaling>
+          <c:max val="125.0"/>
+          <c:min val="0.0"/>
+        </c:scaling>
+        <c:delete/>
+        <c:axPos val="l"/>
+        <c:majorTickMark val="none"/>
+        <c:minorTickMark val="none"/>
+        <c:tickLblPos val="nextTo"/>
+        <c:spPr>
+          <a:ln>
+            <a:noFill/>
+          </a:ln>
+        </c:spPr>
+        <c:txPr>
+          <a:bodyPr/>
+          <a:lstStyle/>
+          <a:p>
+            <a:pPr>
+              <a:defRPr sz="1100">
+                <a:solidFill>
+                  <a:srgbClr val="8F5265"/>
+                </a:solidFill>
+                <a:latin typeface="DM Sans"/>
+              </a:defRPr>
+            </a:pPr>
+          </a:p>
+        </c:txPr>
+        <c:crossAx val="2118791784"/>
+        <c:crosses val="autoZero"/>
+      </c:valAx>
+      <c:spPr>
+        <a:noFill/>
+        <a:ln>
+          <a:noFill/>
+        </a:ln>
+      </c:spPr>
+    </c:plotArea>
+    <c:plotVisOnly val="1"/>
+    <c:dispBlanksAs val="gap"/>
+    <c:showDLblsOverMax val="0"/>
+  </c:chart>
+  <c:spPr>
+    <a:noFill/>
+    <a:ln>
+      <a:noFill/>
+    </a:ln>
+  </c:spPr>
+  <c:txPr>
+    <a:bodyPr/>
+    <a:lstStyle/>
+    <a:p>
+      <a:pPr>
+        <a:defRPr sz="1100">
+          <a:solidFill>
+            <a:srgbClr val="450D21"/>
+          </a:solidFill>
+          <a:latin typeface="DM Sans"/>
+        </a:defRPr>
+      </a:pPr>
+      <a:endParaRPr lang="en-US"/>
+    </a:p>
+  </c:txPr>
+  <c:externalData r:id="rId1">
+    <c:autoUpdate val="0"/>
+  </c:externalData>
+</c:chartSpace>
+</file>
+
+<file path=ppt/charts/chart17.xml><?xml version="1.0" encoding="utf-8"?>
+<c:chartSpace xmlns:c="http://schemas.openxmlformats.org/drawingml/2006/chart" xmlns:a="http://schemas.openxmlformats.org/drawingml/2006/main" xmlns:r="http://schemas.openxmlformats.org/officeDocument/2006/relationships">
+  <c:date1904 val="0"/>
+  <c:chart>
+    <c:autoTitleDeleted val="1"/>
+    <c:plotArea>
+      <c:lineChart>
+        <c:grouping val="standard"/>
+        <c:varyColors val="0"/>
+        <c:ser>
+          <c:idx val="0"/>
+          <c:order val="0"/>
+          <c:tx>
+            <c:strRef>
+              <c:f>Sheet1!$B$1</c:f>
+              <c:strCache>
+                <c:ptCount val="1"/>
+                <c:pt idx="0">
+                  <c:v>s</c:v>
+                </c:pt>
+              </c:strCache>
+            </c:strRef>
+          </c:tx>
+          <c:spPr>
+            <a:ln w="22225">
+              <a:solidFill>
+                <a:srgbClr val="450D21"/>
+              </a:solidFill>
+            </a:ln>
+          </c:spPr>
+          <c:marker>
+            <c:symbol val="none"/>
+          </c:marker>
+          <c:dPt>
+            <c:idx val="5"/>
+            <c:marker>
+              <c:symbol val="circle"/>
+              <c:size val="6"/>
+              <c:spPr>
+                <a:solidFill>
+                  <a:srgbClr val="FF303B"/>
+                </a:solidFill>
+              </c:spPr>
+            </c:marker>
+          </c:dPt>
+          <c:cat>
+            <c:strRef>
+              <c:f>Sheet1!$A$2:$A$7</c:f>
+              <c:strCache>
+                <c:ptCount val="6"/>
+                <c:pt idx="0">
+                  <c:v>0</c:v>
+                </c:pt>
+                <c:pt idx="1">
+                  <c:v>1</c:v>
+                </c:pt>
+                <c:pt idx="2">
+                  <c:v>2</c:v>
+                </c:pt>
+                <c:pt idx="3">
+                  <c:v>3</c:v>
+                </c:pt>
+                <c:pt idx="4">
+                  <c:v>4</c:v>
+                </c:pt>
+                <c:pt idx="5">
+                  <c:v>5</c:v>
+                </c:pt>
+              </c:strCache>
+            </c:strRef>
+          </c:cat>
+          <c:val>
+            <c:numRef>
+              <c:f>Sheet1!$B$2:$B$7</c:f>
+              <c:numCache>
+                <c:formatCode>0</c:formatCode>
+                <c:ptCount val="6"/>
+                <c:pt idx="0">
+                  <c:v>3</c:v>
+                </c:pt>
+                <c:pt idx="1">
+                  <c:v>4</c:v>
+                </c:pt>
+                <c:pt idx="2">
+                  <c:v>5</c:v>
+                </c:pt>
+                <c:pt idx="3">
+                  <c:v>6</c:v>
+                </c:pt>
+                <c:pt idx="4">
+                  <c:v>7</c:v>
+                </c:pt>
+                <c:pt idx="5">
+                  <c:v>8</c:v>
+                </c:pt>
+              </c:numCache>
+            </c:numRef>
+          </c:val>
+          <c:smooth val="0"/>
+        </c:ser>
+        <c:marker val="1"/>
+        <c:smooth val="0"/>
+        <c:axId val="2118791784"/>
+        <c:axId val="2140495176"/>
+      </c:lineChart>
+      <c:catAx>
+        <c:axId val="2118791784"/>
+        <c:scaling>
+          <c:orientation val="minMax"/>
+        </c:scaling>
+        <c:delete/>
+        <c:axPos val="b"/>
+        <c:majorTickMark val="none"/>
+        <c:minorTickMark val="none"/>
+        <c:tickLblPos val="nextTo"/>
+        <c:spPr>
+          <a:ln>
+            <a:noFill/>
+          </a:ln>
+        </c:spPr>
+        <c:txPr>
+          <a:bodyPr/>
+          <a:lstStyle/>
+          <a:p>
+            <a:pPr>
+              <a:defRPr sz="1100">
+                <a:solidFill>
+                  <a:srgbClr val="8F5265"/>
+                </a:solidFill>
+                <a:latin typeface="DM Sans"/>
+              </a:defRPr>
+            </a:pPr>
+          </a:p>
+        </c:txPr>
+        <c:crossAx val="2140495176"/>
+        <c:crosses val="autoZero"/>
+        <c:auto val="1"/>
+        <c:lblAlgn val="ctr"/>
+        <c:lblOffset val="100"/>
+        <c:noMultiLvlLbl val="0"/>
+      </c:catAx>
+      <c:valAx>
+        <c:axId val="2140495176"/>
+        <c:scaling>
+          <c:max val="125.0"/>
+          <c:min val="0.0"/>
+        </c:scaling>
+        <c:delete/>
+        <c:axPos val="l"/>
+        <c:majorTickMark val="none"/>
+        <c:minorTickMark val="none"/>
+        <c:tickLblPos val="nextTo"/>
+        <c:spPr>
+          <a:ln>
+            <a:noFill/>
+          </a:ln>
+        </c:spPr>
+        <c:txPr>
+          <a:bodyPr/>
+          <a:lstStyle/>
+          <a:p>
+            <a:pPr>
+              <a:defRPr sz="1100">
+                <a:solidFill>
+                  <a:srgbClr val="8F5265"/>
+                </a:solidFill>
+                <a:latin typeface="DM Sans"/>
+              </a:defRPr>
+            </a:pPr>
+          </a:p>
+        </c:txPr>
+        <c:crossAx val="2118791784"/>
+        <c:crosses val="autoZero"/>
+      </c:valAx>
+      <c:spPr>
+        <a:noFill/>
+        <a:ln>
+          <a:noFill/>
+        </a:ln>
+      </c:spPr>
+    </c:plotArea>
+    <c:plotVisOnly val="1"/>
+    <c:dispBlanksAs val="gap"/>
+    <c:showDLblsOverMax val="0"/>
+  </c:chart>
+  <c:spPr>
+    <a:noFill/>
+    <a:ln>
+      <a:noFill/>
+    </a:ln>
+  </c:spPr>
+  <c:txPr>
+    <a:bodyPr/>
+    <a:lstStyle/>
+    <a:p>
+      <a:pPr>
+        <a:defRPr sz="1100">
+          <a:solidFill>
+            <a:srgbClr val="450D21"/>
+          </a:solidFill>
+          <a:latin typeface="DM Sans"/>
+        </a:defRPr>
+      </a:pPr>
+      <a:endParaRPr lang="en-US"/>
+    </a:p>
+  </c:txPr>
+  <c:externalData r:id="rId1">
+    <c:autoUpdate val="0"/>
+  </c:externalData>
+</c:chartSpace>
+</file>
+
+<file path=ppt/charts/chart2.xml><?xml version="1.0" encoding="utf-8"?>
+<c:chartSpace xmlns:c="http://schemas.openxmlformats.org/drawingml/2006/chart" xmlns:a="http://schemas.openxmlformats.org/drawingml/2006/main" xmlns:r="http://schemas.openxmlformats.org/officeDocument/2006/relationships">
+  <c:date1904 val="0"/>
+  <c:chart>
+    <c:autoTitleDeleted val="1"/>
+    <c:plotArea>
+      <c:lineChart>
+        <c:grouping val="standard"/>
+        <c:varyColors val="0"/>
+        <c:ser>
+          <c:idx val="0"/>
+          <c:order val="0"/>
+          <c:tx>
+            <c:strRef>
+              <c:f>Sheet1!$B$1</c:f>
+              <c:strCache>
+                <c:ptCount val="1"/>
+                <c:pt idx="0">
+                  <c:v>s</c:v>
+                </c:pt>
+              </c:strCache>
+            </c:strRef>
+          </c:tx>
+          <c:spPr>
+            <a:ln w="22225">
+              <a:solidFill>
+                <a:srgbClr val="450D21"/>
+              </a:solidFill>
+            </a:ln>
+          </c:spPr>
+          <c:marker>
+            <c:symbol val="none"/>
+          </c:marker>
+          <c:dPt>
+            <c:idx val="7"/>
+            <c:marker>
+              <c:symbol val="circle"/>
+              <c:size val="6"/>
+              <c:spPr>
+                <a:solidFill>
+                  <a:srgbClr val="FF303B"/>
+                </a:solidFill>
+              </c:spPr>
+            </c:marker>
+          </c:dPt>
+          <c:cat>
+            <c:strRef>
+              <c:f>Sheet1!$A$2:$A$9</c:f>
+              <c:strCache>
+                <c:ptCount val="8"/>
+                <c:pt idx="0">
+                  <c:v>0</c:v>
+                </c:pt>
+                <c:pt idx="1">
+                  <c:v>1</c:v>
+                </c:pt>
+                <c:pt idx="2">
+                  <c:v>2</c:v>
+                </c:pt>
+                <c:pt idx="3">
+                  <c:v>3</c:v>
+                </c:pt>
+                <c:pt idx="4">
+                  <c:v>4</c:v>
+                </c:pt>
+                <c:pt idx="5">
+                  <c:v>5</c:v>
+                </c:pt>
+                <c:pt idx="6">
+                  <c:v>6</c:v>
+                </c:pt>
+                <c:pt idx="7">
+                  <c:v>7</c:v>
+                </c:pt>
+              </c:strCache>
+            </c:strRef>
+          </c:cat>
+          <c:val>
+            <c:numRef>
+              <c:f>Sheet1!$B$2:$B$9</c:f>
+              <c:numCache>
+                <c:formatCode>0</c:formatCode>
+                <c:ptCount val="8"/>
+                <c:pt idx="0">
+                  <c:v>210</c:v>
+                </c:pt>
+                <c:pt idx="1">
+                  <c:v>228</c:v>
+                </c:pt>
+                <c:pt idx="2">
+                  <c:v>241</c:v>
+                </c:pt>
+                <c:pt idx="3">
+                  <c:v>255</c:v>
+                </c:pt>
+                <c:pt idx="4">
+                  <c:v>268</c:v>
+                </c:pt>
+                <c:pt idx="5">
+                  <c:v>279</c:v>
+                </c:pt>
+                <c:pt idx="6">
+                  <c:v>288</c:v>
+                </c:pt>
+                <c:pt idx="7">
+                  <c:v>297</c:v>
+                </c:pt>
+              </c:numCache>
+            </c:numRef>
+          </c:val>
+          <c:smooth val="0"/>
+        </c:ser>
+        <c:marker val="1"/>
+        <c:smooth val="0"/>
+        <c:axId val="2118791784"/>
+        <c:axId val="2140495176"/>
+      </c:lineChart>
+      <c:catAx>
+        <c:axId val="2118791784"/>
+        <c:scaling>
+          <c:orientation val="minMax"/>
+        </c:scaling>
+        <c:delete/>
+        <c:axPos val="b"/>
+        <c:majorTickMark val="none"/>
+        <c:minorTickMark val="none"/>
+        <c:tickLblPos val="nextTo"/>
+        <c:spPr>
+          <a:ln>
+            <a:noFill/>
+          </a:ln>
+        </c:spPr>
+        <c:txPr>
+          <a:bodyPr/>
+          <a:lstStyle/>
+          <a:p>
+            <a:pPr>
+              <a:defRPr sz="1100">
+                <a:solidFill>
+                  <a:srgbClr val="8F5265"/>
+                </a:solidFill>
+                <a:latin typeface="DM Sans"/>
+              </a:defRPr>
+            </a:pPr>
+          </a:p>
+        </c:txPr>
+        <c:crossAx val="2140495176"/>
+        <c:crosses val="autoZero"/>
+        <c:auto val="1"/>
+        <c:lblAlgn val="ctr"/>
+        <c:lblOffset val="100"/>
+        <c:noMultiLvlLbl val="0"/>
+      </c:catAx>
+      <c:valAx>
+        <c:axId val="2140495176"/>
+        <c:scaling/>
+        <c:delete/>
+        <c:axPos val="l"/>
+        <c:majorTickMark val="none"/>
+        <c:minorTickMark val="none"/>
+        <c:tickLblPos val="nextTo"/>
+        <c:spPr>
+          <a:ln>
+            <a:noFill/>
+          </a:ln>
+        </c:spPr>
+        <c:txPr>
+          <a:bodyPr/>
+          <a:lstStyle/>
+          <a:p>
+            <a:pPr>
+              <a:defRPr sz="1100">
+                <a:solidFill>
+                  <a:srgbClr val="8F5265"/>
+                </a:solidFill>
+                <a:latin typeface="DM Sans"/>
+              </a:defRPr>
+            </a:pPr>
+          </a:p>
+        </c:txPr>
+        <c:crossAx val="2118791784"/>
+        <c:crosses val="autoZero"/>
+      </c:valAx>
+      <c:spPr>
+        <a:noFill/>
+        <a:ln>
+          <a:noFill/>
+        </a:ln>
+      </c:spPr>
+    </c:plotArea>
+    <c:plotVisOnly val="1"/>
+    <c:dispBlanksAs val="gap"/>
+    <c:showDLblsOverMax val="0"/>
+  </c:chart>
+  <c:spPr>
+    <a:noFill/>
+    <a:ln>
+      <a:noFill/>
+    </a:ln>
+  </c:spPr>
+  <c:txPr>
+    <a:bodyPr/>
+    <a:lstStyle/>
+    <a:p>
+      <a:pPr>
+        <a:defRPr sz="1100">
+          <a:solidFill>
+            <a:srgbClr val="450D21"/>
+          </a:solidFill>
+          <a:latin typeface="DM Sans"/>
+        </a:defRPr>
+      </a:pPr>
+      <a:endParaRPr lang="en-US"/>
+    </a:p>
+  </c:txPr>
+  <c:externalData r:id="rId1">
+    <c:autoUpdate val="0"/>
+  </c:externalData>
+</c:chartSpace>
+</file>
+
+<file path=ppt/charts/chart3.xml><?xml version="1.0" encoding="utf-8"?>
+<c:chartSpace xmlns:c="http://schemas.openxmlformats.org/drawingml/2006/chart" xmlns:a="http://schemas.openxmlformats.org/drawingml/2006/main" xmlns:r="http://schemas.openxmlformats.org/officeDocument/2006/relationships">
+  <c:date1904 val="0"/>
+  <c:chart>
+    <c:autoTitleDeleted val="1"/>
+    <c:plotArea>
+      <c:lineChart>
+        <c:grouping val="standard"/>
+        <c:varyColors val="0"/>
+        <c:ser>
+          <c:idx val="0"/>
+          <c:order val="0"/>
+          <c:tx>
+            <c:strRef>
+              <c:f>Sheet1!$B$1</c:f>
+              <c:strCache>
+                <c:ptCount val="1"/>
+                <c:pt idx="0">
+                  <c:v>s</c:v>
+                </c:pt>
+              </c:strCache>
+            </c:strRef>
+          </c:tx>
+          <c:spPr>
+            <a:ln w="22225">
+              <a:solidFill>
+                <a:srgbClr val="450D21"/>
+              </a:solidFill>
+            </a:ln>
+          </c:spPr>
+          <c:marker>
+            <c:symbol val="none"/>
+          </c:marker>
+          <c:dPt>
+            <c:idx val="7"/>
+            <c:marker>
+              <c:symbol val="circle"/>
+              <c:size val="6"/>
+              <c:spPr>
+                <a:solidFill>
+                  <a:srgbClr val="FF303B"/>
+                </a:solidFill>
+              </c:spPr>
+            </c:marker>
+          </c:dPt>
+          <c:cat>
+            <c:strRef>
+              <c:f>Sheet1!$A$2:$A$9</c:f>
+              <c:strCache>
+                <c:ptCount val="8"/>
+                <c:pt idx="0">
+                  <c:v>0</c:v>
+                </c:pt>
+                <c:pt idx="1">
+                  <c:v>1</c:v>
+                </c:pt>
+                <c:pt idx="2">
+                  <c:v>2</c:v>
+                </c:pt>
+                <c:pt idx="3">
+                  <c:v>3</c:v>
+                </c:pt>
+                <c:pt idx="4">
+                  <c:v>4</c:v>
+                </c:pt>
+                <c:pt idx="5">
+                  <c:v>5</c:v>
+                </c:pt>
+                <c:pt idx="6">
+                  <c:v>6</c:v>
+                </c:pt>
+                <c:pt idx="7">
+                  <c:v>7</c:v>
+                </c:pt>
+              </c:strCache>
+            </c:strRef>
+          </c:cat>
+          <c:val>
+            <c:numRef>
+              <c:f>Sheet1!$B$2:$B$9</c:f>
+              <c:numCache>
+                <c:formatCode>0</c:formatCode>
+                <c:ptCount val="8"/>
+                <c:pt idx="0">
+                  <c:v>88</c:v>
+                </c:pt>
+                <c:pt idx="1">
+                  <c:v>90</c:v>
+                </c:pt>
+                <c:pt idx="2">
+                  <c:v>86</c:v>
+                </c:pt>
+                <c:pt idx="3">
+                  <c:v>91</c:v>
+                </c:pt>
+                <c:pt idx="4">
+                  <c:v>93</c:v>
+                </c:pt>
+                <c:pt idx="5">
+                  <c:v>89</c:v>
+                </c:pt>
+                <c:pt idx="6">
+                  <c:v>92</c:v>
+                </c:pt>
+                <c:pt idx="7">
+                  <c:v>94</c:v>
+                </c:pt>
+              </c:numCache>
+            </c:numRef>
+          </c:val>
+          <c:smooth val="0"/>
+        </c:ser>
+        <c:marker val="1"/>
+        <c:smooth val="0"/>
+        <c:axId val="2118791784"/>
+        <c:axId val="2140495176"/>
+      </c:lineChart>
+      <c:catAx>
+        <c:axId val="2118791784"/>
+        <c:scaling>
+          <c:orientation val="minMax"/>
+        </c:scaling>
+        <c:delete/>
+        <c:axPos val="b"/>
+        <c:majorTickMark val="none"/>
+        <c:minorTickMark val="none"/>
+        <c:tickLblPos val="nextTo"/>
+        <c:spPr>
+          <a:ln>
+            <a:noFill/>
+          </a:ln>
+        </c:spPr>
+        <c:txPr>
+          <a:bodyPr/>
+          <a:lstStyle/>
+          <a:p>
+            <a:pPr>
+              <a:defRPr sz="1100">
+                <a:solidFill>
+                  <a:srgbClr val="8F5265"/>
+                </a:solidFill>
+                <a:latin typeface="DM Sans"/>
+              </a:defRPr>
+            </a:pPr>
+          </a:p>
+        </c:txPr>
+        <c:crossAx val="2140495176"/>
+        <c:crosses val="autoZero"/>
+        <c:auto val="1"/>
+        <c:lblAlgn val="ctr"/>
+        <c:lblOffset val="100"/>
+        <c:noMultiLvlLbl val="0"/>
+      </c:catAx>
+      <c:valAx>
+        <c:axId val="2140495176"/>
+        <c:scaling/>
+        <c:delete/>
+        <c:axPos val="l"/>
+        <c:majorTickMark val="none"/>
+        <c:minorTickMark val="none"/>
+        <c:tickLblPos val="nextTo"/>
+        <c:spPr>
+          <a:ln>
+            <a:noFill/>
+          </a:ln>
+        </c:spPr>
+        <c:txPr>
+          <a:bodyPr/>
+          <a:lstStyle/>
+          <a:p>
+            <a:pPr>
+              <a:defRPr sz="1100">
+                <a:solidFill>
+                  <a:srgbClr val="8F5265"/>
+                </a:solidFill>
+                <a:latin typeface="DM Sans"/>
+              </a:defRPr>
+            </a:pPr>
+          </a:p>
+        </c:txPr>
+        <c:crossAx val="2118791784"/>
+        <c:crosses val="autoZero"/>
+      </c:valAx>
+      <c:spPr>
+        <a:noFill/>
+        <a:ln>
+          <a:noFill/>
+        </a:ln>
+      </c:spPr>
+    </c:plotArea>
+    <c:plotVisOnly val="1"/>
+    <c:dispBlanksAs val="gap"/>
+    <c:showDLblsOverMax val="0"/>
+  </c:chart>
+  <c:spPr>
+    <a:noFill/>
+    <a:ln>
+      <a:noFill/>
+    </a:ln>
+  </c:spPr>
+  <c:txPr>
+    <a:bodyPr/>
+    <a:lstStyle/>
+    <a:p>
+      <a:pPr>
+        <a:defRPr sz="1100">
+          <a:solidFill>
+            <a:srgbClr val="450D21"/>
+          </a:solidFill>
+          <a:latin typeface="DM Sans"/>
+        </a:defRPr>
+      </a:pPr>
+      <a:endParaRPr lang="en-US"/>
+    </a:p>
+  </c:txPr>
+  <c:externalData r:id="rId1">
+    <c:autoUpdate val="0"/>
+  </c:externalData>
+</c:chartSpace>
+</file>
+
+<file path=ppt/charts/chart4.xml><?xml version="1.0" encoding="utf-8"?>
+<c:chartSpace xmlns:c="http://schemas.openxmlformats.org/drawingml/2006/chart" xmlns:a="http://schemas.openxmlformats.org/drawingml/2006/main" xmlns:r="http://schemas.openxmlformats.org/officeDocument/2006/relationships">
+  <c:date1904 val="0"/>
+  <c:chart>
+    <c:autoTitleDeleted val="1"/>
+    <c:plotArea>
+      <c:lineChart>
+        <c:grouping val="standard"/>
+        <c:varyColors val="0"/>
+        <c:ser>
+          <c:idx val="0"/>
+          <c:order val="0"/>
+          <c:tx>
+            <c:strRef>
+              <c:f>Sheet1!$B$1</c:f>
+              <c:strCache>
+                <c:ptCount val="1"/>
+                <c:pt idx="0">
+                  <c:v>s</c:v>
+                </c:pt>
+              </c:strCache>
+            </c:strRef>
+          </c:tx>
+          <c:spPr>
+            <a:ln w="22225">
+              <a:solidFill>
+                <a:srgbClr val="450D21"/>
+              </a:solidFill>
+            </a:ln>
+          </c:spPr>
+          <c:marker>
+            <c:symbol val="none"/>
+          </c:marker>
+          <c:dPt>
+            <c:idx val="7"/>
+            <c:marker>
+              <c:symbol val="circle"/>
+              <c:size val="6"/>
+              <c:spPr>
+                <a:solidFill>
+                  <a:srgbClr val="FF303B"/>
+                </a:solidFill>
+              </c:spPr>
+            </c:marker>
+          </c:dPt>
+          <c:cat>
+            <c:strRef>
+              <c:f>Sheet1!$A$2:$A$9</c:f>
+              <c:strCache>
+                <c:ptCount val="8"/>
+                <c:pt idx="0">
+                  <c:v>0</c:v>
+                </c:pt>
+                <c:pt idx="1">
+                  <c:v>1</c:v>
+                </c:pt>
+                <c:pt idx="2">
+                  <c:v>2</c:v>
+                </c:pt>
+                <c:pt idx="3">
+                  <c:v>3</c:v>
+                </c:pt>
+                <c:pt idx="4">
+                  <c:v>4</c:v>
+                </c:pt>
+                <c:pt idx="5">
+                  <c:v>5</c:v>
+                </c:pt>
+                <c:pt idx="6">
+                  <c:v>6</c:v>
+                </c:pt>
+                <c:pt idx="7">
+                  <c:v>7</c:v>
+                </c:pt>
+              </c:strCache>
+            </c:strRef>
+          </c:cat>
+          <c:val>
+            <c:numRef>
+              <c:f>Sheet1!$B$2:$B$9</c:f>
+              <c:numCache>
+                <c:formatCode>0</c:formatCode>
+                <c:ptCount val="8"/>
+                <c:pt idx="0">
+                  <c:v>31</c:v>
+                </c:pt>
+                <c:pt idx="1">
+                  <c:v>35</c:v>
+                </c:pt>
+                <c:pt idx="2">
+                  <c:v>40</c:v>
+                </c:pt>
+                <c:pt idx="3">
+                  <c:v>42</c:v>
+                </c:pt>
+                <c:pt idx="4">
+                  <c:v>46</c:v>
+                </c:pt>
+                <c:pt idx="5">
+                  <c:v>49</c:v>
+                </c:pt>
+                <c:pt idx="6">
+                  <c:v>52</c:v>
+                </c:pt>
+                <c:pt idx="7">
+                  <c:v>54</c:v>
+                </c:pt>
+              </c:numCache>
+            </c:numRef>
+          </c:val>
+          <c:smooth val="0"/>
+        </c:ser>
+        <c:marker val="1"/>
+        <c:smooth val="0"/>
+        <c:axId val="2118791784"/>
+        <c:axId val="2140495176"/>
+      </c:lineChart>
+      <c:catAx>
+        <c:axId val="2118791784"/>
+        <c:scaling>
+          <c:orientation val="minMax"/>
+        </c:scaling>
+        <c:delete/>
+        <c:axPos val="b"/>
+        <c:majorTickMark val="none"/>
+        <c:minorTickMark val="none"/>
+        <c:tickLblPos val="nextTo"/>
+        <c:spPr>
+          <a:ln>
+            <a:noFill/>
+          </a:ln>
+        </c:spPr>
+        <c:txPr>
+          <a:bodyPr/>
+          <a:lstStyle/>
+          <a:p>
+            <a:pPr>
+              <a:defRPr sz="1100">
+                <a:solidFill>
+                  <a:srgbClr val="8F5265"/>
+                </a:solidFill>
+                <a:latin typeface="DM Sans"/>
+              </a:defRPr>
+            </a:pPr>
+          </a:p>
+        </c:txPr>
+        <c:crossAx val="2140495176"/>
+        <c:crosses val="autoZero"/>
+        <c:auto val="1"/>
+        <c:lblAlgn val="ctr"/>
+        <c:lblOffset val="100"/>
+        <c:noMultiLvlLbl val="0"/>
+      </c:catAx>
+      <c:valAx>
+        <c:axId val="2140495176"/>
+        <c:scaling/>
+        <c:delete/>
+        <c:axPos val="l"/>
+        <c:majorTickMark val="none"/>
+        <c:minorTickMark val="none"/>
+        <c:tickLblPos val="nextTo"/>
+        <c:spPr>
+          <a:ln>
+            <a:noFill/>
+          </a:ln>
+        </c:spPr>
+        <c:txPr>
+          <a:bodyPr/>
+          <a:lstStyle/>
+          <a:p>
+            <a:pPr>
+              <a:defRPr sz="1100">
+                <a:solidFill>
+                  <a:srgbClr val="8F5265"/>
+                </a:solidFill>
+                <a:latin typeface="DM Sans"/>
+              </a:defRPr>
+            </a:pPr>
+          </a:p>
+        </c:txPr>
+        <c:crossAx val="2118791784"/>
+        <c:crosses val="autoZero"/>
+      </c:valAx>
+      <c:spPr>
+        <a:noFill/>
+        <a:ln>
+          <a:noFill/>
+        </a:ln>
+      </c:spPr>
+    </c:plotArea>
+    <c:plotVisOnly val="1"/>
+    <c:dispBlanksAs val="gap"/>
+    <c:showDLblsOverMax val="0"/>
+  </c:chart>
+  <c:spPr>
+    <a:noFill/>
+    <a:ln>
+      <a:noFill/>
+    </a:ln>
+  </c:spPr>
+  <c:txPr>
+    <a:bodyPr/>
+    <a:lstStyle/>
+    <a:p>
+      <a:pPr>
+        <a:defRPr sz="1100">
+          <a:solidFill>
+            <a:srgbClr val="450D21"/>
+          </a:solidFill>
+          <a:latin typeface="DM Sans"/>
+        </a:defRPr>
+      </a:pPr>
+      <a:endParaRPr lang="en-US"/>
+    </a:p>
+  </c:txPr>
+  <c:externalData r:id="rId1">
+    <c:autoUpdate val="0"/>
+  </c:externalData>
+</c:chartSpace>
+</file>
+
+<file path=ppt/charts/chart5.xml><?xml version="1.0" encoding="utf-8"?>
+<c:chartSpace xmlns:c="http://schemas.openxmlformats.org/drawingml/2006/chart" xmlns:a="http://schemas.openxmlformats.org/drawingml/2006/main" xmlns:r="http://schemas.openxmlformats.org/officeDocument/2006/relationships">
+  <c:date1904 val="0"/>
+  <c:chart>
+    <c:autoTitleDeleted val="1"/>
+    <c:plotArea>
+      <c:barChart>
+        <c:barDir val="bar"/>
+        <c:grouping val="clustered"/>
+        <c:ser>
+          <c:idx val="0"/>
+          <c:order val="0"/>
+          <c:tx>
+            <c:strRef>
+              <c:f>Sheet1!$B$1</c:f>
+              <c:strCache>
+                <c:ptCount val="1"/>
+                <c:pt idx="0">
+                  <c:v>verdi</c:v>
+                </c:pt>
+              </c:strCache>
+            </c:strRef>
+          </c:tx>
+          <c:spPr>
+            <a:solidFill>
+              <a:srgbClr val="450D21"/>
+            </a:solidFill>
+            <a:ln>
+              <a:noFill/>
+            </a:ln>
+          </c:spPr>
+          <c:dPt>
+            <c:idx val="3"/>
+            <c:spPr>
+              <a:solidFill>
+                <a:srgbClr val="FF303B"/>
+              </a:solidFill>
+            </c:spPr>
+          </c:dPt>
+          <c:cat>
+            <c:strRef>
+              <c:f>Sheet1!$A$2:$A$6</c:f>
+              <c:strCache>
+                <c:ptCount val="5"/>
+                <c:pt idx="0">
+                  <c:v>Transformasjon</c:v>
+                </c:pt>
+                <c:pt idx="1">
+                  <c:v>Brukeropplevelse</c:v>
+                </c:pt>
+                <c:pt idx="2">
+                  <c:v>Strategisk IT</c:v>
+                </c:pt>
+                <c:pt idx="3">
+                  <c:v>Data og AI</c:v>
+                </c:pt>
+                <c:pt idx="4">
+                  <c:v>Sky og plattform</c:v>
+                </c:pt>
+              </c:strCache>
+            </c:strRef>
+          </c:cat>
+          <c:val>
+            <c:numRef>
+              <c:f>Sheet1!$B$2:$B$6</c:f>
+              <c:numCache>
+                <c:formatCode>0" MNOK"</c:formatCode>
+                <c:ptCount val="5"/>
+                <c:pt idx="0">
+                  <c:v>88</c:v>
+                </c:pt>
+                <c:pt idx="1">
+                  <c:v>97</c:v>
+                </c:pt>
+                <c:pt idx="2">
+                  <c:v>142</c:v>
+                </c:pt>
+                <c:pt idx="3">
+                  <c:v>188</c:v>
+                </c:pt>
+                <c:pt idx="4">
+                  <c:v>206</c:v>
+                </c:pt>
+              </c:numCache>
+            </c:numRef>
+          </c:val>
+        </c:ser>
+        <c:dLbls>
+          <c:numFmt formatCode="0&quot; MNOK&quot;" sourceLinked="0"/>
+          <c:txPr>
+            <a:bodyPr/>
+            <a:lstStyle/>
+            <a:p>
+              <a:pPr>
+                <a:defRPr sz="1100">
+                  <a:solidFill>
+                    <a:srgbClr val="450D21"/>
+                  </a:solidFill>
+                  <a:latin typeface="DM Sans"/>
+                </a:defRPr>
+              </a:pPr>
+            </a:p>
+          </c:txPr>
+          <c:dLblPos val="outEnd"/>
+          <c:showLegendKey val="0"/>
+          <c:showVal val="1"/>
+          <c:showCatName val="0"/>
+          <c:showSerName val="0"/>
+          <c:showPercent val="0"/>
+          <c:showBubbleSize val="0"/>
+          <c:showLeaderLines val="1"/>
+        </c:dLbls>
+        <c:gapWidth val="80"/>
+        <c:axId val="-2068027336"/>
+        <c:axId val="-2113994440"/>
+      </c:barChart>
+      <c:catAx>
+        <c:axId val="-2068027336"/>
+        <c:scaling>
+          <c:orientation val="minMax"/>
+        </c:scaling>
+        <c:delete val="0"/>
+        <c:axPos val="l"/>
+        <c:majorTickMark val="none"/>
+        <c:minorTickMark val="none"/>
+        <c:tickLblPos val="nextTo"/>
+        <c:spPr>
+          <a:ln>
+            <a:noFill/>
+          </a:ln>
+        </c:spPr>
+        <c:txPr>
+          <a:bodyPr/>
+          <a:lstStyle/>
+          <a:p>
+            <a:pPr>
+              <a:defRPr sz="1100">
+                <a:solidFill>
+                  <a:srgbClr val="8F5265"/>
+                </a:solidFill>
+                <a:latin typeface="DM Sans"/>
+              </a:defRPr>
+            </a:pPr>
+          </a:p>
+        </c:txPr>
+        <c:crossAx val="-2113994440"/>
+        <c:crosses val="autoZero"/>
+        <c:auto val="1"/>
+        <c:lblAlgn val="ctr"/>
+        <c:lblOffset val="100"/>
+        <c:noMultiLvlLbl val="0"/>
+      </c:catAx>
+      <c:valAx>
+        <c:axId val="-2113994440"/>
+        <c:scaling/>
+        <c:delete/>
+        <c:axPos val="b"/>
+        <c:majorTickMark val="none"/>
+        <c:minorTickMark val="none"/>
+        <c:tickLblPos val="nextTo"/>
+        <c:spPr>
+          <a:ln>
+            <a:noFill/>
+          </a:ln>
+        </c:spPr>
+        <c:txPr>
+          <a:bodyPr/>
+          <a:lstStyle/>
+          <a:p>
+            <a:pPr>
+              <a:defRPr sz="1100">
+                <a:solidFill>
+                  <a:srgbClr val="8F5265"/>
+                </a:solidFill>
+                <a:latin typeface="DM Sans"/>
+              </a:defRPr>
+            </a:pPr>
+          </a:p>
+        </c:txPr>
+        <c:crossAx val="-2068027336"/>
+        <c:crosses val="autoZero"/>
+      </c:valAx>
+      <c:spPr>
+        <a:noFill/>
+        <a:ln>
+          <a:noFill/>
+        </a:ln>
+      </c:spPr>
+    </c:plotArea>
+    <c:dispBlanksAs val="gap"/>
+  </c:chart>
+  <c:spPr>
+    <a:noFill/>
+    <a:ln>
+      <a:noFill/>
+    </a:ln>
+  </c:spPr>
+  <c:txPr>
+    <a:bodyPr/>
+    <a:lstStyle/>
+    <a:p>
+      <a:pPr>
+        <a:defRPr sz="1100">
+          <a:solidFill>
+            <a:srgbClr val="450D21"/>
+          </a:solidFill>
+          <a:latin typeface="DM Sans"/>
+        </a:defRPr>
+      </a:pPr>
+      <a:endParaRPr lang="en-US"/>
+    </a:p>
+  </c:txPr>
+  <c:externalData r:id="rId1">
+    <c:autoUpdate val="0"/>
+  </c:externalData>
+</c:chartSpace>
+</file>
+
+<file path=ppt/charts/chart6.xml><?xml version="1.0" encoding="utf-8"?>
+<c:chartSpace xmlns:c="http://schemas.openxmlformats.org/drawingml/2006/chart" xmlns:a="http://schemas.openxmlformats.org/drawingml/2006/main" xmlns:r="http://schemas.openxmlformats.org/officeDocument/2006/relationships">
+  <c:date1904 val="0"/>
+  <c:chart>
+    <c:autoTitleDeleted val="1"/>
+    <c:plotArea>
+      <c:lineChart>
+        <c:grouping val="standard"/>
+        <c:varyColors val="0"/>
+        <c:ser>
+          <c:idx val="0"/>
+          <c:order val="0"/>
+          <c:tx>
+            <c:strRef>
+              <c:f>Sheet1!$B$1</c:f>
+              <c:strCache>
+                <c:ptCount val="1"/>
+                <c:pt idx="0">
+                  <c:v>Data og AI</c:v>
+                </c:pt>
+              </c:strCache>
+            </c:strRef>
+          </c:tx>
+          <c:spPr>
+            <a:ln w="31750">
+              <a:solidFill>
+                <a:srgbClr val="FF303B"/>
+              </a:solidFill>
+            </a:ln>
+          </c:spPr>
+          <c:marker>
+            <c:symbol val="none"/>
+          </c:marker>
+          <c:cat>
+            <c:strRef>
+              <c:f>Sheet1!$A$2:$A$9</c:f>
+              <c:strCache>
+                <c:ptCount val="8"/>
+                <c:pt idx="0">
+                  <c:v>2019</c:v>
+                </c:pt>
+                <c:pt idx="1">
+                  <c:v>2020</c:v>
+                </c:pt>
+                <c:pt idx="2">
+                  <c:v>2021</c:v>
+                </c:pt>
+                <c:pt idx="3">
+                  <c:v>2022</c:v>
+                </c:pt>
+                <c:pt idx="4">
+                  <c:v>2023</c:v>
+                </c:pt>
+                <c:pt idx="5">
+                  <c:v>2024</c:v>
+                </c:pt>
+                <c:pt idx="6">
+                  <c:v>2025</c:v>
+                </c:pt>
+                <c:pt idx="7">
+                  <c:v>2026</c:v>
+                </c:pt>
+              </c:strCache>
+            </c:strRef>
+          </c:cat>
+          <c:val>
+            <c:numRef>
+              <c:f>Sheet1!$B$2:$B$9</c:f>
+              <c:numCache>
+                <c:formatCode>0</c:formatCode>
+                <c:ptCount val="8"/>
+                <c:pt idx="0">
+                  <c:v>18</c:v>
+                </c:pt>
+                <c:pt idx="1">
+                  <c:v>26</c:v>
+                </c:pt>
+                <c:pt idx="2">
+                  <c:v>38</c:v>
+                </c:pt>
+                <c:pt idx="3">
+                  <c:v>55</c:v>
+                </c:pt>
+                <c:pt idx="4">
+                  <c:v>74</c:v>
+                </c:pt>
+                <c:pt idx="5">
+                  <c:v>96</c:v>
+                </c:pt>
+                <c:pt idx="6">
+                  <c:v>121</c:v>
+                </c:pt>
+                <c:pt idx="7">
+                  <c:v>148</c:v>
+                </c:pt>
+              </c:numCache>
+            </c:numRef>
+          </c:val>
+          <c:smooth val="0"/>
+        </c:ser>
+        <c:ser>
+          <c:idx val="1"/>
+          <c:order val="1"/>
+          <c:tx>
+            <c:strRef>
+              <c:f>Sheet1!$C$1</c:f>
+              <c:strCache>
+                <c:ptCount val="1"/>
+                <c:pt idx="0">
+                  <c:v>Sky og plattform</c:v>
+                </c:pt>
+              </c:strCache>
+            </c:strRef>
+          </c:tx>
+          <c:spPr>
+            <a:ln w="19050">
+              <a:solidFill>
+                <a:srgbClr val="450D21"/>
+              </a:solidFill>
+            </a:ln>
+          </c:spPr>
+          <c:marker>
+            <c:symbol val="none"/>
+          </c:marker>
+          <c:cat>
+            <c:strRef>
+              <c:f>Sheet1!$A$2:$A$9</c:f>
+              <c:strCache>
+                <c:ptCount val="8"/>
+                <c:pt idx="0">
+                  <c:v>2019</c:v>
+                </c:pt>
+                <c:pt idx="1">
+                  <c:v>2020</c:v>
+                </c:pt>
+                <c:pt idx="2">
+                  <c:v>2021</c:v>
+                </c:pt>
+                <c:pt idx="3">
+                  <c:v>2022</c:v>
+                </c:pt>
+                <c:pt idx="4">
+                  <c:v>2023</c:v>
+                </c:pt>
+                <c:pt idx="5">
+                  <c:v>2024</c:v>
+                </c:pt>
+                <c:pt idx="6">
+                  <c:v>2025</c:v>
+                </c:pt>
+                <c:pt idx="7">
+                  <c:v>2026</c:v>
+                </c:pt>
+              </c:strCache>
+            </c:strRef>
+          </c:cat>
+          <c:val>
+            <c:numRef>
+              <c:f>Sheet1!$C$2:$C$9</c:f>
+              <c:numCache>
+                <c:formatCode>0</c:formatCode>
+                <c:ptCount val="8"/>
+                <c:pt idx="0">
+                  <c:v>64</c:v>
+                </c:pt>
+                <c:pt idx="1">
+                  <c:v>71</c:v>
+                </c:pt>
+                <c:pt idx="2">
+                  <c:v>78</c:v>
+                </c:pt>
+                <c:pt idx="3">
+                  <c:v>84</c:v>
+                </c:pt>
+                <c:pt idx="4">
+                  <c:v>90</c:v>
+                </c:pt>
+                <c:pt idx="5">
+                  <c:v>97</c:v>
+                </c:pt>
+                <c:pt idx="6">
+                  <c:v>104</c:v>
+                </c:pt>
+                <c:pt idx="7">
+                  <c:v>110</c:v>
+                </c:pt>
+              </c:numCache>
+            </c:numRef>
+          </c:val>
+          <c:smooth val="0"/>
+        </c:ser>
+        <c:ser>
+          <c:idx val="2"/>
+          <c:order val="2"/>
+          <c:tx>
+            <c:strRef>
+              <c:f>Sheet1!$D$1</c:f>
+              <c:strCache>
+                <c:ptCount val="1"/>
+                <c:pt idx="0">
+                  <c:v>Strategisk IT</c:v>
+                </c:pt>
+              </c:strCache>
+            </c:strRef>
+          </c:tx>
+          <c:spPr>
+            <a:ln w="19050">
+              <a:solidFill>
+                <a:srgbClr val="8F5265"/>
+              </a:solidFill>
+            </a:ln>
+          </c:spPr>
+          <c:marker>
+            <c:symbol val="none"/>
+          </c:marker>
+          <c:cat>
+            <c:strRef>
+              <c:f>Sheet1!$A$2:$A$9</c:f>
+              <c:strCache>
+                <c:ptCount val="8"/>
+                <c:pt idx="0">
+                  <c:v>2019</c:v>
+                </c:pt>
+                <c:pt idx="1">
+                  <c:v>2020</c:v>
+                </c:pt>
+                <c:pt idx="2">
+                  <c:v>2021</c:v>
+                </c:pt>
+                <c:pt idx="3">
+                  <c:v>2022</c:v>
+                </c:pt>
+                <c:pt idx="4">
+                  <c:v>2023</c:v>
+                </c:pt>
+                <c:pt idx="5">
+                  <c:v>2024</c:v>
+                </c:pt>
+                <c:pt idx="6">
+                  <c:v>2025</c:v>
+                </c:pt>
+                <c:pt idx="7">
+                  <c:v>2026</c:v>
+                </c:pt>
+              </c:strCache>
+            </c:strRef>
+          </c:cat>
+          <c:val>
+            <c:numRef>
+              <c:f>Sheet1!$D$2:$D$9</c:f>
+              <c:numCache>
+                <c:formatCode>0</c:formatCode>
+                <c:ptCount val="8"/>
+                <c:pt idx="0">
+                  <c:v>41</c:v>
+                </c:pt>
+                <c:pt idx="1">
+                  <c:v>44</c:v>
+                </c:pt>
+                <c:pt idx="2">
+                  <c:v>46</c:v>
+                </c:pt>
+                <c:pt idx="3">
+                  <c:v>48</c:v>
+                </c:pt>
+                <c:pt idx="4">
+                  <c:v>49</c:v>
+                </c:pt>
+                <c:pt idx="5">
+                  <c:v>51</c:v>
+                </c:pt>
+                <c:pt idx="6">
+                  <c:v>52</c:v>
+                </c:pt>
+                <c:pt idx="7">
+                  <c:v>54</c:v>
+                </c:pt>
+              </c:numCache>
+            </c:numRef>
+          </c:val>
+          <c:smooth val="0"/>
+        </c:ser>
+        <c:marker val="1"/>
+        <c:smooth val="0"/>
+        <c:axId val="2118791784"/>
+        <c:axId val="2140495176"/>
+      </c:lineChart>
+      <c:catAx>
+        <c:axId val="2118791784"/>
+        <c:scaling>
+          <c:orientation val="minMax"/>
+        </c:scaling>
+        <c:delete val="0"/>
+        <c:axPos val="b"/>
+        <c:majorTickMark val="none"/>
+        <c:minorTickMark val="none"/>
+        <c:tickLblPos val="nextTo"/>
+        <c:spPr>
+          <a:ln>
+            <a:noFill/>
+          </a:ln>
+        </c:spPr>
+        <c:txPr>
+          <a:bodyPr/>
+          <a:lstStyle/>
+          <a:p>
+            <a:pPr>
+              <a:defRPr sz="1100">
+                <a:solidFill>
+                  <a:srgbClr val="8F5265"/>
+                </a:solidFill>
+                <a:latin typeface="DM Sans"/>
+              </a:defRPr>
+            </a:pPr>
+          </a:p>
+        </c:txPr>
+        <c:crossAx val="2140495176"/>
+        <c:crosses val="autoZero"/>
+        <c:auto val="1"/>
+        <c:lblAlgn val="ctr"/>
+        <c:lblOffset val="100"/>
+        <c:noMultiLvlLbl val="0"/>
+      </c:catAx>
+      <c:valAx>
+        <c:axId val="2140495176"/>
+        <c:scaling>
+          <c:min val="0.0"/>
+        </c:scaling>
+        <c:delete val="0"/>
+        <c:axPos val="l"/>
+        <c:majorTickMark val="none"/>
+        <c:minorTickMark val="none"/>
+        <c:tickLblPos val="nextTo"/>
+        <c:spPr>
+          <a:ln>
+            <a:noFill/>
+          </a:ln>
+        </c:spPr>
+        <c:txPr>
+          <a:bodyPr/>
+          <a:lstStyle/>
+          <a:p>
+            <a:pPr>
+              <a:defRPr sz="1100">
+                <a:solidFill>
+                  <a:srgbClr val="8F5265"/>
+                </a:solidFill>
+                <a:latin typeface="DM Sans"/>
+              </a:defRPr>
+            </a:pPr>
+          </a:p>
+        </c:txPr>
+        <c:crossAx val="2118791784"/>
+        <c:crosses val="autoZero"/>
+        <c:majorUnit val="50.0"/>
+      </c:valAx>
+      <c:spPr>
+        <a:noFill/>
+        <a:ln>
+          <a:noFill/>
+        </a:ln>
+      </c:spPr>
+    </c:plotArea>
+    <c:legend>
+      <c:legendPos val="b"/>
+      <c:layout/>
+      <c:overlay val="0"/>
+      <c:txPr>
+        <a:bodyPr/>
+        <a:lstStyle/>
+        <a:p>
+          <a:pPr>
+            <a:defRPr sz="1100">
+              <a:solidFill>
+                <a:srgbClr val="450D21"/>
+              </a:solidFill>
+            </a:defRPr>
+          </a:pPr>
+        </a:p>
+      </c:txPr>
+    </c:legend>
+    <c:plotVisOnly val="1"/>
+    <c:dispBlanksAs val="gap"/>
+    <c:showDLblsOverMax val="0"/>
+  </c:chart>
+  <c:spPr>
+    <a:noFill/>
+    <a:ln>
+      <a:noFill/>
+    </a:ln>
+  </c:spPr>
+  <c:txPr>
+    <a:bodyPr/>
+    <a:lstStyle/>
+    <a:p>
+      <a:pPr>
+        <a:defRPr sz="1100">
+          <a:solidFill>
+            <a:srgbClr val="450D21"/>
+          </a:solidFill>
+          <a:latin typeface="DM Sans"/>
+        </a:defRPr>
+      </a:pPr>
+      <a:endParaRPr lang="en-US"/>
+    </a:p>
+  </c:txPr>
+  <c:externalData r:id="rId1">
+    <c:autoUpdate val="0"/>
+  </c:externalData>
+</c:chartSpace>
+</file>
+
+<file path=ppt/charts/chart7.xml><?xml version="1.0" encoding="utf-8"?>
+<c:chartSpace xmlns:c="http://schemas.openxmlformats.org/drawingml/2006/chart" xmlns:a="http://schemas.openxmlformats.org/drawingml/2006/main" xmlns:r="http://schemas.openxmlformats.org/officeDocument/2006/relationships">
+  <c:date1904 val="0"/>
+  <c:chart>
+    <c:autoTitleDeleted val="1"/>
+    <c:plotArea>
+      <c:barChart>
+        <c:barDir val="bar"/>
+        <c:grouping val="clustered"/>
+        <c:ser>
+          <c:idx val="0"/>
+          <c:order val="0"/>
+          <c:tx>
+            <c:strRef>
+              <c:f>Sheet1!$B$1</c:f>
+              <c:strCache>
+                <c:ptCount val="1"/>
+                <c:pt idx="0">
+                  <c:v>2024</c:v>
+                </c:pt>
+              </c:strCache>
+            </c:strRef>
+          </c:tx>
+          <c:spPr>
+            <a:solidFill>
+              <a:srgbClr val="B58594"/>
+            </a:solidFill>
+            <a:ln>
+              <a:noFill/>
+            </a:ln>
+          </c:spPr>
+          <c:cat>
+            <c:strRef>
+              <c:f>Sheet1!$A$2:$A$9</c:f>
+              <c:strCache>
+                <c:ptCount val="8"/>
+                <c:pt idx="0">
+                  <c:v>Innlandet</c:v>
+                </c:pt>
+                <c:pt idx="1">
+                  <c:v>Haugesund</c:v>
+                </c:pt>
+                <c:pt idx="2">
+                  <c:v>Ålesund</c:v>
+                </c:pt>
+                <c:pt idx="3">
+                  <c:v>Litauen</c:v>
+                </c:pt>
+                <c:pt idx="4">
+                  <c:v>Stavanger</c:v>
+                </c:pt>
+                <c:pt idx="5">
+                  <c:v>Trondheim</c:v>
+                </c:pt>
+                <c:pt idx="6">
+                  <c:v>Bergen</c:v>
+                </c:pt>
+                <c:pt idx="7">
+                  <c:v>Oslo</c:v>
+                </c:pt>
+              </c:strCache>
+            </c:strRef>
+          </c:cat>
+          <c:val>
+            <c:numRef>
+              <c:f>Sheet1!$B$2:$B$9</c:f>
+              <c:numCache>
+                <c:formatCode>0</c:formatCode>
+                <c:ptCount val="8"/>
+                <c:pt idx="0">
+                  <c:v>6</c:v>
+                </c:pt>
+                <c:pt idx="1">
+                  <c:v>9</c:v>
+                </c:pt>
+                <c:pt idx="2">
+                  <c:v>11</c:v>
+                </c:pt>
+                <c:pt idx="3">
+                  <c:v>14</c:v>
+                </c:pt>
+                <c:pt idx="4">
+                  <c:v>31</c:v>
+                </c:pt>
+                <c:pt idx="5">
+                  <c:v>30</c:v>
+                </c:pt>
+                <c:pt idx="6">
+                  <c:v>54</c:v>
+                </c:pt>
+                <c:pt idx="7">
+                  <c:v>112</c:v>
+                </c:pt>
+              </c:numCache>
+            </c:numRef>
+          </c:val>
+        </c:ser>
+        <c:ser>
+          <c:idx val="1"/>
+          <c:order val="1"/>
+          <c:tx>
+            <c:strRef>
+              <c:f>Sheet1!$C$1</c:f>
+              <c:strCache>
+                <c:ptCount val="1"/>
+                <c:pt idx="0">
+                  <c:v>2025</c:v>
+                </c:pt>
+              </c:strCache>
+            </c:strRef>
+          </c:tx>
+          <c:spPr>
+            <a:solidFill>
+              <a:srgbClr val="450D21"/>
+            </a:solidFill>
+            <a:ln>
+              <a:noFill/>
+            </a:ln>
+          </c:spPr>
+          <c:cat>
+            <c:strRef>
+              <c:f>Sheet1!$A$2:$A$9</c:f>
+              <c:strCache>
+                <c:ptCount val="8"/>
+                <c:pt idx="0">
+                  <c:v>Innlandet</c:v>
+                </c:pt>
+                <c:pt idx="1">
+                  <c:v>Haugesund</c:v>
+                </c:pt>
+                <c:pt idx="2">
+                  <c:v>Ålesund</c:v>
+                </c:pt>
+                <c:pt idx="3">
+                  <c:v>Litauen</c:v>
+                </c:pt>
+                <c:pt idx="4">
+                  <c:v>Stavanger</c:v>
+                </c:pt>
+                <c:pt idx="5">
+                  <c:v>Trondheim</c:v>
+                </c:pt>
+                <c:pt idx="6">
+                  <c:v>Bergen</c:v>
+                </c:pt>
+                <c:pt idx="7">
+                  <c:v>Oslo</c:v>
+                </c:pt>
+              </c:strCache>
+            </c:strRef>
+          </c:cat>
+          <c:val>
+            <c:numRef>
+              <c:f>Sheet1!$C$2:$C$9</c:f>
+              <c:numCache>
+                <c:formatCode>0</c:formatCode>
+                <c:ptCount val="8"/>
+                <c:pt idx="0">
+                  <c:v>8</c:v>
+                </c:pt>
+                <c:pt idx="1">
+                  <c:v>9</c:v>
+                </c:pt>
+                <c:pt idx="2">
+                  <c:v>12</c:v>
+                </c:pt>
+                <c:pt idx="3">
+                  <c:v>26</c:v>
+                </c:pt>
+                <c:pt idx="4">
+                  <c:v>29</c:v>
+                </c:pt>
+                <c:pt idx="5">
+                  <c:v>34</c:v>
+                </c:pt>
+                <c:pt idx="6">
+                  <c:v>58</c:v>
+                </c:pt>
+                <c:pt idx="7">
+                  <c:v>121</c:v>
+                </c:pt>
+              </c:numCache>
+            </c:numRef>
+          </c:val>
+        </c:ser>
+        <c:gapWidth val="60"/>
+        <c:overlap val="-10"/>
+        <c:axId val="-2068027336"/>
+        <c:axId val="-2113994440"/>
+      </c:barChart>
+      <c:catAx>
+        <c:axId val="-2068027336"/>
+        <c:scaling>
+          <c:orientation val="minMax"/>
+        </c:scaling>
+        <c:delete val="0"/>
+        <c:axPos val="l"/>
+        <c:majorTickMark val="none"/>
+        <c:minorTickMark val="none"/>
+        <c:tickLblPos val="nextTo"/>
+        <c:spPr>
+          <a:ln>
+            <a:noFill/>
+          </a:ln>
+        </c:spPr>
+        <c:txPr>
+          <a:bodyPr/>
+          <a:lstStyle/>
+          <a:p>
+            <a:pPr>
+              <a:defRPr sz="1100">
+                <a:solidFill>
+                  <a:srgbClr val="8F5265"/>
+                </a:solidFill>
+                <a:latin typeface="DM Sans"/>
+              </a:defRPr>
+            </a:pPr>
+          </a:p>
+        </c:txPr>
+        <c:crossAx val="-2113994440"/>
+        <c:crosses val="autoZero"/>
+        <c:auto val="1"/>
+        <c:lblAlgn val="ctr"/>
+        <c:lblOffset val="100"/>
+        <c:noMultiLvlLbl val="0"/>
+      </c:catAx>
+      <c:valAx>
+        <c:axId val="-2113994440"/>
+        <c:scaling/>
+        <c:delete/>
+        <c:axPos val="b"/>
+        <c:majorTickMark val="none"/>
+        <c:minorTickMark val="none"/>
+        <c:tickLblPos val="nextTo"/>
+        <c:spPr>
+          <a:ln>
+            <a:noFill/>
+          </a:ln>
+        </c:spPr>
+        <c:txPr>
+          <a:bodyPr/>
+          <a:lstStyle/>
+          <a:p>
+            <a:pPr>
+              <a:defRPr sz="1100">
+                <a:solidFill>
+                  <a:srgbClr val="8F5265"/>
+                </a:solidFill>
+                <a:latin typeface="DM Sans"/>
+              </a:defRPr>
+            </a:pPr>
+          </a:p>
+        </c:txPr>
+        <c:crossAx val="-2068027336"/>
+        <c:crosses val="autoZero"/>
+      </c:valAx>
+      <c:spPr>
+        <a:noFill/>
+        <a:ln>
+          <a:noFill/>
+        </a:ln>
+      </c:spPr>
+    </c:plotArea>
+    <c:legend>
+      <c:legendPos val="b"/>
+      <c:overlay val="0"/>
+      <c:txPr>
+        <a:bodyPr/>
+        <a:lstStyle/>
+        <a:p>
+          <a:pPr>
+            <a:defRPr sz="1100">
+              <a:solidFill>
+                <a:srgbClr val="450D21"/>
+              </a:solidFill>
+            </a:defRPr>
+          </a:pPr>
+        </a:p>
+      </c:txPr>
+    </c:legend>
+    <c:dispBlanksAs val="gap"/>
+  </c:chart>
+  <c:spPr>
+    <a:noFill/>
+    <a:ln>
+      <a:noFill/>
+    </a:ln>
+  </c:spPr>
+  <c:txPr>
+    <a:bodyPr/>
+    <a:lstStyle/>
+    <a:p>
+      <a:pPr>
+        <a:defRPr sz="1100">
+          <a:solidFill>
+            <a:srgbClr val="450D21"/>
+          </a:solidFill>
+          <a:latin typeface="DM Sans"/>
+        </a:defRPr>
+      </a:pPr>
+      <a:endParaRPr lang="en-US"/>
+    </a:p>
+  </c:txPr>
+  <c:externalData r:id="rId1">
+    <c:autoUpdate val="0"/>
+  </c:externalData>
+</c:chartSpace>
+</file>
+
+<file path=ppt/charts/chart8.xml><?xml version="1.0" encoding="utf-8"?>
+<c:chartSpace xmlns:c="http://schemas.openxmlformats.org/drawingml/2006/chart" xmlns:a="http://schemas.openxmlformats.org/drawingml/2006/main" xmlns:r="http://schemas.openxmlformats.org/officeDocument/2006/relationships">
+  <c:date1904 val="0"/>
+  <c:chart>
+    <c:autoTitleDeleted val="1"/>
+    <c:plotArea>
+      <c:lineChart>
+        <c:grouping val="standard"/>
+        <c:varyColors val="0"/>
+        <c:ser>
+          <c:idx val="0"/>
+          <c:order val="0"/>
+          <c:tx>
+            <c:strRef>
+              <c:f>Sheet1!$B$1</c:f>
+              <c:strCache>
+                <c:ptCount val="1"/>
+                <c:pt idx="0">
+                  <c:v>Data og AI</c:v>
+                </c:pt>
+              </c:strCache>
+            </c:strRef>
+          </c:tx>
+          <c:spPr>
+            <a:ln w="25400">
+              <a:solidFill>
+                <a:srgbClr val="FF303B"/>
+              </a:solidFill>
+            </a:ln>
+          </c:spPr>
+          <c:marker>
+            <c:symbol val="circle"/>
+            <c:size val="5"/>
+            <c:spPr>
+              <a:solidFill>
+                <a:srgbClr val="FF303B"/>
+              </a:solidFill>
+              <a:ln>
+                <a:noFill/>
+              </a:ln>
+            </c:spPr>
+          </c:marker>
+          <c:cat>
+            <c:strRef>
+              <c:f>Sheet1!$A$2:$A$3</c:f>
+              <c:strCache>
+                <c:ptCount val="2"/>
+                <c:pt idx="0">
+                  <c:v>2023</c:v>
+                </c:pt>
+                <c:pt idx="1">
+                  <c:v>2025</c:v>
+                </c:pt>
+              </c:strCache>
+            </c:strRef>
+          </c:cat>
+          <c:val>
+            <c:numRef>
+              <c:f>Sheet1!$B$2:$B$3</c:f>
+              <c:numCache>
+                <c:formatCode>0</c:formatCode>
+                <c:ptCount val="2"/>
+                <c:pt idx="0">
+                  <c:v>62</c:v>
+                </c:pt>
+                <c:pt idx="1">
+                  <c:v>91</c:v>
+                </c:pt>
+              </c:numCache>
+            </c:numRef>
+          </c:val>
+          <c:smooth val="0"/>
+        </c:ser>
+        <c:ser>
+          <c:idx val="1"/>
+          <c:order val="1"/>
+          <c:tx>
+            <c:strRef>
+              <c:f>Sheet1!$C$1</c:f>
+              <c:strCache>
+                <c:ptCount val="1"/>
+                <c:pt idx="0">
+                  <c:v>Sky og plattform</c:v>
+                </c:pt>
+              </c:strCache>
+            </c:strRef>
+          </c:tx>
+          <c:spPr>
+            <a:ln w="25400">
+              <a:solidFill>
+                <a:srgbClr val="8F5265"/>
+              </a:solidFill>
+            </a:ln>
+          </c:spPr>
+          <c:marker>
+            <c:symbol val="circle"/>
+            <c:size val="5"/>
+            <c:spPr>
+              <a:solidFill>
+                <a:srgbClr val="8F5265"/>
+              </a:solidFill>
+              <a:ln>
+                <a:noFill/>
+              </a:ln>
+            </c:spPr>
+          </c:marker>
+          <c:cat>
+            <c:strRef>
+              <c:f>Sheet1!$A$2:$A$3</c:f>
+              <c:strCache>
+                <c:ptCount val="2"/>
+                <c:pt idx="0">
+                  <c:v>2023</c:v>
+                </c:pt>
+                <c:pt idx="1">
+                  <c:v>2025</c:v>
+                </c:pt>
+              </c:strCache>
+            </c:strRef>
+          </c:cat>
+          <c:val>
+            <c:numRef>
+              <c:f>Sheet1!$C$2:$C$3</c:f>
+              <c:numCache>
+                <c:formatCode>0</c:formatCode>
+                <c:ptCount val="2"/>
+                <c:pt idx="0">
+                  <c:v>28</c:v>
+                </c:pt>
+                <c:pt idx="1">
+                  <c:v>54</c:v>
+                </c:pt>
+              </c:numCache>
+            </c:numRef>
+          </c:val>
+          <c:smooth val="0"/>
+        </c:ser>
+        <c:ser>
+          <c:idx val="2"/>
+          <c:order val="2"/>
+          <c:tx>
+            <c:strRef>
+              <c:f>Sheet1!$D$1</c:f>
+              <c:strCache>
+                <c:ptCount val="1"/>
+                <c:pt idx="0">
+                  <c:v>Strategisk IT</c:v>
+                </c:pt>
+              </c:strCache>
+            </c:strRef>
+          </c:tx>
+          <c:spPr>
+            <a:ln w="25400">
+              <a:solidFill>
+                <a:srgbClr val="8F5265"/>
+              </a:solidFill>
+            </a:ln>
+          </c:spPr>
+          <c:marker>
+            <c:symbol val="circle"/>
+            <c:size val="5"/>
+            <c:spPr>
+              <a:solidFill>
+                <a:srgbClr val="8F5265"/>
+              </a:solidFill>
+              <a:ln>
+                <a:noFill/>
+              </a:ln>
+            </c:spPr>
+          </c:marker>
+          <c:cat>
+            <c:strRef>
+              <c:f>Sheet1!$A$2:$A$3</c:f>
+              <c:strCache>
+                <c:ptCount val="2"/>
+                <c:pt idx="0">
+                  <c:v>2023</c:v>
+                </c:pt>
+                <c:pt idx="1">
+                  <c:v>2025</c:v>
+                </c:pt>
+              </c:strCache>
+            </c:strRef>
+          </c:cat>
+          <c:val>
+            <c:numRef>
+              <c:f>Sheet1!$D$2:$D$3</c:f>
+              <c:numCache>
+                <c:formatCode>0</c:formatCode>
+                <c:ptCount val="2"/>
+                <c:pt idx="0">
+                  <c:v>12</c:v>
+                </c:pt>
+                <c:pt idx="1">
+                  <c:v>38</c:v>
+                </c:pt>
+              </c:numCache>
+            </c:numRef>
+          </c:val>
+          <c:smooth val="0"/>
+        </c:ser>
+        <c:ser>
+          <c:idx val="3"/>
+          <c:order val="3"/>
+          <c:tx>
+            <c:strRef>
+              <c:f>Sheet1!$E$1</c:f>
+              <c:strCache>
+                <c:ptCount val="1"/>
+                <c:pt idx="0">
+                  <c:v>Brukeropplevelse</c:v>
+                </c:pt>
+              </c:strCache>
+            </c:strRef>
+          </c:tx>
+          <c:spPr>
+            <a:ln w="25400">
+              <a:solidFill>
+                <a:srgbClr val="8F5265"/>
+              </a:solidFill>
+            </a:ln>
+          </c:spPr>
+          <c:marker>
+            <c:symbol val="circle"/>
+            <c:size val="5"/>
+            <c:spPr>
+              <a:solidFill>
+                <a:srgbClr val="8F5265"/>
+              </a:solidFill>
+              <a:ln>
+                <a:noFill/>
+              </a:ln>
+            </c:spPr>
+          </c:marker>
+          <c:cat>
+            <c:strRef>
+              <c:f>Sheet1!$A$2:$A$3</c:f>
+              <c:strCache>
+                <c:ptCount val="2"/>
+                <c:pt idx="0">
+                  <c:v>2023</c:v>
+                </c:pt>
+                <c:pt idx="1">
+                  <c:v>2025</c:v>
+                </c:pt>
+              </c:strCache>
+            </c:strRef>
+          </c:cat>
+          <c:val>
+            <c:numRef>
+              <c:f>Sheet1!$E$2:$E$3</c:f>
+              <c:numCache>
+                <c:formatCode>0</c:formatCode>
+                <c:ptCount val="2"/>
+                <c:pt idx="0">
+                  <c:v>9</c:v>
+                </c:pt>
+                <c:pt idx="1">
+                  <c:v>31</c:v>
+                </c:pt>
+              </c:numCache>
+            </c:numRef>
+          </c:val>
+          <c:smooth val="0"/>
+        </c:ser>
+        <c:ser>
+          <c:idx val="4"/>
+          <c:order val="4"/>
+          <c:tx>
+            <c:strRef>
+              <c:f>Sheet1!$F$1</c:f>
+              <c:strCache>
+                <c:ptCount val="1"/>
+                <c:pt idx="0">
+                  <c:v>Transformasjon</c:v>
+                </c:pt>
+              </c:strCache>
+            </c:strRef>
+          </c:tx>
+          <c:spPr>
+            <a:ln w="25400">
+              <a:solidFill>
+                <a:srgbClr val="8F5265"/>
+              </a:solidFill>
+            </a:ln>
+          </c:spPr>
+          <c:marker>
+            <c:symbol val="circle"/>
+            <c:size val="5"/>
+            <c:spPr>
+              <a:solidFill>
+                <a:srgbClr val="8F5265"/>
+              </a:solidFill>
+              <a:ln>
+                <a:noFill/>
+              </a:ln>
+            </c:spPr>
+          </c:marker>
+          <c:cat>
+            <c:strRef>
+              <c:f>Sheet1!$A$2:$A$3</c:f>
+              <c:strCache>
+                <c:ptCount val="2"/>
+                <c:pt idx="0">
+                  <c:v>2023</c:v>
+                </c:pt>
+                <c:pt idx="1">
+                  <c:v>2025</c:v>
+                </c:pt>
+              </c:strCache>
+            </c:strRef>
+          </c:cat>
+          <c:val>
+            <c:numRef>
+              <c:f>Sheet1!$F$2:$F$3</c:f>
+              <c:numCache>
+                <c:formatCode>0</c:formatCode>
+                <c:ptCount val="2"/>
+                <c:pt idx="0">
+                  <c:v>5</c:v>
+                </c:pt>
+                <c:pt idx="1">
+                  <c:v>22</c:v>
+                </c:pt>
+              </c:numCache>
+            </c:numRef>
+          </c:val>
+          <c:smooth val="0"/>
+        </c:ser>
+        <c:dLbls>
+          <c:numFmt formatCode="0&quot;%&quot;" sourceLinked="0"/>
+          <c:txPr>
+            <a:bodyPr/>
+            <a:lstStyle/>
+            <a:p>
+              <a:pPr>
+                <a:defRPr sz="1100">
+                  <a:solidFill>
+                    <a:srgbClr val="450D21"/>
+                  </a:solidFill>
+                  <a:latin typeface="DM Sans"/>
+                </a:defRPr>
+              </a:pPr>
+            </a:p>
+          </c:txPr>
+          <c:showLegendKey val="0"/>
+          <c:showVal val="1"/>
+          <c:showCatName val="0"/>
+          <c:showSerName val="0"/>
+          <c:showPercent val="0"/>
+          <c:showBubbleSize val="0"/>
+          <c:showLeaderLines val="1"/>
+        </c:dLbls>
+        <c:marker val="1"/>
+        <c:smooth val="0"/>
+        <c:axId val="2118791784"/>
+        <c:axId val="2140495176"/>
+      </c:lineChart>
+      <c:catAx>
+        <c:axId val="2118791784"/>
+        <c:scaling>
+          <c:orientation val="minMax"/>
+        </c:scaling>
+        <c:delete val="0"/>
+        <c:axPos val="b"/>
+        <c:majorTickMark val="none"/>
+        <c:minorTickMark val="none"/>
+        <c:tickLblPos val="nextTo"/>
+        <c:spPr>
+          <a:ln>
+            <a:noFill/>
+          </a:ln>
+        </c:spPr>
+        <c:txPr>
+          <a:bodyPr/>
+          <a:lstStyle/>
+          <a:p>
+            <a:pPr>
+              <a:defRPr sz="1100">
+                <a:solidFill>
+                  <a:srgbClr val="8F5265"/>
+                </a:solidFill>
+                <a:latin typeface="DM Sans"/>
+              </a:defRPr>
+            </a:pPr>
+          </a:p>
+        </c:txPr>
+        <c:crossAx val="2140495176"/>
+        <c:crosses val="autoZero"/>
+        <c:auto val="1"/>
+        <c:lblAlgn val="ctr"/>
+        <c:lblOffset val="100"/>
+        <c:noMultiLvlLbl val="0"/>
+      </c:catAx>
+      <c:valAx>
+        <c:axId val="2140495176"/>
+        <c:scaling/>
+        <c:delete/>
+        <c:axPos val="l"/>
+        <c:majorTickMark val="none"/>
+        <c:minorTickMark val="none"/>
+        <c:tickLblPos val="nextTo"/>
+        <c:spPr>
+          <a:ln>
+            <a:noFill/>
+          </a:ln>
+        </c:spPr>
+        <c:txPr>
+          <a:bodyPr/>
+          <a:lstStyle/>
+          <a:p>
+            <a:pPr>
+              <a:defRPr sz="1100">
+                <a:solidFill>
+                  <a:srgbClr val="8F5265"/>
+                </a:solidFill>
+                <a:latin typeface="DM Sans"/>
+              </a:defRPr>
+            </a:pPr>
+          </a:p>
+        </c:txPr>
+        <c:crossAx val="2118791784"/>
+        <c:crosses val="autoZero"/>
+      </c:valAx>
+      <c:spPr>
+        <a:noFill/>
+        <a:ln>
+          <a:noFill/>
+        </a:ln>
+      </c:spPr>
+    </c:plotArea>
+    <c:legend>
+      <c:legendPos val="b"/>
+      <c:layout/>
+      <c:overlay val="0"/>
+      <c:txPr>
+        <a:bodyPr/>
+        <a:lstStyle/>
+        <a:p>
+          <a:pPr>
+            <a:defRPr sz="1100">
+              <a:solidFill>
+                <a:srgbClr val="450D21"/>
+              </a:solidFill>
+            </a:defRPr>
+          </a:pPr>
+        </a:p>
+      </c:txPr>
+    </c:legend>
+    <c:plotVisOnly val="1"/>
+    <c:dispBlanksAs val="gap"/>
+    <c:showDLblsOverMax val="0"/>
+  </c:chart>
+  <c:spPr>
+    <a:noFill/>
+    <a:ln>
+      <a:noFill/>
+    </a:ln>
+  </c:spPr>
+  <c:txPr>
+    <a:bodyPr/>
+    <a:lstStyle/>
+    <a:p>
+      <a:pPr>
+        <a:defRPr sz="1100">
+          <a:solidFill>
+            <a:srgbClr val="450D21"/>
+          </a:solidFill>
+          <a:latin typeface="DM Sans"/>
+        </a:defRPr>
+      </a:pPr>
+      <a:endParaRPr lang="en-US"/>
+    </a:p>
+  </c:txPr>
+  <c:externalData r:id="rId1">
+    <c:autoUpdate val="0"/>
+  </c:externalData>
+</c:chartSpace>
+</file>
+
+<file path=ppt/charts/chart9.xml><?xml version="1.0" encoding="utf-8"?>
+<c:chartSpace xmlns:c="http://schemas.openxmlformats.org/drawingml/2006/chart" xmlns:a="http://schemas.openxmlformats.org/drawingml/2006/main" xmlns:r="http://schemas.openxmlformats.org/officeDocument/2006/relationships">
+  <c:chart>
+    <c:autoTitleDeleted val="1"/>
+    <c:plotArea>
+      <c:scatterChart>
+        <c:scatterStyle val="lineMarker"/>
+        <c:varyColors val="0"/>
+        <c:ser>
+          <c:idx val="0"/>
+          <c:order val="0"/>
+          <c:tx>
+            <c:strRef>
+              <c:f>Sheet1!$B$1</c:f>
+              <c:strCache>
+                <c:ptCount val="1"/>
+                <c:pt idx="0">
+                  <c:v>punkter</c:v>
+                </c:pt>
+              </c:strCache>
+            </c:strRef>
+          </c:tx>
+          <c:spPr>
+            <a:ln w="47625">
+              <a:noFill/>
+            </a:ln>
+          </c:spPr>
+          <c:marker>
+            <c:symbol val="circle"/>
+            <c:size val="6"/>
+            <c:spPr>
+              <a:solidFill>
+                <a:srgbClr val="450D21"/>
+              </a:solidFill>
+              <a:ln>
+                <a:noFill/>
+              </a:ln>
+            </c:spPr>
+          </c:marker>
+          <c:xVal>
+            <c:numRef>
+              <c:f>Sheet1!$A$2:$A$20</c:f>
+              <c:numCache>
+                <c:formatCode>0</c:formatCode>
+                <c:ptCount val="19"/>
+                <c:pt idx="0">
+                  <c:v>2</c:v>
+                </c:pt>
+                <c:pt idx="1">
+                  <c:v>3</c:v>
+                </c:pt>
+                <c:pt idx="2">
+                  <c:v>3</c:v>
+                </c:pt>
+                <c:pt idx="3">
+                  <c:v>4</c:v>
+                </c:pt>
+                <c:pt idx="4">
+                  <c:v>4</c:v>
+                </c:pt>
+                <c:pt idx="5">
+                  <c:v>5</c:v>
+                </c:pt>
+                <c:pt idx="6">
+                  <c:v>5</c:v>
+                </c:pt>
+                <c:pt idx="7">
+                  <c:v>6</c:v>
+                </c:pt>
+                <c:pt idx="8">
+                  <c:v>6</c:v>
+                </c:pt>
+                <c:pt idx="9">
+                  <c:v>7</c:v>
+                </c:pt>
+                <c:pt idx="10">
+                  <c:v>7</c:v>
+                </c:pt>
+                <c:pt idx="11">
+                  <c:v>8</c:v>
+                </c:pt>
+                <c:pt idx="12">
+                  <c:v>8</c:v>
+                </c:pt>
+                <c:pt idx="13">
+                  <c:v>9</c:v>
+                </c:pt>
+                <c:pt idx="14">
+                  <c:v>10</c:v>
+                </c:pt>
+                <c:pt idx="15">
+                  <c:v>11</c:v>
+                </c:pt>
+                <c:pt idx="16">
+                  <c:v>12</c:v>
+                </c:pt>
+                <c:pt idx="17">
+                  <c:v>4</c:v>
+                </c:pt>
+                <c:pt idx="18">
+                  <c:v>9</c:v>
+                </c:pt>
+              </c:numCache>
+            </c:numRef>
+          </c:xVal>
+          <c:yVal>
+            <c:numRef>
+              <c:f>Sheet1!$B$2:$B$20</c:f>
+              <c:numCache>
+                <c:formatCode>0</c:formatCode>
+                <c:ptCount val="19"/>
+                <c:pt idx="0">
+                  <c:v>6</c:v>
+                </c:pt>
+                <c:pt idx="1">
+                  <c:v>7</c:v>
+                </c:pt>
+                <c:pt idx="2">
+                  <c:v>10</c:v>
+                </c:pt>
+                <c:pt idx="3">
+                  <c:v>9</c:v>
+                </c:pt>
+                <c:pt idx="4">
+                  <c:v>14</c:v>
+                </c:pt>
+                <c:pt idx="5">
+                  <c:v>12</c:v>
+                </c:pt>
+                <c:pt idx="6">
+                  <c:v>16</c:v>
+                </c:pt>
+                <c:pt idx="7">
+                  <c:v>13</c:v>
+                </c:pt>
+                <c:pt idx="8">
+                  <c:v>20</c:v>
+                </c:pt>
+                <c:pt idx="9">
+                  <c:v>18</c:v>
+                </c:pt>
+                <c:pt idx="10">
+                  <c:v>24</c:v>
+                </c:pt>
+                <c:pt idx="11">
+                  <c:v>19</c:v>
+                </c:pt>
+                <c:pt idx="12">
+                  <c:v>28</c:v>
+                </c:pt>
+                <c:pt idx="13">
+                  <c:v>26</c:v>
+                </c:pt>
+                <c:pt idx="14">
+                  <c:v>31</c:v>
+                </c:pt>
+                <c:pt idx="15">
+                  <c:v>38</c:v>
+                </c:pt>
+                <c:pt idx="16">
+                  <c:v>34</c:v>
+                </c:pt>
+                <c:pt idx="17">
+                  <c:v>8</c:v>
+                </c:pt>
+                <c:pt idx="18">
+                  <c:v>22</c:v>
+                </c:pt>
+              </c:numCache>
+            </c:numRef>
+          </c:yVal>
+          <c:smooth val="0"/>
+        </c:ser>
+        <c:ser>
+          <c:idx val="1"/>
+          <c:order val="1"/>
+          <c:tx>
+            <c:strRef>
+              <c:f>Sheet1!$B$22</c:f>
+              <c:strCache>
+                <c:ptCount val="1"/>
+                <c:pt idx="0">
+                  <c:v>uthevet</c:v>
+                </c:pt>
+              </c:strCache>
+            </c:strRef>
+          </c:tx>
+          <c:spPr>
+            <a:ln w="47625">
+              <a:noFill/>
+            </a:ln>
+          </c:spPr>
+          <c:marker>
+            <c:symbol val="circle"/>
+            <c:size val="11"/>
+            <c:spPr>
+              <a:solidFill>
+                <a:srgbClr val="FF303B"/>
+              </a:solidFill>
+              <a:ln>
+                <a:solidFill>
+                  <a:srgbClr val="FF303B"/>
+                </a:solidFill>
+              </a:ln>
+            </c:spPr>
+          </c:marker>
+          <c:xVal>
+            <c:numRef>
+              <c:f>Sheet1!$A$23:$A$23</c:f>
+              <c:numCache>
+                <c:formatCode>0</c:formatCode>
+                <c:ptCount val="1"/>
+                <c:pt idx="0">
+                  <c:v>5</c:v>
+                </c:pt>
+              </c:numCache>
+            </c:numRef>
+          </c:xVal>
+          <c:yVal>
+            <c:numRef>
+              <c:f>Sheet1!$B$23:$B$23</c:f>
+              <c:numCache>
+                <c:formatCode>0</c:formatCode>
+                <c:ptCount val="1"/>
+                <c:pt idx="0">
+                  <c:v>11</c:v>
+                </c:pt>
+              </c:numCache>
+            </c:numRef>
+          </c:yVal>
+          <c:smooth val="0"/>
+        </c:ser>
+        <c:axId val="-2128940872"/>
+        <c:axId val="-2129643912"/>
+      </c:scatterChart>
+      <c:valAx>
+        <c:axId val="-2128940872"/>
+        <c:scaling>
+          <c:orientation val="minMax"/>
+        </c:scaling>
+        <c:delete val="0"/>
+        <c:axPos val="b"/>
+        <c:title>
+          <c:tx>
+            <c:rich>
+              <a:bodyPr/>
+              <a:lstStyle/>
+              <a:p>
+                <a:r>
+                  <a:rPr sz="1100" b="0">
+                    <a:solidFill>
+                      <a:srgbClr val="8F5265"/>
+                    </a:solidFill>
+                    <a:latin typeface="DM Sans"/>
+                  </a:rPr>
+                  <a:t>Teamstørrelse</a:t>
+                </a:r>
+              </a:p>
+            </c:rich>
+          </c:tx>
+          <c:layout/>
+          <c:overlay val="0"/>
+        </c:title>
+        <c:numFmt formatCode="General" sourceLinked="1"/>
+        <c:majorTickMark val="none"/>
+        <c:minorTickMark val="none"/>
+        <c:tickLblPos val="nextTo"/>
+        <c:spPr>
+          <a:ln>
+            <a:noFill/>
+          </a:ln>
+        </c:spPr>
+        <c:txPr>
+          <a:bodyPr/>
+          <a:lstStyle/>
+          <a:p>
+            <a:pPr>
+              <a:defRPr sz="1100">
+                <a:solidFill>
+                  <a:srgbClr val="8F5265"/>
+                </a:solidFill>
+                <a:latin typeface="DM Sans"/>
+              </a:defRPr>
+            </a:pPr>
+          </a:p>
+        </c:txPr>
+        <c:crossAx val="-2129643912"/>
+        <c:crosses val="autoZero"/>
+        <c:crossBetween val="midCat"/>
+      </c:valAx>
+      <c:valAx>
+        <c:axId val="-2129643912"/>
+        <c:scaling>
+          <c:orientation val="minMax"/>
+        </c:scaling>
+        <c:delete val="0"/>
+        <c:axPos val="l"/>
+        <c:title>
+          <c:tx>
+            <c:rich>
+              <a:bodyPr/>
+              <a:lstStyle/>
+              <a:p>
+                <a:r>
+                  <a:rPr sz="1100" b="0">
+                    <a:solidFill>
+                      <a:srgbClr val="8F5265"/>
+                    </a:solidFill>
+                    <a:latin typeface="DM Sans"/>
+                  </a:rPr>
+                  <a:t>Varighet (uker)</a:t>
+                </a:r>
+              </a:p>
+            </c:rich>
+          </c:tx>
+          <c:layout/>
+          <c:overlay val="0"/>
+        </c:title>
+        <c:numFmt formatCode="General" sourceLinked="1"/>
+        <c:majorTickMark val="none"/>
+        <c:minorTickMark val="none"/>
+        <c:tickLblPos val="nextTo"/>
+        <c:spPr>
+          <a:ln>
+            <a:noFill/>
+          </a:ln>
+        </c:spPr>
+        <c:txPr>
+          <a:bodyPr/>
+          <a:lstStyle/>
+          <a:p>
+            <a:pPr>
+              <a:defRPr sz="1100">
+                <a:solidFill>
+                  <a:srgbClr val="8F5265"/>
+                </a:solidFill>
+                <a:latin typeface="DM Sans"/>
+              </a:defRPr>
+            </a:pPr>
+          </a:p>
+        </c:txPr>
+        <c:crossAx val="-2128940872"/>
+        <c:crosses val="autoZero"/>
+        <c:crossBetween val="midCat"/>
+      </c:valAx>
+      <c:spPr>
+        <a:noFill/>
+        <a:ln>
+          <a:noFill/>
+        </a:ln>
+      </c:spPr>
+    </c:plotArea>
+    <c:plotVisOnly val="1"/>
+    <c:dispBlanksAs val="gap"/>
+    <c:showDLblsOverMax val="0"/>
+  </c:chart>
+  <c:spPr>
+    <a:noFill/>
+    <a:ln>
+      <a:noFill/>
+    </a:ln>
+  </c:spPr>
+  <c:txPr>
+    <a:bodyPr/>
+    <a:lstStyle/>
+    <a:p>
+      <a:pPr>
+        <a:defRPr sz="1100">
+          <a:solidFill>
+            <a:srgbClr val="450D21"/>
+          </a:solidFill>
+          <a:latin typeface="DM Sans"/>
+        </a:defRPr>
+      </a:pPr>
+      <a:endParaRPr lang="en-US"/>
+    </a:p>
+  </c:txPr>
+  <c:externalData r:id="rId1">
+    <c:autoUpdate val="0"/>
+  </c:externalData>
+</c:chartSpace>
 </file>
 
 <file path=ppt/slideLayouts/slideLayout1.xml><?xml version="1.0" encoding="utf-8"?>
@@ -4548,7 +8938,7 @@
     <p:bg>
       <p:bgPr>
         <a:solidFill>
-          <a:srgbClr val="FF303B"/>
+          <a:srgbClr val="450D21"/>
         </a:solidFill>
         <a:effectLst/>
       </p:bgPr>
@@ -4560,9 +8950,141 @@
         <p:nvPr/>
       </p:nvGrpSpPr>
       <p:grpSpPr/>
+      <p:sp>
+        <p:nvSpPr>
+          <p:cNvPr id="2" name="Rounded Rectangle 1"/>
+          <p:cNvSpPr/>
+          <p:nvPr/>
+        </p:nvSpPr>
+        <p:spPr>
+          <a:xfrm>
+            <a:off x="777240" y="502920"/>
+            <a:ext cx="274320" cy="27940"/>
+          </a:xfrm>
+          <a:prstGeom prst="roundRect">
+            <a:avLst/>
+          </a:prstGeom>
+          <a:solidFill>
+            <a:srgbClr val="FBF0E5"/>
+          </a:solidFill>
+          <a:ln>
+            <a:noFill/>
+          </a:ln>
+          <a:effectLst/>
+        </p:spPr>
+        <p:style>
+          <a:lnRef idx="1">
+            <a:schemeClr val="accent1"/>
+          </a:lnRef>
+          <a:fillRef idx="3">
+            <a:schemeClr val="accent1"/>
+          </a:fillRef>
+          <a:effectRef idx="2">
+            <a:schemeClr val="accent1"/>
+          </a:effectRef>
+          <a:fontRef idx="minor">
+            <a:schemeClr val="lt1"/>
+          </a:fontRef>
+        </p:style>
+        <p:txBody>
+          <a:bodyPr rtlCol="0" anchor="ctr"/>
+          <a:lstStyle/>
+          <a:p>
+            <a:pPr algn="ctr"/>
+          </a:p>
+        </p:txBody>
+      </p:sp>
+      <p:sp>
+        <p:nvSpPr>
+          <p:cNvPr id="3" name="Rounded Rectangle 2"/>
+          <p:cNvSpPr/>
+          <p:nvPr/>
+        </p:nvSpPr>
+        <p:spPr>
+          <a:xfrm>
+            <a:off x="777240" y="557784"/>
+            <a:ext cx="274320" cy="27940"/>
+          </a:xfrm>
+          <a:prstGeom prst="roundRect">
+            <a:avLst/>
+          </a:prstGeom>
+          <a:solidFill>
+            <a:srgbClr val="FBF0E5"/>
+          </a:solidFill>
+          <a:ln>
+            <a:noFill/>
+          </a:ln>
+          <a:effectLst/>
+        </p:spPr>
+        <p:style>
+          <a:lnRef idx="1">
+            <a:schemeClr val="accent1"/>
+          </a:lnRef>
+          <a:fillRef idx="3">
+            <a:schemeClr val="accent1"/>
+          </a:fillRef>
+          <a:effectRef idx="2">
+            <a:schemeClr val="accent1"/>
+          </a:effectRef>
+          <a:fontRef idx="minor">
+            <a:schemeClr val="lt1"/>
+          </a:fontRef>
+        </p:style>
+        <p:txBody>
+          <a:bodyPr rtlCol="0" anchor="ctr"/>
+          <a:lstStyle/>
+          <a:p>
+            <a:pPr algn="ctr"/>
+          </a:p>
+        </p:txBody>
+      </p:sp>
+      <p:sp>
+        <p:nvSpPr>
+          <p:cNvPr id="4" name="Rounded Rectangle 3"/>
+          <p:cNvSpPr/>
+          <p:nvPr/>
+        </p:nvSpPr>
+        <p:spPr>
+          <a:xfrm>
+            <a:off x="777240" y="612648"/>
+            <a:ext cx="274320" cy="27940"/>
+          </a:xfrm>
+          <a:prstGeom prst="roundRect">
+            <a:avLst/>
+          </a:prstGeom>
+          <a:solidFill>
+            <a:srgbClr val="FBF0E5"/>
+          </a:solidFill>
+          <a:ln>
+            <a:noFill/>
+          </a:ln>
+          <a:effectLst/>
+        </p:spPr>
+        <p:style>
+          <a:lnRef idx="1">
+            <a:schemeClr val="accent1"/>
+          </a:lnRef>
+          <a:fillRef idx="3">
+            <a:schemeClr val="accent1"/>
+          </a:fillRef>
+          <a:effectRef idx="2">
+            <a:schemeClr val="accent1"/>
+          </a:effectRef>
+          <a:fontRef idx="minor">
+            <a:schemeClr val="lt1"/>
+          </a:fontRef>
+        </p:style>
+        <p:txBody>
+          <a:bodyPr rtlCol="0" anchor="ctr"/>
+          <a:lstStyle/>
+          <a:p>
+            <a:pPr algn="ctr"/>
+          </a:p>
+        </p:txBody>
+      </p:sp>
       <p:pic>
         <p:nvPicPr>
-          <p:cNvPr id="2" name="Picture 1" descr="miles-logo-cream.png"/>
+          <p:cNvPr id="5" name="Picture 4" descr="miles-logo-cream.png"/>
           <p:cNvPicPr>
             <a:picLocks noChangeAspect="1"/>
           </p:cNvPicPr>
@@ -4576,8 +9098,314 @@
         </p:blipFill>
         <p:spPr>
           <a:xfrm>
+            <a:off x="10362895" y="475488"/>
+            <a:ext cx="1051560" cy="330192"/>
+          </a:xfrm>
+          <a:prstGeom prst="rect">
+            <a:avLst/>
+          </a:prstGeom>
+        </p:spPr>
+      </p:pic>
+      <p:sp>
+        <p:nvSpPr>
+          <p:cNvPr id="6" name="Rounded Rectangle 5"/>
+          <p:cNvSpPr/>
+          <p:nvPr/>
+        </p:nvSpPr>
+        <p:spPr>
+          <a:xfrm>
+            <a:off x="2377440" y="2468880"/>
+            <a:ext cx="7406640" cy="1920240"/>
+          </a:xfrm>
+          <a:prstGeom prst="roundRect">
+            <a:avLst>
+              <a:gd name="adj" fmla="val 8000"/>
+            </a:avLst>
+          </a:prstGeom>
+          <a:noFill/>
+          <a:ln w="19050">
+            <a:solidFill>
+              <a:srgbClr val="FBF0E5"/>
+            </a:solidFill>
+          </a:ln>
+          <a:effectLst/>
+        </p:spPr>
+        <p:style>
+          <a:lnRef idx="1">
+            <a:schemeClr val="accent1"/>
+          </a:lnRef>
+          <a:fillRef idx="3">
+            <a:schemeClr val="accent1"/>
+          </a:fillRef>
+          <a:effectRef idx="2">
+            <a:schemeClr val="accent1"/>
+          </a:effectRef>
+          <a:fontRef idx="minor">
+            <a:schemeClr val="lt1"/>
+          </a:fontRef>
+        </p:style>
+        <p:txBody>
+          <a:bodyPr rtlCol="0" anchor="ctr"/>
+          <a:lstStyle/>
+          <a:p>
+            <a:pPr algn="ctr"/>
+          </a:p>
+        </p:txBody>
+      </p:sp>
+      <p:sp>
+        <p:nvSpPr>
+          <p:cNvPr id="7" name="TextBox 6"/>
+          <p:cNvSpPr txBox="1"/>
+          <p:nvPr/>
+        </p:nvSpPr>
+        <p:spPr>
+          <a:xfrm>
+            <a:off x="2377440" y="2697480"/>
+            <a:ext cx="7406640" cy="365760"/>
+          </a:xfrm>
+          <a:prstGeom prst="rect">
+            <a:avLst/>
+          </a:prstGeom>
+          <a:noFill/>
+        </p:spPr>
+        <p:txBody>
+          <a:bodyPr wrap="square" anchor="t">
+            <a:noAutofit/>
+          </a:bodyPr>
+          <a:lstStyle/>
+          <a:p>
+            <a:pPr algn="ctr">
+              <a:lnSpc>
+                <a:spcPct val="120000"/>
+              </a:lnSpc>
+            </a:pPr>
+            <a:r>
+              <a:rPr sz="1400" b="0" i="0">
+                <a:solidFill>
+                  <a:srgbClr val="FBF0E5"/>
+                </a:solidFill>
+                <a:latin typeface="DM Sans"/>
+              </a:rPr>
+              <a:t>Kapittel 03</a:t>
+            </a:r>
+          </a:p>
+        </p:txBody>
+      </p:sp>
+      <p:sp>
+        <p:nvSpPr>
+          <p:cNvPr id="8" name="TextBox 7"/>
+          <p:cNvSpPr txBox="1"/>
+          <p:nvPr/>
+        </p:nvSpPr>
+        <p:spPr>
+          <a:xfrm>
+            <a:off x="2377440" y="3154680"/>
+            <a:ext cx="7406640" cy="1097280"/>
+          </a:xfrm>
+          <a:prstGeom prst="rect">
+            <a:avLst/>
+          </a:prstGeom>
+          <a:noFill/>
+        </p:spPr>
+        <p:txBody>
+          <a:bodyPr wrap="square" anchor="t">
+            <a:noAutofit/>
+          </a:bodyPr>
+          <a:lstStyle/>
+          <a:p>
+            <a:pPr algn="ctr">
+              <a:lnSpc>
+                <a:spcPct val="120000"/>
+              </a:lnSpc>
+            </a:pPr>
+            <a:r>
+              <a:rPr sz="4200" b="0" i="0">
+                <a:solidFill>
+                  <a:srgbClr val="FBF0E5"/>
+                </a:solidFill>
+                <a:latin typeface="Manrope"/>
+              </a:rPr>
+              <a:t>Datagrafikk</a:t>
+            </a:r>
+          </a:p>
+        </p:txBody>
+      </p:sp>
+    </p:spTree>
+  </p:cSld>
+  <p:clrMapOvr>
+    <a:masterClrMapping/>
+  </p:clrMapOvr>
+</p:sld>
+</file>
+
+<file path=ppt/slides/slide13.xml><?xml version="1.0" encoding="utf-8"?>
+<p:sld xmlns:a="http://schemas.openxmlformats.org/drawingml/2006/main" xmlns:p="http://schemas.openxmlformats.org/presentationml/2006/main" xmlns:r="http://schemas.openxmlformats.org/officeDocument/2006/relationships">
+  <p:cSld>
+    <p:bg>
+      <p:bgPr>
+        <a:solidFill>
+          <a:srgbClr val="FBF0E5"/>
+        </a:solidFill>
+        <a:effectLst/>
+      </p:bgPr>
+    </p:bg>
+    <p:spTree>
+      <p:nvGrpSpPr>
+        <p:cNvPr id="1" name=""/>
+        <p:cNvGrpSpPr/>
+        <p:nvPr/>
+      </p:nvGrpSpPr>
+      <p:grpSpPr/>
+      <p:sp>
+        <p:nvSpPr>
+          <p:cNvPr id="2" name="Rounded Rectangle 1"/>
+          <p:cNvSpPr/>
+          <p:nvPr/>
+        </p:nvSpPr>
+        <p:spPr>
+          <a:xfrm>
             <a:off x="777240" y="502920"/>
-            <a:ext cx="1463040" cy="459397"/>
+            <a:ext cx="274320" cy="27940"/>
+          </a:xfrm>
+          <a:prstGeom prst="roundRect">
+            <a:avLst/>
+          </a:prstGeom>
+          <a:solidFill>
+            <a:srgbClr val="450D21"/>
+          </a:solidFill>
+          <a:ln>
+            <a:noFill/>
+          </a:ln>
+          <a:effectLst/>
+        </p:spPr>
+        <p:style>
+          <a:lnRef idx="1">
+            <a:schemeClr val="accent1"/>
+          </a:lnRef>
+          <a:fillRef idx="3">
+            <a:schemeClr val="accent1"/>
+          </a:fillRef>
+          <a:effectRef idx="2">
+            <a:schemeClr val="accent1"/>
+          </a:effectRef>
+          <a:fontRef idx="minor">
+            <a:schemeClr val="lt1"/>
+          </a:fontRef>
+        </p:style>
+        <p:txBody>
+          <a:bodyPr rtlCol="0" anchor="ctr"/>
+          <a:lstStyle/>
+          <a:p>
+            <a:pPr algn="ctr"/>
+          </a:p>
+        </p:txBody>
+      </p:sp>
+      <p:sp>
+        <p:nvSpPr>
+          <p:cNvPr id="3" name="Rounded Rectangle 2"/>
+          <p:cNvSpPr/>
+          <p:nvPr/>
+        </p:nvSpPr>
+        <p:spPr>
+          <a:xfrm>
+            <a:off x="777240" y="557784"/>
+            <a:ext cx="274320" cy="27940"/>
+          </a:xfrm>
+          <a:prstGeom prst="roundRect">
+            <a:avLst/>
+          </a:prstGeom>
+          <a:solidFill>
+            <a:srgbClr val="450D21"/>
+          </a:solidFill>
+          <a:ln>
+            <a:noFill/>
+          </a:ln>
+          <a:effectLst/>
+        </p:spPr>
+        <p:style>
+          <a:lnRef idx="1">
+            <a:schemeClr val="accent1"/>
+          </a:lnRef>
+          <a:fillRef idx="3">
+            <a:schemeClr val="accent1"/>
+          </a:fillRef>
+          <a:effectRef idx="2">
+            <a:schemeClr val="accent1"/>
+          </a:effectRef>
+          <a:fontRef idx="minor">
+            <a:schemeClr val="lt1"/>
+          </a:fontRef>
+        </p:style>
+        <p:txBody>
+          <a:bodyPr rtlCol="0" anchor="ctr"/>
+          <a:lstStyle/>
+          <a:p>
+            <a:pPr algn="ctr"/>
+          </a:p>
+        </p:txBody>
+      </p:sp>
+      <p:sp>
+        <p:nvSpPr>
+          <p:cNvPr id="4" name="Rounded Rectangle 3"/>
+          <p:cNvSpPr/>
+          <p:nvPr/>
+        </p:nvSpPr>
+        <p:spPr>
+          <a:xfrm>
+            <a:off x="777240" y="612648"/>
+            <a:ext cx="274320" cy="27940"/>
+          </a:xfrm>
+          <a:prstGeom prst="roundRect">
+            <a:avLst/>
+          </a:prstGeom>
+          <a:solidFill>
+            <a:srgbClr val="450D21"/>
+          </a:solidFill>
+          <a:ln>
+            <a:noFill/>
+          </a:ln>
+          <a:effectLst/>
+        </p:spPr>
+        <p:style>
+          <a:lnRef idx="1">
+            <a:schemeClr val="accent1"/>
+          </a:lnRef>
+          <a:fillRef idx="3">
+            <a:schemeClr val="accent1"/>
+          </a:fillRef>
+          <a:effectRef idx="2">
+            <a:schemeClr val="accent1"/>
+          </a:effectRef>
+          <a:fontRef idx="minor">
+            <a:schemeClr val="lt1"/>
+          </a:fontRef>
+        </p:style>
+        <p:txBody>
+          <a:bodyPr rtlCol="0" anchor="ctr"/>
+          <a:lstStyle/>
+          <a:p>
+            <a:pPr algn="ctr"/>
+          </a:p>
+        </p:txBody>
+      </p:sp>
+      <p:pic>
+        <p:nvPicPr>
+          <p:cNvPr id="5" name="Picture 4" descr="miles-logo-red.png"/>
+          <p:cNvPicPr>
+            <a:picLocks noChangeAspect="1"/>
+          </p:cNvPicPr>
+          <p:nvPr/>
+        </p:nvPicPr>
+        <p:blipFill>
+          <a:blip r:embed="rId2"/>
+          <a:stretch>
+            <a:fillRect/>
+          </a:stretch>
+        </p:blipFill>
+        <p:spPr>
+          <a:xfrm>
+            <a:off x="10362895" y="475488"/>
+            <a:ext cx="1051560" cy="355913"/>
           </a:xfrm>
           <a:prstGeom prst="rect">
             <a:avLst/>
@@ -4586,14 +9414,14 @@
       </p:pic>
       <p:sp>
         <p:nvSpPr>
-          <p:cNvPr id="3" name="TextBox 2"/>
+          <p:cNvPr id="6" name="TextBox 5"/>
           <p:cNvSpPr txBox="1"/>
           <p:nvPr/>
         </p:nvSpPr>
         <p:spPr>
           <a:xfrm>
-            <a:off x="777240" y="3566160"/>
-            <a:ext cx="9144000" cy="1097280"/>
+            <a:off x="777240" y="960120"/>
+            <a:ext cx="5486400" cy="457200"/>
           </a:xfrm>
           <a:prstGeom prst="rect">
             <a:avLst/>
@@ -4612,35 +9440,521 @@
               </a:lnSpc>
             </a:pPr>
             <a:r>
-              <a:rPr sz="4800" b="0" i="0">
-                <a:solidFill>
-                  <a:srgbClr val="FBF0E5"/>
+              <a:rPr sz="1500" b="0" i="1">
+                <a:solidFill>
+                  <a:srgbClr val="FF303B"/>
                 </a:solidFill>
                 <a:latin typeface="Manrope"/>
               </a:rPr>
-              <a:t>Takk for tiden din! :)</a:t>
+              <a:t>Nøkkeltall</a:t>
             </a:r>
           </a:p>
         </p:txBody>
       </p:sp>
       <p:sp>
         <p:nvSpPr>
-          <p:cNvPr id="4" name="Rounded Rectangle 3"/>
+          <p:cNvPr id="7" name="TextBox 6"/>
+          <p:cNvSpPr txBox="1"/>
+          <p:nvPr/>
+        </p:nvSpPr>
+        <p:spPr>
+          <a:xfrm>
+            <a:off x="777240" y="1344168"/>
+            <a:ext cx="10058400" cy="822960"/>
+          </a:xfrm>
+          <a:prstGeom prst="rect">
+            <a:avLst/>
+          </a:prstGeom>
+          <a:noFill/>
+        </p:spPr>
+        <p:txBody>
+          <a:bodyPr wrap="square" anchor="t">
+            <a:noAutofit/>
+          </a:bodyPr>
+          <a:lstStyle/>
+          <a:p>
+            <a:pPr algn="l">
+              <a:lnSpc>
+                <a:spcPct val="120000"/>
+              </a:lnSpc>
+            </a:pPr>
+            <a:r>
+              <a:rPr sz="3000" b="1" i="0">
+                <a:solidFill>
+                  <a:srgbClr val="450D21"/>
+                </a:solidFill>
+                <a:latin typeface="Manrope"/>
+              </a:rPr>
+              <a:t>Siste 8 kvartaler</a:t>
+            </a:r>
+          </a:p>
+        </p:txBody>
+      </p:sp>
+      <p:sp>
+        <p:nvSpPr>
+          <p:cNvPr id="8" name="TextBox 7"/>
+          <p:cNvSpPr txBox="1"/>
+          <p:nvPr/>
+        </p:nvSpPr>
+        <p:spPr>
+          <a:xfrm>
+            <a:off x="777240" y="2240280"/>
+            <a:ext cx="3657600" cy="457200"/>
+          </a:xfrm>
+          <a:prstGeom prst="rect">
+            <a:avLst/>
+          </a:prstGeom>
+          <a:noFill/>
+        </p:spPr>
+        <p:txBody>
+          <a:bodyPr wrap="square" anchor="t">
+            <a:noAutofit/>
+          </a:bodyPr>
+          <a:lstStyle/>
+          <a:p>
+            <a:pPr algn="l">
+              <a:lnSpc>
+                <a:spcPct val="120000"/>
+              </a:lnSpc>
+            </a:pPr>
+            <a:r>
+              <a:rPr sz="2000" b="0" i="0">
+                <a:solidFill>
+                  <a:srgbClr val="450D21"/>
+                </a:solidFill>
+                <a:latin typeface="DM Sans"/>
+              </a:rPr>
+              <a:t>Kundetilfredshet</a:t>
+            </a:r>
+          </a:p>
+        </p:txBody>
+      </p:sp>
+      <p:graphicFrame>
+        <p:nvGraphicFramePr>
+          <p:cNvPr id="9" name="Chart 8"/>
+          <p:cNvGraphicFramePr>
+            <a:graphicFrameLocks noGrp="1"/>
+          </p:cNvGraphicFramePr>
+          <p:nvPr/>
+        </p:nvGraphicFramePr>
+        <p:xfrm>
+          <a:off x="4937760" y="2103120"/>
+          <a:ext cx="3840480" cy="640080"/>
+        </p:xfrm>
+        <a:graphic>
+          <a:graphicData uri="http://schemas.openxmlformats.org/drawingml/2006/chart">
+            <c:chart xmlns:c="http://schemas.openxmlformats.org/drawingml/2006/chart" r:id="rId3"/>
+          </a:graphicData>
+        </a:graphic>
+      </p:graphicFrame>
+      <p:sp>
+        <p:nvSpPr>
+          <p:cNvPr id="10" name="TextBox 9"/>
+          <p:cNvSpPr txBox="1"/>
+          <p:nvPr/>
+        </p:nvSpPr>
+        <p:spPr>
+          <a:xfrm>
+            <a:off x="9144000" y="2212848"/>
+            <a:ext cx="2286000" cy="457200"/>
+          </a:xfrm>
+          <a:prstGeom prst="rect">
+            <a:avLst/>
+          </a:prstGeom>
+          <a:noFill/>
+        </p:spPr>
+        <p:txBody>
+          <a:bodyPr wrap="square" anchor="t">
+            <a:noAutofit/>
+          </a:bodyPr>
+          <a:lstStyle/>
+          <a:p>
+            <a:pPr algn="r">
+              <a:lnSpc>
+                <a:spcPct val="120000"/>
+              </a:lnSpc>
+            </a:pPr>
+            <a:r>
+              <a:rPr sz="2200" b="1" i="0">
+                <a:solidFill>
+                  <a:srgbClr val="450D21"/>
+                </a:solidFill>
+                <a:latin typeface="DM Sans"/>
+              </a:rPr>
+              <a:t>4,7 / 5</a:t>
+            </a:r>
+          </a:p>
+        </p:txBody>
+      </p:sp>
+      <p:sp>
+        <p:nvSpPr>
+          <p:cNvPr id="11" name="TextBox 10"/>
+          <p:cNvSpPr txBox="1"/>
+          <p:nvPr/>
+        </p:nvSpPr>
+        <p:spPr>
+          <a:xfrm>
+            <a:off x="777240" y="3200399"/>
+            <a:ext cx="3657600" cy="457200"/>
+          </a:xfrm>
+          <a:prstGeom prst="rect">
+            <a:avLst/>
+          </a:prstGeom>
+          <a:noFill/>
+        </p:spPr>
+        <p:txBody>
+          <a:bodyPr wrap="square" anchor="t">
+            <a:noAutofit/>
+          </a:bodyPr>
+          <a:lstStyle/>
+          <a:p>
+            <a:pPr algn="l">
+              <a:lnSpc>
+                <a:spcPct val="120000"/>
+              </a:lnSpc>
+            </a:pPr>
+            <a:r>
+              <a:rPr sz="2000" b="0" i="0">
+                <a:solidFill>
+                  <a:srgbClr val="450D21"/>
+                </a:solidFill>
+                <a:latin typeface="DM Sans"/>
+              </a:rPr>
+              <a:t>Ansatte totalt</a:t>
+            </a:r>
+          </a:p>
+        </p:txBody>
+      </p:sp>
+      <p:graphicFrame>
+        <p:nvGraphicFramePr>
+          <p:cNvPr id="12" name="Chart 11"/>
+          <p:cNvGraphicFramePr>
+            <a:graphicFrameLocks noGrp="1"/>
+          </p:cNvGraphicFramePr>
+          <p:nvPr/>
+        </p:nvGraphicFramePr>
+        <p:xfrm>
+          <a:off x="4937760" y="3063239"/>
+          <a:ext cx="3840480" cy="640080"/>
+        </p:xfrm>
+        <a:graphic>
+          <a:graphicData uri="http://schemas.openxmlformats.org/drawingml/2006/chart">
+            <c:chart xmlns:c="http://schemas.openxmlformats.org/drawingml/2006/chart" r:id="rId4"/>
+          </a:graphicData>
+        </a:graphic>
+      </p:graphicFrame>
+      <p:sp>
+        <p:nvSpPr>
+          <p:cNvPr id="13" name="TextBox 12"/>
+          <p:cNvSpPr txBox="1"/>
+          <p:nvPr/>
+        </p:nvSpPr>
+        <p:spPr>
+          <a:xfrm>
+            <a:off x="9144000" y="3172967"/>
+            <a:ext cx="2286000" cy="457200"/>
+          </a:xfrm>
+          <a:prstGeom prst="rect">
+            <a:avLst/>
+          </a:prstGeom>
+          <a:noFill/>
+        </p:spPr>
+        <p:txBody>
+          <a:bodyPr wrap="square" anchor="t">
+            <a:noAutofit/>
+          </a:bodyPr>
+          <a:lstStyle/>
+          <a:p>
+            <a:pPr algn="r">
+              <a:lnSpc>
+                <a:spcPct val="120000"/>
+              </a:lnSpc>
+            </a:pPr>
+            <a:r>
+              <a:rPr sz="2200" b="1" i="0">
+                <a:solidFill>
+                  <a:srgbClr val="450D21"/>
+                </a:solidFill>
+                <a:latin typeface="DM Sans"/>
+              </a:rPr>
+              <a:t>297</a:t>
+            </a:r>
+          </a:p>
+        </p:txBody>
+      </p:sp>
+      <p:sp>
+        <p:nvSpPr>
+          <p:cNvPr id="14" name="TextBox 13"/>
+          <p:cNvSpPr txBox="1"/>
+          <p:nvPr/>
+        </p:nvSpPr>
+        <p:spPr>
+          <a:xfrm>
+            <a:off x="777240" y="4160520"/>
+            <a:ext cx="3657600" cy="457200"/>
+          </a:xfrm>
+          <a:prstGeom prst="rect">
+            <a:avLst/>
+          </a:prstGeom>
+          <a:noFill/>
+        </p:spPr>
+        <p:txBody>
+          <a:bodyPr wrap="square" anchor="t">
+            <a:noAutofit/>
+          </a:bodyPr>
+          <a:lstStyle/>
+          <a:p>
+            <a:pPr algn="l">
+              <a:lnSpc>
+                <a:spcPct val="120000"/>
+              </a:lnSpc>
+            </a:pPr>
+            <a:r>
+              <a:rPr sz="2000" b="0" i="0">
+                <a:solidFill>
+                  <a:srgbClr val="450D21"/>
+                </a:solidFill>
+                <a:latin typeface="DM Sans"/>
+              </a:rPr>
+              <a:t>Beleggsgrad</a:t>
+            </a:r>
+          </a:p>
+        </p:txBody>
+      </p:sp>
+      <p:graphicFrame>
+        <p:nvGraphicFramePr>
+          <p:cNvPr id="15" name="Chart 14"/>
+          <p:cNvGraphicFramePr>
+            <a:graphicFrameLocks noGrp="1"/>
+          </p:cNvGraphicFramePr>
+          <p:nvPr/>
+        </p:nvGraphicFramePr>
+        <p:xfrm>
+          <a:off x="4937760" y="4023360"/>
+          <a:ext cx="3840480" cy="640080"/>
+        </p:xfrm>
+        <a:graphic>
+          <a:graphicData uri="http://schemas.openxmlformats.org/drawingml/2006/chart">
+            <c:chart xmlns:c="http://schemas.openxmlformats.org/drawingml/2006/chart" r:id="rId5"/>
+          </a:graphicData>
+        </a:graphic>
+      </p:graphicFrame>
+      <p:sp>
+        <p:nvSpPr>
+          <p:cNvPr id="16" name="TextBox 15"/>
+          <p:cNvSpPr txBox="1"/>
+          <p:nvPr/>
+        </p:nvSpPr>
+        <p:spPr>
+          <a:xfrm>
+            <a:off x="9144000" y="4133088"/>
+            <a:ext cx="2286000" cy="457200"/>
+          </a:xfrm>
+          <a:prstGeom prst="rect">
+            <a:avLst/>
+          </a:prstGeom>
+          <a:noFill/>
+        </p:spPr>
+        <p:txBody>
+          <a:bodyPr wrap="square" anchor="t">
+            <a:noAutofit/>
+          </a:bodyPr>
+          <a:lstStyle/>
+          <a:p>
+            <a:pPr algn="r">
+              <a:lnSpc>
+                <a:spcPct val="120000"/>
+              </a:lnSpc>
+            </a:pPr>
+            <a:r>
+              <a:rPr sz="2200" b="1" i="0">
+                <a:solidFill>
+                  <a:srgbClr val="450D21"/>
+                </a:solidFill>
+                <a:latin typeface="DM Sans"/>
+              </a:rPr>
+              <a:t>94 %</a:t>
+            </a:r>
+          </a:p>
+        </p:txBody>
+      </p:sp>
+      <p:sp>
+        <p:nvSpPr>
+          <p:cNvPr id="17" name="TextBox 16"/>
+          <p:cNvSpPr txBox="1"/>
+          <p:nvPr/>
+        </p:nvSpPr>
+        <p:spPr>
+          <a:xfrm>
+            <a:off x="777240" y="5120640"/>
+            <a:ext cx="3657600" cy="457200"/>
+          </a:xfrm>
+          <a:prstGeom prst="rect">
+            <a:avLst/>
+          </a:prstGeom>
+          <a:noFill/>
+        </p:spPr>
+        <p:txBody>
+          <a:bodyPr wrap="square" anchor="t">
+            <a:noAutofit/>
+          </a:bodyPr>
+          <a:lstStyle/>
+          <a:p>
+            <a:pPr algn="l">
+              <a:lnSpc>
+                <a:spcPct val="120000"/>
+              </a:lnSpc>
+            </a:pPr>
+            <a:r>
+              <a:rPr sz="2000" b="0" i="0">
+                <a:solidFill>
+                  <a:srgbClr val="450D21"/>
+                </a:solidFill>
+                <a:latin typeface="DM Sans"/>
+              </a:rPr>
+              <a:t>eNPS</a:t>
+            </a:r>
+          </a:p>
+        </p:txBody>
+      </p:sp>
+      <p:graphicFrame>
+        <p:nvGraphicFramePr>
+          <p:cNvPr id="18" name="Chart 17"/>
+          <p:cNvGraphicFramePr>
+            <a:graphicFrameLocks noGrp="1"/>
+          </p:cNvGraphicFramePr>
+          <p:nvPr/>
+        </p:nvGraphicFramePr>
+        <p:xfrm>
+          <a:off x="4937760" y="4983480"/>
+          <a:ext cx="3840480" cy="640080"/>
+        </p:xfrm>
+        <a:graphic>
+          <a:graphicData uri="http://schemas.openxmlformats.org/drawingml/2006/chart">
+            <c:chart xmlns:c="http://schemas.openxmlformats.org/drawingml/2006/chart" r:id="rId6"/>
+          </a:graphicData>
+        </a:graphic>
+      </p:graphicFrame>
+      <p:sp>
+        <p:nvSpPr>
+          <p:cNvPr id="19" name="TextBox 18"/>
+          <p:cNvSpPr txBox="1"/>
+          <p:nvPr/>
+        </p:nvSpPr>
+        <p:spPr>
+          <a:xfrm>
+            <a:off x="9144000" y="5093208"/>
+            <a:ext cx="2286000" cy="457200"/>
+          </a:xfrm>
+          <a:prstGeom prst="rect">
+            <a:avLst/>
+          </a:prstGeom>
+          <a:noFill/>
+        </p:spPr>
+        <p:txBody>
+          <a:bodyPr wrap="square" anchor="t">
+            <a:noAutofit/>
+          </a:bodyPr>
+          <a:lstStyle/>
+          <a:p>
+            <a:pPr algn="r">
+              <a:lnSpc>
+                <a:spcPct val="120000"/>
+              </a:lnSpc>
+            </a:pPr>
+            <a:r>
+              <a:rPr sz="2200" b="1" i="0">
+                <a:solidFill>
+                  <a:srgbClr val="450D21"/>
+                </a:solidFill>
+                <a:latin typeface="DM Sans"/>
+              </a:rPr>
+              <a:t>54</a:t>
+            </a:r>
+          </a:p>
+        </p:txBody>
+      </p:sp>
+      <p:sp>
+        <p:nvSpPr>
+          <p:cNvPr id="20" name="TextBox 19"/>
+          <p:cNvSpPr txBox="1"/>
+          <p:nvPr/>
+        </p:nvSpPr>
+        <p:spPr>
+          <a:xfrm>
+            <a:off x="777240" y="6126480"/>
+            <a:ext cx="10058400" cy="365760"/>
+          </a:xfrm>
+          <a:prstGeom prst="rect">
+            <a:avLst/>
+          </a:prstGeom>
+          <a:noFill/>
+        </p:spPr>
+        <p:txBody>
+          <a:bodyPr wrap="square" anchor="t">
+            <a:noAutofit/>
+          </a:bodyPr>
+          <a:lstStyle/>
+          <a:p>
+            <a:pPr algn="l">
+              <a:lnSpc>
+                <a:spcPct val="120000"/>
+              </a:lnSpc>
+            </a:pPr>
+            <a:r>
+              <a:rPr sz="1200" b="0" i="1">
+                <a:solidFill>
+                  <a:srgbClr val="8F5265"/>
+                </a:solidFill>
+                <a:latin typeface="DM Sans"/>
+              </a:rPr>
+              <a:t>Sparklines som små native linjediagram. Illustrativ data.</a:t>
+            </a:r>
+          </a:p>
+        </p:txBody>
+      </p:sp>
+    </p:spTree>
+  </p:cSld>
+  <p:clrMapOvr>
+    <a:masterClrMapping/>
+  </p:clrMapOvr>
+</p:sld>
+</file>
+
+<file path=ppt/slides/slide14.xml><?xml version="1.0" encoding="utf-8"?>
+<p:sld xmlns:a="http://schemas.openxmlformats.org/drawingml/2006/main" xmlns:p="http://schemas.openxmlformats.org/presentationml/2006/main" xmlns:r="http://schemas.openxmlformats.org/officeDocument/2006/relationships">
+  <p:cSld>
+    <p:bg>
+      <p:bgPr>
+        <a:solidFill>
+          <a:srgbClr val="FBF0E5"/>
+        </a:solidFill>
+        <a:effectLst/>
+      </p:bgPr>
+    </p:bg>
+    <p:spTree>
+      <p:nvGrpSpPr>
+        <p:cNvPr id="1" name=""/>
+        <p:cNvGrpSpPr/>
+        <p:nvPr/>
+      </p:nvGrpSpPr>
+      <p:grpSpPr/>
+      <p:sp>
+        <p:nvSpPr>
+          <p:cNvPr id="2" name="Rounded Rectangle 1"/>
           <p:cNvSpPr/>
           <p:nvPr/>
         </p:nvSpPr>
         <p:spPr>
           <a:xfrm>
-            <a:off x="777240" y="4937760"/>
-            <a:ext cx="1463040" cy="384048"/>
+            <a:off x="777240" y="502920"/>
+            <a:ext cx="274320" cy="27940"/>
           </a:xfrm>
           <a:prstGeom prst="roundRect">
-            <a:avLst>
-              <a:gd name="adj" fmla="val 50000"/>
-            </a:avLst>
+            <a:avLst/>
           </a:prstGeom>
           <a:solidFill>
-            <a:srgbClr val="FBF0E5"/>
+            <a:srgbClr val="450D21"/>
           </a:solidFill>
           <a:ln>
             <a:noFill/>
@@ -4662,40 +9976,29 @@
           </a:fontRef>
         </p:style>
         <p:txBody>
-          <a:bodyPr rtlCol="0" anchor="ctr" wrap="none"/>
+          <a:bodyPr rtlCol="0" anchor="ctr"/>
           <a:lstStyle/>
           <a:p>
             <a:pPr algn="ctr"/>
-            <a:r>
-              <a:rPr sz="1300" b="1">
-                <a:solidFill>
-                  <a:srgbClr val="450D21"/>
-                </a:solidFill>
-                <a:latin typeface="DM Sans"/>
-              </a:rPr>
-              <a:t>←  Forside</a:t>
-            </a:r>
-          </a:p>
-        </p:txBody>
-      </p:sp>
-      <p:sp>
-        <p:nvSpPr>
-          <p:cNvPr id="5" name="Rounded Rectangle 4"/>
+          </a:p>
+        </p:txBody>
+      </p:sp>
+      <p:sp>
+        <p:nvSpPr>
+          <p:cNvPr id="3" name="Rounded Rectangle 2"/>
           <p:cNvSpPr/>
           <p:nvPr/>
         </p:nvSpPr>
         <p:spPr>
           <a:xfrm>
-            <a:off x="2468880" y="4937760"/>
-            <a:ext cx="2569464" cy="384048"/>
+            <a:off x="777240" y="557784"/>
+            <a:ext cx="274320" cy="27940"/>
           </a:xfrm>
           <a:prstGeom prst="roundRect">
-            <a:avLst>
-              <a:gd name="adj" fmla="val 50000"/>
-            </a:avLst>
+            <a:avLst/>
           </a:prstGeom>
           <a:solidFill>
-            <a:srgbClr val="FBF0E5"/>
+            <a:srgbClr val="450D21"/>
           </a:solidFill>
           <a:ln>
             <a:noFill/>
@@ -4717,40 +10020,29 @@
           </a:fontRef>
         </p:style>
         <p:txBody>
-          <a:bodyPr rtlCol="0" anchor="ctr" wrap="none"/>
+          <a:bodyPr rtlCol="0" anchor="ctr"/>
           <a:lstStyle/>
           <a:p>
             <a:pPr algn="ctr"/>
-            <a:r>
-              <a:rPr sz="1300" b="1">
-                <a:solidFill>
-                  <a:srgbClr val="450D21"/>
-                </a:solidFill>
-                <a:latin typeface="DM Sans"/>
-              </a:rPr>
-              <a:t>←  Innholdsoversikten</a:t>
-            </a:r>
-          </a:p>
-        </p:txBody>
-      </p:sp>
-      <p:sp>
-        <p:nvSpPr>
-          <p:cNvPr id="6" name="Rounded Rectangle 5"/>
+          </a:p>
+        </p:txBody>
+      </p:sp>
+      <p:sp>
+        <p:nvSpPr>
+          <p:cNvPr id="4" name="Rounded Rectangle 3"/>
           <p:cNvSpPr/>
           <p:nvPr/>
         </p:nvSpPr>
         <p:spPr>
           <a:xfrm>
-            <a:off x="5266944" y="4937760"/>
-            <a:ext cx="2971800" cy="384048"/>
+            <a:off x="777240" y="612648"/>
+            <a:ext cx="274320" cy="27940"/>
           </a:xfrm>
           <a:prstGeom prst="roundRect">
-            <a:avLst>
-              <a:gd name="adj" fmla="val 50000"/>
-            </a:avLst>
+            <a:avLst/>
           </a:prstGeom>
           <a:solidFill>
-            <a:srgbClr val="FBF0E5"/>
+            <a:srgbClr val="450D21"/>
           </a:solidFill>
           <a:ln>
             <a:noFill/>
@@ -4772,18 +10064,2191 @@
           </a:fontRef>
         </p:style>
         <p:txBody>
-          <a:bodyPr rtlCol="0" anchor="ctr" wrap="none"/>
+          <a:bodyPr rtlCol="0" anchor="ctr"/>
           <a:lstStyle/>
           <a:p>
             <a:pPr algn="ctr"/>
+          </a:p>
+        </p:txBody>
+      </p:sp>
+      <p:pic>
+        <p:nvPicPr>
+          <p:cNvPr id="5" name="Picture 4" descr="miles-logo-red.png"/>
+          <p:cNvPicPr>
+            <a:picLocks noChangeAspect="1"/>
+          </p:cNvPicPr>
+          <p:nvPr/>
+        </p:nvPicPr>
+        <p:blipFill>
+          <a:blip r:embed="rId2"/>
+          <a:stretch>
+            <a:fillRect/>
+          </a:stretch>
+        </p:blipFill>
+        <p:spPr>
+          <a:xfrm>
+            <a:off x="10362895" y="475488"/>
+            <a:ext cx="1051560" cy="355913"/>
+          </a:xfrm>
+          <a:prstGeom prst="rect">
+            <a:avLst/>
+          </a:prstGeom>
+        </p:spPr>
+      </p:pic>
+      <p:sp>
+        <p:nvSpPr>
+          <p:cNvPr id="6" name="TextBox 5"/>
+          <p:cNvSpPr txBox="1"/>
+          <p:nvPr/>
+        </p:nvSpPr>
+        <p:spPr>
+          <a:xfrm>
+            <a:off x="777240" y="960120"/>
+            <a:ext cx="5486400" cy="457200"/>
+          </a:xfrm>
+          <a:prstGeom prst="rect">
+            <a:avLst/>
+          </a:prstGeom>
+          <a:noFill/>
+        </p:spPr>
+        <p:txBody>
+          <a:bodyPr wrap="square" anchor="t">
+            <a:noAutofit/>
+          </a:bodyPr>
+          <a:lstStyle/>
+          <a:p>
+            <a:pPr algn="l">
+              <a:lnSpc>
+                <a:spcPct val="120000"/>
+              </a:lnSpc>
+            </a:pPr>
             <a:r>
-              <a:rPr sz="1300" b="1">
+              <a:rPr sz="1500" b="0" i="1">
+                <a:solidFill>
+                  <a:srgbClr val="FF303B"/>
+                </a:solidFill>
+                <a:latin typeface="Manrope"/>
+              </a:rPr>
+              <a:t>Sammenligning</a:t>
+            </a:r>
+          </a:p>
+        </p:txBody>
+      </p:sp>
+      <p:sp>
+        <p:nvSpPr>
+          <p:cNvPr id="7" name="TextBox 6"/>
+          <p:cNvSpPr txBox="1"/>
+          <p:nvPr/>
+        </p:nvSpPr>
+        <p:spPr>
+          <a:xfrm>
+            <a:off x="777240" y="1344168"/>
+            <a:ext cx="10058400" cy="822960"/>
+          </a:xfrm>
+          <a:prstGeom prst="rect">
+            <a:avLst/>
+          </a:prstGeom>
+          <a:noFill/>
+        </p:spPr>
+        <p:txBody>
+          <a:bodyPr wrap="square" anchor="t">
+            <a:noAutofit/>
+          </a:bodyPr>
+          <a:lstStyle/>
+          <a:p>
+            <a:pPr algn="l">
+              <a:lnSpc>
+                <a:spcPct val="120000"/>
+              </a:lnSpc>
+            </a:pPr>
+            <a:r>
+              <a:rPr sz="3000" b="1" i="0">
                 <a:solidFill>
                   <a:srgbClr val="450D21"/>
+                </a:solidFill>
+                <a:latin typeface="Manrope"/>
+              </a:rPr>
+              <a:t>Omsetning per tjenesteområde</a:t>
+            </a:r>
+          </a:p>
+        </p:txBody>
+      </p:sp>
+      <p:graphicFrame>
+        <p:nvGraphicFramePr>
+          <p:cNvPr id="8" name="Chart 7"/>
+          <p:cNvGraphicFramePr>
+            <a:graphicFrameLocks noGrp="1"/>
+          </p:cNvGraphicFramePr>
+          <p:nvPr/>
+        </p:nvGraphicFramePr>
+        <p:xfrm>
+          <a:off x="777240" y="1828800"/>
+          <a:ext cx="10637215" cy="4114800"/>
+        </p:xfrm>
+        <a:graphic>
+          <a:graphicData uri="http://schemas.openxmlformats.org/drawingml/2006/chart">
+            <c:chart xmlns:c="http://schemas.openxmlformats.org/drawingml/2006/chart" r:id="rId3"/>
+          </a:graphicData>
+        </a:graphic>
+      </p:graphicFrame>
+      <p:sp>
+        <p:nvSpPr>
+          <p:cNvPr id="9" name="TextBox 8"/>
+          <p:cNvSpPr txBox="1"/>
+          <p:nvPr/>
+        </p:nvSpPr>
+        <p:spPr>
+          <a:xfrm>
+            <a:off x="777240" y="6126480"/>
+            <a:ext cx="10058400" cy="365760"/>
+          </a:xfrm>
+          <a:prstGeom prst="rect">
+            <a:avLst/>
+          </a:prstGeom>
+          <a:noFill/>
+        </p:spPr>
+        <p:txBody>
+          <a:bodyPr wrap="square" anchor="t">
+            <a:noAutofit/>
+          </a:bodyPr>
+          <a:lstStyle/>
+          <a:p>
+            <a:pPr algn="l">
+              <a:lnSpc>
+                <a:spcPct val="120000"/>
+              </a:lnSpc>
+            </a:pPr>
+            <a:r>
+              <a:rPr sz="1200" b="0" i="1">
+                <a:solidFill>
+                  <a:srgbClr val="8F5265"/>
                 </a:solidFill>
                 <a:latin typeface="DM Sans"/>
               </a:rPr>
-              <a:t>←  Har du noe på hjertet?</a:t>
+              <a:t>Native stolpediagram fra null, verdien på stolpen, én rød aksent. Rediger data i PowerPoint. Illustrativ data.</a:t>
+            </a:r>
+          </a:p>
+        </p:txBody>
+      </p:sp>
+    </p:spTree>
+  </p:cSld>
+  <p:clrMapOvr>
+    <a:masterClrMapping/>
+  </p:clrMapOvr>
+</p:sld>
+</file>
+
+<file path=ppt/slides/slide15.xml><?xml version="1.0" encoding="utf-8"?>
+<p:sld xmlns:a="http://schemas.openxmlformats.org/drawingml/2006/main" xmlns:p="http://schemas.openxmlformats.org/presentationml/2006/main" xmlns:r="http://schemas.openxmlformats.org/officeDocument/2006/relationships">
+  <p:cSld>
+    <p:bg>
+      <p:bgPr>
+        <a:solidFill>
+          <a:srgbClr val="FBF0E5"/>
+        </a:solidFill>
+        <a:effectLst/>
+      </p:bgPr>
+    </p:bg>
+    <p:spTree>
+      <p:nvGrpSpPr>
+        <p:cNvPr id="1" name=""/>
+        <p:cNvGrpSpPr/>
+        <p:nvPr/>
+      </p:nvGrpSpPr>
+      <p:grpSpPr/>
+      <p:sp>
+        <p:nvSpPr>
+          <p:cNvPr id="2" name="Rounded Rectangle 1"/>
+          <p:cNvSpPr/>
+          <p:nvPr/>
+        </p:nvSpPr>
+        <p:spPr>
+          <a:xfrm>
+            <a:off x="777240" y="502920"/>
+            <a:ext cx="274320" cy="27940"/>
+          </a:xfrm>
+          <a:prstGeom prst="roundRect">
+            <a:avLst/>
+          </a:prstGeom>
+          <a:solidFill>
+            <a:srgbClr val="450D21"/>
+          </a:solidFill>
+          <a:ln>
+            <a:noFill/>
+          </a:ln>
+          <a:effectLst/>
+        </p:spPr>
+        <p:style>
+          <a:lnRef idx="1">
+            <a:schemeClr val="accent1"/>
+          </a:lnRef>
+          <a:fillRef idx="3">
+            <a:schemeClr val="accent1"/>
+          </a:fillRef>
+          <a:effectRef idx="2">
+            <a:schemeClr val="accent1"/>
+          </a:effectRef>
+          <a:fontRef idx="minor">
+            <a:schemeClr val="lt1"/>
+          </a:fontRef>
+        </p:style>
+        <p:txBody>
+          <a:bodyPr rtlCol="0" anchor="ctr"/>
+          <a:lstStyle/>
+          <a:p>
+            <a:pPr algn="ctr"/>
+          </a:p>
+        </p:txBody>
+      </p:sp>
+      <p:sp>
+        <p:nvSpPr>
+          <p:cNvPr id="3" name="Rounded Rectangle 2"/>
+          <p:cNvSpPr/>
+          <p:nvPr/>
+        </p:nvSpPr>
+        <p:spPr>
+          <a:xfrm>
+            <a:off x="777240" y="557784"/>
+            <a:ext cx="274320" cy="27940"/>
+          </a:xfrm>
+          <a:prstGeom prst="roundRect">
+            <a:avLst/>
+          </a:prstGeom>
+          <a:solidFill>
+            <a:srgbClr val="450D21"/>
+          </a:solidFill>
+          <a:ln>
+            <a:noFill/>
+          </a:ln>
+          <a:effectLst/>
+        </p:spPr>
+        <p:style>
+          <a:lnRef idx="1">
+            <a:schemeClr val="accent1"/>
+          </a:lnRef>
+          <a:fillRef idx="3">
+            <a:schemeClr val="accent1"/>
+          </a:fillRef>
+          <a:effectRef idx="2">
+            <a:schemeClr val="accent1"/>
+          </a:effectRef>
+          <a:fontRef idx="minor">
+            <a:schemeClr val="lt1"/>
+          </a:fontRef>
+        </p:style>
+        <p:txBody>
+          <a:bodyPr rtlCol="0" anchor="ctr"/>
+          <a:lstStyle/>
+          <a:p>
+            <a:pPr algn="ctr"/>
+          </a:p>
+        </p:txBody>
+      </p:sp>
+      <p:sp>
+        <p:nvSpPr>
+          <p:cNvPr id="4" name="Rounded Rectangle 3"/>
+          <p:cNvSpPr/>
+          <p:nvPr/>
+        </p:nvSpPr>
+        <p:spPr>
+          <a:xfrm>
+            <a:off x="777240" y="612648"/>
+            <a:ext cx="274320" cy="27940"/>
+          </a:xfrm>
+          <a:prstGeom prst="roundRect">
+            <a:avLst/>
+          </a:prstGeom>
+          <a:solidFill>
+            <a:srgbClr val="450D21"/>
+          </a:solidFill>
+          <a:ln>
+            <a:noFill/>
+          </a:ln>
+          <a:effectLst/>
+        </p:spPr>
+        <p:style>
+          <a:lnRef idx="1">
+            <a:schemeClr val="accent1"/>
+          </a:lnRef>
+          <a:fillRef idx="3">
+            <a:schemeClr val="accent1"/>
+          </a:fillRef>
+          <a:effectRef idx="2">
+            <a:schemeClr val="accent1"/>
+          </a:effectRef>
+          <a:fontRef idx="minor">
+            <a:schemeClr val="lt1"/>
+          </a:fontRef>
+        </p:style>
+        <p:txBody>
+          <a:bodyPr rtlCol="0" anchor="ctr"/>
+          <a:lstStyle/>
+          <a:p>
+            <a:pPr algn="ctr"/>
+          </a:p>
+        </p:txBody>
+      </p:sp>
+      <p:pic>
+        <p:nvPicPr>
+          <p:cNvPr id="5" name="Picture 4" descr="miles-logo-red.png"/>
+          <p:cNvPicPr>
+            <a:picLocks noChangeAspect="1"/>
+          </p:cNvPicPr>
+          <p:nvPr/>
+        </p:nvPicPr>
+        <p:blipFill>
+          <a:blip r:embed="rId2"/>
+          <a:stretch>
+            <a:fillRect/>
+          </a:stretch>
+        </p:blipFill>
+        <p:spPr>
+          <a:xfrm>
+            <a:off x="10362895" y="475488"/>
+            <a:ext cx="1051560" cy="355913"/>
+          </a:xfrm>
+          <a:prstGeom prst="rect">
+            <a:avLst/>
+          </a:prstGeom>
+        </p:spPr>
+      </p:pic>
+      <p:sp>
+        <p:nvSpPr>
+          <p:cNvPr id="6" name="TextBox 5"/>
+          <p:cNvSpPr txBox="1"/>
+          <p:nvPr/>
+        </p:nvSpPr>
+        <p:spPr>
+          <a:xfrm>
+            <a:off x="777240" y="960120"/>
+            <a:ext cx="5486400" cy="457200"/>
+          </a:xfrm>
+          <a:prstGeom prst="rect">
+            <a:avLst/>
+          </a:prstGeom>
+          <a:noFill/>
+        </p:spPr>
+        <p:txBody>
+          <a:bodyPr wrap="square" anchor="t">
+            <a:noAutofit/>
+          </a:bodyPr>
+          <a:lstStyle/>
+          <a:p>
+            <a:pPr algn="l">
+              <a:lnSpc>
+                <a:spcPct val="120000"/>
+              </a:lnSpc>
+            </a:pPr>
+            <a:r>
+              <a:rPr sz="1500" b="0" i="1">
+                <a:solidFill>
+                  <a:srgbClr val="FF303B"/>
+                </a:solidFill>
+                <a:latin typeface="Manrope"/>
+              </a:rPr>
+              <a:t>Utvikling over tid</a:t>
+            </a:r>
+          </a:p>
+        </p:txBody>
+      </p:sp>
+      <p:sp>
+        <p:nvSpPr>
+          <p:cNvPr id="7" name="TextBox 6"/>
+          <p:cNvSpPr txBox="1"/>
+          <p:nvPr/>
+        </p:nvSpPr>
+        <p:spPr>
+          <a:xfrm>
+            <a:off x="777240" y="1344168"/>
+            <a:ext cx="10058400" cy="822960"/>
+          </a:xfrm>
+          <a:prstGeom prst="rect">
+            <a:avLst/>
+          </a:prstGeom>
+          <a:noFill/>
+        </p:spPr>
+        <p:txBody>
+          <a:bodyPr wrap="square" anchor="t">
+            <a:noAutofit/>
+          </a:bodyPr>
+          <a:lstStyle/>
+          <a:p>
+            <a:pPr algn="l">
+              <a:lnSpc>
+                <a:spcPct val="120000"/>
+              </a:lnSpc>
+            </a:pPr>
+            <a:r>
+              <a:rPr sz="3000" b="1" i="0">
+                <a:solidFill>
+                  <a:srgbClr val="450D21"/>
+                </a:solidFill>
+                <a:latin typeface="Manrope"/>
+              </a:rPr>
+              <a:t>Ansatte per tjenesteområde</a:t>
+            </a:r>
+          </a:p>
+        </p:txBody>
+      </p:sp>
+      <p:graphicFrame>
+        <p:nvGraphicFramePr>
+          <p:cNvPr id="8" name="Chart 7"/>
+          <p:cNvGraphicFramePr>
+            <a:graphicFrameLocks noGrp="1"/>
+          </p:cNvGraphicFramePr>
+          <p:nvPr/>
+        </p:nvGraphicFramePr>
+        <p:xfrm>
+          <a:off x="777240" y="1828800"/>
+          <a:ext cx="10637215" cy="4114800"/>
+        </p:xfrm>
+        <a:graphic>
+          <a:graphicData uri="http://schemas.openxmlformats.org/drawingml/2006/chart">
+            <c:chart xmlns:c="http://schemas.openxmlformats.org/drawingml/2006/chart" r:id="rId3"/>
+          </a:graphicData>
+        </a:graphic>
+      </p:graphicFrame>
+      <p:sp>
+        <p:nvSpPr>
+          <p:cNvPr id="9" name="TextBox 8"/>
+          <p:cNvSpPr txBox="1"/>
+          <p:nvPr/>
+        </p:nvSpPr>
+        <p:spPr>
+          <a:xfrm>
+            <a:off x="777240" y="6126480"/>
+            <a:ext cx="10058400" cy="365760"/>
+          </a:xfrm>
+          <a:prstGeom prst="rect">
+            <a:avLst/>
+          </a:prstGeom>
+          <a:noFill/>
+        </p:spPr>
+        <p:txBody>
+          <a:bodyPr wrap="square" anchor="t">
+            <a:noAutofit/>
+          </a:bodyPr>
+          <a:lstStyle/>
+          <a:p>
+            <a:pPr algn="l">
+              <a:lnSpc>
+                <a:spcPct val="120000"/>
+              </a:lnSpc>
+            </a:pPr>
+            <a:r>
+              <a:rPr sz="1200" b="0" i="1">
+                <a:solidFill>
+                  <a:srgbClr val="8F5265"/>
+                </a:solidFill>
+                <a:latin typeface="DM Sans"/>
+              </a:rPr>
+              <a:t>Native linjediagram, accent-serien i rødt, resten trukket tilbake. Illustrativ data.</a:t>
+            </a:r>
+          </a:p>
+        </p:txBody>
+      </p:sp>
+    </p:spTree>
+  </p:cSld>
+  <p:clrMapOvr>
+    <a:masterClrMapping/>
+  </p:clrMapOvr>
+</p:sld>
+</file>
+
+<file path=ppt/slides/slide16.xml><?xml version="1.0" encoding="utf-8"?>
+<p:sld xmlns:a="http://schemas.openxmlformats.org/drawingml/2006/main" xmlns:p="http://schemas.openxmlformats.org/presentationml/2006/main" xmlns:r="http://schemas.openxmlformats.org/officeDocument/2006/relationships">
+  <p:cSld>
+    <p:bg>
+      <p:bgPr>
+        <a:solidFill>
+          <a:srgbClr val="FBF0E5"/>
+        </a:solidFill>
+        <a:effectLst/>
+      </p:bgPr>
+    </p:bg>
+    <p:spTree>
+      <p:nvGrpSpPr>
+        <p:cNvPr id="1" name=""/>
+        <p:cNvGrpSpPr/>
+        <p:nvPr/>
+      </p:nvGrpSpPr>
+      <p:grpSpPr/>
+      <p:sp>
+        <p:nvSpPr>
+          <p:cNvPr id="2" name="Rounded Rectangle 1"/>
+          <p:cNvSpPr/>
+          <p:nvPr/>
+        </p:nvSpPr>
+        <p:spPr>
+          <a:xfrm>
+            <a:off x="777240" y="502920"/>
+            <a:ext cx="274320" cy="27940"/>
+          </a:xfrm>
+          <a:prstGeom prst="roundRect">
+            <a:avLst/>
+          </a:prstGeom>
+          <a:solidFill>
+            <a:srgbClr val="450D21"/>
+          </a:solidFill>
+          <a:ln>
+            <a:noFill/>
+          </a:ln>
+          <a:effectLst/>
+        </p:spPr>
+        <p:style>
+          <a:lnRef idx="1">
+            <a:schemeClr val="accent1"/>
+          </a:lnRef>
+          <a:fillRef idx="3">
+            <a:schemeClr val="accent1"/>
+          </a:fillRef>
+          <a:effectRef idx="2">
+            <a:schemeClr val="accent1"/>
+          </a:effectRef>
+          <a:fontRef idx="minor">
+            <a:schemeClr val="lt1"/>
+          </a:fontRef>
+        </p:style>
+        <p:txBody>
+          <a:bodyPr rtlCol="0" anchor="ctr"/>
+          <a:lstStyle/>
+          <a:p>
+            <a:pPr algn="ctr"/>
+          </a:p>
+        </p:txBody>
+      </p:sp>
+      <p:sp>
+        <p:nvSpPr>
+          <p:cNvPr id="3" name="Rounded Rectangle 2"/>
+          <p:cNvSpPr/>
+          <p:nvPr/>
+        </p:nvSpPr>
+        <p:spPr>
+          <a:xfrm>
+            <a:off x="777240" y="557784"/>
+            <a:ext cx="274320" cy="27940"/>
+          </a:xfrm>
+          <a:prstGeom prst="roundRect">
+            <a:avLst/>
+          </a:prstGeom>
+          <a:solidFill>
+            <a:srgbClr val="450D21"/>
+          </a:solidFill>
+          <a:ln>
+            <a:noFill/>
+          </a:ln>
+          <a:effectLst/>
+        </p:spPr>
+        <p:style>
+          <a:lnRef idx="1">
+            <a:schemeClr val="accent1"/>
+          </a:lnRef>
+          <a:fillRef idx="3">
+            <a:schemeClr val="accent1"/>
+          </a:fillRef>
+          <a:effectRef idx="2">
+            <a:schemeClr val="accent1"/>
+          </a:effectRef>
+          <a:fontRef idx="minor">
+            <a:schemeClr val="lt1"/>
+          </a:fontRef>
+        </p:style>
+        <p:txBody>
+          <a:bodyPr rtlCol="0" anchor="ctr"/>
+          <a:lstStyle/>
+          <a:p>
+            <a:pPr algn="ctr"/>
+          </a:p>
+        </p:txBody>
+      </p:sp>
+      <p:sp>
+        <p:nvSpPr>
+          <p:cNvPr id="4" name="Rounded Rectangle 3"/>
+          <p:cNvSpPr/>
+          <p:nvPr/>
+        </p:nvSpPr>
+        <p:spPr>
+          <a:xfrm>
+            <a:off x="777240" y="612648"/>
+            <a:ext cx="274320" cy="27940"/>
+          </a:xfrm>
+          <a:prstGeom prst="roundRect">
+            <a:avLst/>
+          </a:prstGeom>
+          <a:solidFill>
+            <a:srgbClr val="450D21"/>
+          </a:solidFill>
+          <a:ln>
+            <a:noFill/>
+          </a:ln>
+          <a:effectLst/>
+        </p:spPr>
+        <p:style>
+          <a:lnRef idx="1">
+            <a:schemeClr val="accent1"/>
+          </a:lnRef>
+          <a:fillRef idx="3">
+            <a:schemeClr val="accent1"/>
+          </a:fillRef>
+          <a:effectRef idx="2">
+            <a:schemeClr val="accent1"/>
+          </a:effectRef>
+          <a:fontRef idx="minor">
+            <a:schemeClr val="lt1"/>
+          </a:fontRef>
+        </p:style>
+        <p:txBody>
+          <a:bodyPr rtlCol="0" anchor="ctr"/>
+          <a:lstStyle/>
+          <a:p>
+            <a:pPr algn="ctr"/>
+          </a:p>
+        </p:txBody>
+      </p:sp>
+      <p:pic>
+        <p:nvPicPr>
+          <p:cNvPr id="5" name="Picture 4" descr="miles-logo-red.png"/>
+          <p:cNvPicPr>
+            <a:picLocks noChangeAspect="1"/>
+          </p:cNvPicPr>
+          <p:nvPr/>
+        </p:nvPicPr>
+        <p:blipFill>
+          <a:blip r:embed="rId2"/>
+          <a:stretch>
+            <a:fillRect/>
+          </a:stretch>
+        </p:blipFill>
+        <p:spPr>
+          <a:xfrm>
+            <a:off x="10362895" y="475488"/>
+            <a:ext cx="1051560" cy="355913"/>
+          </a:xfrm>
+          <a:prstGeom prst="rect">
+            <a:avLst/>
+          </a:prstGeom>
+        </p:spPr>
+      </p:pic>
+      <p:sp>
+        <p:nvSpPr>
+          <p:cNvPr id="6" name="TextBox 5"/>
+          <p:cNvSpPr txBox="1"/>
+          <p:nvPr/>
+        </p:nvSpPr>
+        <p:spPr>
+          <a:xfrm>
+            <a:off x="777240" y="960120"/>
+            <a:ext cx="5486400" cy="457200"/>
+          </a:xfrm>
+          <a:prstGeom prst="rect">
+            <a:avLst/>
+          </a:prstGeom>
+          <a:noFill/>
+        </p:spPr>
+        <p:txBody>
+          <a:bodyPr wrap="square" anchor="t">
+            <a:noAutofit/>
+          </a:bodyPr>
+          <a:lstStyle/>
+          <a:p>
+            <a:pPr algn="l">
+              <a:lnSpc>
+                <a:spcPct val="120000"/>
+              </a:lnSpc>
+            </a:pPr>
+            <a:r>
+              <a:rPr sz="1500" b="0" i="1">
+                <a:solidFill>
+                  <a:srgbClr val="FF303B"/>
+                </a:solidFill>
+                <a:latin typeface="Manrope"/>
+              </a:rPr>
+              <a:t>Rangering</a:t>
+            </a:r>
+          </a:p>
+        </p:txBody>
+      </p:sp>
+      <p:sp>
+        <p:nvSpPr>
+          <p:cNvPr id="7" name="TextBox 6"/>
+          <p:cNvSpPr txBox="1"/>
+          <p:nvPr/>
+        </p:nvSpPr>
+        <p:spPr>
+          <a:xfrm>
+            <a:off x="777240" y="1344168"/>
+            <a:ext cx="10058400" cy="822960"/>
+          </a:xfrm>
+          <a:prstGeom prst="rect">
+            <a:avLst/>
+          </a:prstGeom>
+          <a:noFill/>
+        </p:spPr>
+        <p:txBody>
+          <a:bodyPr wrap="square" anchor="t">
+            <a:noAutofit/>
+          </a:bodyPr>
+          <a:lstStyle/>
+          <a:p>
+            <a:pPr algn="l">
+              <a:lnSpc>
+                <a:spcPct val="120000"/>
+              </a:lnSpc>
+            </a:pPr>
+            <a:r>
+              <a:rPr sz="3000" b="1" i="0">
+                <a:solidFill>
+                  <a:srgbClr val="450D21"/>
+                </a:solidFill>
+                <a:latin typeface="Manrope"/>
+              </a:rPr>
+              <a:t>Konsulenter per kontor (2024 → 2025)</a:t>
+            </a:r>
+          </a:p>
+        </p:txBody>
+      </p:sp>
+      <p:graphicFrame>
+        <p:nvGraphicFramePr>
+          <p:cNvPr id="8" name="Chart 7"/>
+          <p:cNvGraphicFramePr>
+            <a:graphicFrameLocks noGrp="1"/>
+          </p:cNvGraphicFramePr>
+          <p:nvPr/>
+        </p:nvGraphicFramePr>
+        <p:xfrm>
+          <a:off x="777240" y="1828800"/>
+          <a:ext cx="10637215" cy="4114800"/>
+        </p:xfrm>
+        <a:graphic>
+          <a:graphicData uri="http://schemas.openxmlformats.org/drawingml/2006/chart">
+            <c:chart xmlns:c="http://schemas.openxmlformats.org/drawingml/2006/chart" r:id="rId3"/>
+          </a:graphicData>
+        </a:graphic>
+      </p:graphicFrame>
+      <p:sp>
+        <p:nvSpPr>
+          <p:cNvPr id="9" name="TextBox 8"/>
+          <p:cNvSpPr txBox="1"/>
+          <p:nvPr/>
+        </p:nvSpPr>
+        <p:spPr>
+          <a:xfrm>
+            <a:off x="777240" y="6126480"/>
+            <a:ext cx="10058400" cy="365760"/>
+          </a:xfrm>
+          <a:prstGeom prst="rect">
+            <a:avLst/>
+          </a:prstGeom>
+          <a:noFill/>
+        </p:spPr>
+        <p:txBody>
+          <a:bodyPr wrap="square" anchor="t">
+            <a:noAutofit/>
+          </a:bodyPr>
+          <a:lstStyle/>
+          <a:p>
+            <a:pPr algn="l">
+              <a:lnSpc>
+                <a:spcPct val="120000"/>
+              </a:lnSpc>
+            </a:pPr>
+            <a:r>
+              <a:rPr sz="1200" b="0" i="1">
+                <a:solidFill>
+                  <a:srgbClr val="8F5265"/>
+                </a:solidFill>
+                <a:latin typeface="DM Sans"/>
+              </a:rPr>
+              <a:t>To serier side om side (før/etter), minimal forklaring. Illustrativ data.</a:t>
+            </a:r>
+          </a:p>
+        </p:txBody>
+      </p:sp>
+    </p:spTree>
+  </p:cSld>
+  <p:clrMapOvr>
+    <a:masterClrMapping/>
+  </p:clrMapOvr>
+</p:sld>
+</file>
+
+<file path=ppt/slides/slide17.xml><?xml version="1.0" encoding="utf-8"?>
+<p:sld xmlns:a="http://schemas.openxmlformats.org/drawingml/2006/main" xmlns:p="http://schemas.openxmlformats.org/presentationml/2006/main" xmlns:r="http://schemas.openxmlformats.org/officeDocument/2006/relationships">
+  <p:cSld>
+    <p:bg>
+      <p:bgPr>
+        <a:solidFill>
+          <a:srgbClr val="FBF0E5"/>
+        </a:solidFill>
+        <a:effectLst/>
+      </p:bgPr>
+    </p:bg>
+    <p:spTree>
+      <p:nvGrpSpPr>
+        <p:cNvPr id="1" name=""/>
+        <p:cNvGrpSpPr/>
+        <p:nvPr/>
+      </p:nvGrpSpPr>
+      <p:grpSpPr/>
+      <p:sp>
+        <p:nvSpPr>
+          <p:cNvPr id="2" name="Rounded Rectangle 1"/>
+          <p:cNvSpPr/>
+          <p:nvPr/>
+        </p:nvSpPr>
+        <p:spPr>
+          <a:xfrm>
+            <a:off x="777240" y="502920"/>
+            <a:ext cx="274320" cy="27940"/>
+          </a:xfrm>
+          <a:prstGeom prst="roundRect">
+            <a:avLst/>
+          </a:prstGeom>
+          <a:solidFill>
+            <a:srgbClr val="450D21"/>
+          </a:solidFill>
+          <a:ln>
+            <a:noFill/>
+          </a:ln>
+          <a:effectLst/>
+        </p:spPr>
+        <p:style>
+          <a:lnRef idx="1">
+            <a:schemeClr val="accent1"/>
+          </a:lnRef>
+          <a:fillRef idx="3">
+            <a:schemeClr val="accent1"/>
+          </a:fillRef>
+          <a:effectRef idx="2">
+            <a:schemeClr val="accent1"/>
+          </a:effectRef>
+          <a:fontRef idx="minor">
+            <a:schemeClr val="lt1"/>
+          </a:fontRef>
+        </p:style>
+        <p:txBody>
+          <a:bodyPr rtlCol="0" anchor="ctr"/>
+          <a:lstStyle/>
+          <a:p>
+            <a:pPr algn="ctr"/>
+          </a:p>
+        </p:txBody>
+      </p:sp>
+      <p:sp>
+        <p:nvSpPr>
+          <p:cNvPr id="3" name="Rounded Rectangle 2"/>
+          <p:cNvSpPr/>
+          <p:nvPr/>
+        </p:nvSpPr>
+        <p:spPr>
+          <a:xfrm>
+            <a:off x="777240" y="557784"/>
+            <a:ext cx="274320" cy="27940"/>
+          </a:xfrm>
+          <a:prstGeom prst="roundRect">
+            <a:avLst/>
+          </a:prstGeom>
+          <a:solidFill>
+            <a:srgbClr val="450D21"/>
+          </a:solidFill>
+          <a:ln>
+            <a:noFill/>
+          </a:ln>
+          <a:effectLst/>
+        </p:spPr>
+        <p:style>
+          <a:lnRef idx="1">
+            <a:schemeClr val="accent1"/>
+          </a:lnRef>
+          <a:fillRef idx="3">
+            <a:schemeClr val="accent1"/>
+          </a:fillRef>
+          <a:effectRef idx="2">
+            <a:schemeClr val="accent1"/>
+          </a:effectRef>
+          <a:fontRef idx="minor">
+            <a:schemeClr val="lt1"/>
+          </a:fontRef>
+        </p:style>
+        <p:txBody>
+          <a:bodyPr rtlCol="0" anchor="ctr"/>
+          <a:lstStyle/>
+          <a:p>
+            <a:pPr algn="ctr"/>
+          </a:p>
+        </p:txBody>
+      </p:sp>
+      <p:sp>
+        <p:nvSpPr>
+          <p:cNvPr id="4" name="Rounded Rectangle 3"/>
+          <p:cNvSpPr/>
+          <p:nvPr/>
+        </p:nvSpPr>
+        <p:spPr>
+          <a:xfrm>
+            <a:off x="777240" y="612648"/>
+            <a:ext cx="274320" cy="27940"/>
+          </a:xfrm>
+          <a:prstGeom prst="roundRect">
+            <a:avLst/>
+          </a:prstGeom>
+          <a:solidFill>
+            <a:srgbClr val="450D21"/>
+          </a:solidFill>
+          <a:ln>
+            <a:noFill/>
+          </a:ln>
+          <a:effectLst/>
+        </p:spPr>
+        <p:style>
+          <a:lnRef idx="1">
+            <a:schemeClr val="accent1"/>
+          </a:lnRef>
+          <a:fillRef idx="3">
+            <a:schemeClr val="accent1"/>
+          </a:fillRef>
+          <a:effectRef idx="2">
+            <a:schemeClr val="accent1"/>
+          </a:effectRef>
+          <a:fontRef idx="minor">
+            <a:schemeClr val="lt1"/>
+          </a:fontRef>
+        </p:style>
+        <p:txBody>
+          <a:bodyPr rtlCol="0" anchor="ctr"/>
+          <a:lstStyle/>
+          <a:p>
+            <a:pPr algn="ctr"/>
+          </a:p>
+        </p:txBody>
+      </p:sp>
+      <p:pic>
+        <p:nvPicPr>
+          <p:cNvPr id="5" name="Picture 4" descr="miles-logo-red.png"/>
+          <p:cNvPicPr>
+            <a:picLocks noChangeAspect="1"/>
+          </p:cNvPicPr>
+          <p:nvPr/>
+        </p:nvPicPr>
+        <p:blipFill>
+          <a:blip r:embed="rId2"/>
+          <a:stretch>
+            <a:fillRect/>
+          </a:stretch>
+        </p:blipFill>
+        <p:spPr>
+          <a:xfrm>
+            <a:off x="10362895" y="475488"/>
+            <a:ext cx="1051560" cy="355913"/>
+          </a:xfrm>
+          <a:prstGeom prst="rect">
+            <a:avLst/>
+          </a:prstGeom>
+        </p:spPr>
+      </p:pic>
+      <p:sp>
+        <p:nvSpPr>
+          <p:cNvPr id="6" name="TextBox 5"/>
+          <p:cNvSpPr txBox="1"/>
+          <p:nvPr/>
+        </p:nvSpPr>
+        <p:spPr>
+          <a:xfrm>
+            <a:off x="777240" y="960120"/>
+            <a:ext cx="5486400" cy="457200"/>
+          </a:xfrm>
+          <a:prstGeom prst="rect">
+            <a:avLst/>
+          </a:prstGeom>
+          <a:noFill/>
+        </p:spPr>
+        <p:txBody>
+          <a:bodyPr wrap="square" anchor="t">
+            <a:noAutofit/>
+          </a:bodyPr>
+          <a:lstStyle/>
+          <a:p>
+            <a:pPr algn="l">
+              <a:lnSpc>
+                <a:spcPct val="120000"/>
+              </a:lnSpc>
+            </a:pPr>
+            <a:r>
+              <a:rPr sz="1500" b="0" i="1">
+                <a:solidFill>
+                  <a:srgbClr val="FF303B"/>
+                </a:solidFill>
+                <a:latin typeface="Manrope"/>
+              </a:rPr>
+              <a:t>Før og etter</a:t>
+            </a:r>
+          </a:p>
+        </p:txBody>
+      </p:sp>
+      <p:sp>
+        <p:nvSpPr>
+          <p:cNvPr id="7" name="TextBox 6"/>
+          <p:cNvSpPr txBox="1"/>
+          <p:nvPr/>
+        </p:nvSpPr>
+        <p:spPr>
+          <a:xfrm>
+            <a:off x="777240" y="1344168"/>
+            <a:ext cx="10058400" cy="822960"/>
+          </a:xfrm>
+          <a:prstGeom prst="rect">
+            <a:avLst/>
+          </a:prstGeom>
+          <a:noFill/>
+        </p:spPr>
+        <p:txBody>
+          <a:bodyPr wrap="square" anchor="t">
+            <a:noAutofit/>
+          </a:bodyPr>
+          <a:lstStyle/>
+          <a:p>
+            <a:pPr algn="l">
+              <a:lnSpc>
+                <a:spcPct val="120000"/>
+              </a:lnSpc>
+            </a:pPr>
+            <a:r>
+              <a:rPr sz="3000" b="1" i="0">
+                <a:solidFill>
+                  <a:srgbClr val="450D21"/>
+                </a:solidFill>
+                <a:latin typeface="Manrope"/>
+              </a:rPr>
+              <a:t>Andel prosjekter med AI-komponent (%)</a:t>
+            </a:r>
+          </a:p>
+        </p:txBody>
+      </p:sp>
+      <p:graphicFrame>
+        <p:nvGraphicFramePr>
+          <p:cNvPr id="8" name="Chart 7"/>
+          <p:cNvGraphicFramePr>
+            <a:graphicFrameLocks noGrp="1"/>
+          </p:cNvGraphicFramePr>
+          <p:nvPr/>
+        </p:nvGraphicFramePr>
+        <p:xfrm>
+          <a:off x="2743200" y="1828800"/>
+          <a:ext cx="6675120" cy="4114800"/>
+        </p:xfrm>
+        <a:graphic>
+          <a:graphicData uri="http://schemas.openxmlformats.org/drawingml/2006/chart">
+            <c:chart xmlns:c="http://schemas.openxmlformats.org/drawingml/2006/chart" r:id="rId3"/>
+          </a:graphicData>
+        </a:graphic>
+      </p:graphicFrame>
+      <p:sp>
+        <p:nvSpPr>
+          <p:cNvPr id="9" name="TextBox 8"/>
+          <p:cNvSpPr txBox="1"/>
+          <p:nvPr/>
+        </p:nvSpPr>
+        <p:spPr>
+          <a:xfrm>
+            <a:off x="777240" y="6126480"/>
+            <a:ext cx="10058400" cy="365760"/>
+          </a:xfrm>
+          <a:prstGeom prst="rect">
+            <a:avLst/>
+          </a:prstGeom>
+          <a:noFill/>
+        </p:spPr>
+        <p:txBody>
+          <a:bodyPr wrap="square" anchor="t">
+            <a:noAutofit/>
+          </a:bodyPr>
+          <a:lstStyle/>
+          <a:p>
+            <a:pPr algn="l">
+              <a:lnSpc>
+                <a:spcPct val="120000"/>
+              </a:lnSpc>
+            </a:pPr>
+            <a:r>
+              <a:rPr sz="1200" b="0" i="1">
+                <a:solidFill>
+                  <a:srgbClr val="8F5265"/>
+                </a:solidFill>
+                <a:latin typeface="DM Sans"/>
+              </a:rPr>
+              <a:t>Skråningsgraf = 2-kategori linjediagram, én serie per område. Illustrativ data.</a:t>
+            </a:r>
+          </a:p>
+        </p:txBody>
+      </p:sp>
+    </p:spTree>
+  </p:cSld>
+  <p:clrMapOvr>
+    <a:masterClrMapping/>
+  </p:clrMapOvr>
+</p:sld>
+</file>
+
+<file path=ppt/slides/slide18.xml><?xml version="1.0" encoding="utf-8"?>
+<p:sld xmlns:a="http://schemas.openxmlformats.org/drawingml/2006/main" xmlns:p="http://schemas.openxmlformats.org/presentationml/2006/main" xmlns:r="http://schemas.openxmlformats.org/officeDocument/2006/relationships">
+  <p:cSld>
+    <p:bg>
+      <p:bgPr>
+        <a:solidFill>
+          <a:srgbClr val="FBF0E5"/>
+        </a:solidFill>
+        <a:effectLst/>
+      </p:bgPr>
+    </p:bg>
+    <p:spTree>
+      <p:nvGrpSpPr>
+        <p:cNvPr id="1" name=""/>
+        <p:cNvGrpSpPr/>
+        <p:nvPr/>
+      </p:nvGrpSpPr>
+      <p:grpSpPr/>
+      <p:sp>
+        <p:nvSpPr>
+          <p:cNvPr id="2" name="Rounded Rectangle 1"/>
+          <p:cNvSpPr/>
+          <p:nvPr/>
+        </p:nvSpPr>
+        <p:spPr>
+          <a:xfrm>
+            <a:off x="777240" y="502920"/>
+            <a:ext cx="274320" cy="27940"/>
+          </a:xfrm>
+          <a:prstGeom prst="roundRect">
+            <a:avLst/>
+          </a:prstGeom>
+          <a:solidFill>
+            <a:srgbClr val="450D21"/>
+          </a:solidFill>
+          <a:ln>
+            <a:noFill/>
+          </a:ln>
+          <a:effectLst/>
+        </p:spPr>
+        <p:style>
+          <a:lnRef idx="1">
+            <a:schemeClr val="accent1"/>
+          </a:lnRef>
+          <a:fillRef idx="3">
+            <a:schemeClr val="accent1"/>
+          </a:fillRef>
+          <a:effectRef idx="2">
+            <a:schemeClr val="accent1"/>
+          </a:effectRef>
+          <a:fontRef idx="minor">
+            <a:schemeClr val="lt1"/>
+          </a:fontRef>
+        </p:style>
+        <p:txBody>
+          <a:bodyPr rtlCol="0" anchor="ctr"/>
+          <a:lstStyle/>
+          <a:p>
+            <a:pPr algn="ctr"/>
+          </a:p>
+        </p:txBody>
+      </p:sp>
+      <p:sp>
+        <p:nvSpPr>
+          <p:cNvPr id="3" name="Rounded Rectangle 2"/>
+          <p:cNvSpPr/>
+          <p:nvPr/>
+        </p:nvSpPr>
+        <p:spPr>
+          <a:xfrm>
+            <a:off x="777240" y="557784"/>
+            <a:ext cx="274320" cy="27940"/>
+          </a:xfrm>
+          <a:prstGeom prst="roundRect">
+            <a:avLst/>
+          </a:prstGeom>
+          <a:solidFill>
+            <a:srgbClr val="450D21"/>
+          </a:solidFill>
+          <a:ln>
+            <a:noFill/>
+          </a:ln>
+          <a:effectLst/>
+        </p:spPr>
+        <p:style>
+          <a:lnRef idx="1">
+            <a:schemeClr val="accent1"/>
+          </a:lnRef>
+          <a:fillRef idx="3">
+            <a:schemeClr val="accent1"/>
+          </a:fillRef>
+          <a:effectRef idx="2">
+            <a:schemeClr val="accent1"/>
+          </a:effectRef>
+          <a:fontRef idx="minor">
+            <a:schemeClr val="lt1"/>
+          </a:fontRef>
+        </p:style>
+        <p:txBody>
+          <a:bodyPr rtlCol="0" anchor="ctr"/>
+          <a:lstStyle/>
+          <a:p>
+            <a:pPr algn="ctr"/>
+          </a:p>
+        </p:txBody>
+      </p:sp>
+      <p:sp>
+        <p:nvSpPr>
+          <p:cNvPr id="4" name="Rounded Rectangle 3"/>
+          <p:cNvSpPr/>
+          <p:nvPr/>
+        </p:nvSpPr>
+        <p:spPr>
+          <a:xfrm>
+            <a:off x="777240" y="612648"/>
+            <a:ext cx="274320" cy="27940"/>
+          </a:xfrm>
+          <a:prstGeom prst="roundRect">
+            <a:avLst/>
+          </a:prstGeom>
+          <a:solidFill>
+            <a:srgbClr val="450D21"/>
+          </a:solidFill>
+          <a:ln>
+            <a:noFill/>
+          </a:ln>
+          <a:effectLst/>
+        </p:spPr>
+        <p:style>
+          <a:lnRef idx="1">
+            <a:schemeClr val="accent1"/>
+          </a:lnRef>
+          <a:fillRef idx="3">
+            <a:schemeClr val="accent1"/>
+          </a:fillRef>
+          <a:effectRef idx="2">
+            <a:schemeClr val="accent1"/>
+          </a:effectRef>
+          <a:fontRef idx="minor">
+            <a:schemeClr val="lt1"/>
+          </a:fontRef>
+        </p:style>
+        <p:txBody>
+          <a:bodyPr rtlCol="0" anchor="ctr"/>
+          <a:lstStyle/>
+          <a:p>
+            <a:pPr algn="ctr"/>
+          </a:p>
+        </p:txBody>
+      </p:sp>
+      <p:pic>
+        <p:nvPicPr>
+          <p:cNvPr id="5" name="Picture 4" descr="miles-logo-red.png"/>
+          <p:cNvPicPr>
+            <a:picLocks noChangeAspect="1"/>
+          </p:cNvPicPr>
+          <p:nvPr/>
+        </p:nvPicPr>
+        <p:blipFill>
+          <a:blip r:embed="rId2"/>
+          <a:stretch>
+            <a:fillRect/>
+          </a:stretch>
+        </p:blipFill>
+        <p:spPr>
+          <a:xfrm>
+            <a:off x="10362895" y="475488"/>
+            <a:ext cx="1051560" cy="355913"/>
+          </a:xfrm>
+          <a:prstGeom prst="rect">
+            <a:avLst/>
+          </a:prstGeom>
+        </p:spPr>
+      </p:pic>
+      <p:sp>
+        <p:nvSpPr>
+          <p:cNvPr id="6" name="TextBox 5"/>
+          <p:cNvSpPr txBox="1"/>
+          <p:nvPr/>
+        </p:nvSpPr>
+        <p:spPr>
+          <a:xfrm>
+            <a:off x="777240" y="960120"/>
+            <a:ext cx="5486400" cy="457200"/>
+          </a:xfrm>
+          <a:prstGeom prst="rect">
+            <a:avLst/>
+          </a:prstGeom>
+          <a:noFill/>
+        </p:spPr>
+        <p:txBody>
+          <a:bodyPr wrap="square" anchor="t">
+            <a:noAutofit/>
+          </a:bodyPr>
+          <a:lstStyle/>
+          <a:p>
+            <a:pPr algn="l">
+              <a:lnSpc>
+                <a:spcPct val="120000"/>
+              </a:lnSpc>
+            </a:pPr>
+            <a:r>
+              <a:rPr sz="1500" b="0" i="1">
+                <a:solidFill>
+                  <a:srgbClr val="FF303B"/>
+                </a:solidFill>
+                <a:latin typeface="Manrope"/>
+              </a:rPr>
+              <a:t>Korrelasjon</a:t>
+            </a:r>
+          </a:p>
+        </p:txBody>
+      </p:sp>
+      <p:sp>
+        <p:nvSpPr>
+          <p:cNvPr id="7" name="TextBox 6"/>
+          <p:cNvSpPr txBox="1"/>
+          <p:nvPr/>
+        </p:nvSpPr>
+        <p:spPr>
+          <a:xfrm>
+            <a:off x="777240" y="1344168"/>
+            <a:ext cx="10058400" cy="822960"/>
+          </a:xfrm>
+          <a:prstGeom prst="rect">
+            <a:avLst/>
+          </a:prstGeom>
+          <a:noFill/>
+        </p:spPr>
+        <p:txBody>
+          <a:bodyPr wrap="square" anchor="t">
+            <a:noAutofit/>
+          </a:bodyPr>
+          <a:lstStyle/>
+          <a:p>
+            <a:pPr algn="l">
+              <a:lnSpc>
+                <a:spcPct val="120000"/>
+              </a:lnSpc>
+            </a:pPr>
+            <a:r>
+              <a:rPr sz="3000" b="1" i="0">
+                <a:solidFill>
+                  <a:srgbClr val="450D21"/>
+                </a:solidFill>
+                <a:latin typeface="Manrope"/>
+              </a:rPr>
+              <a:t>Varighet vs. teamstørrelse</a:t>
+            </a:r>
+          </a:p>
+        </p:txBody>
+      </p:sp>
+      <p:graphicFrame>
+        <p:nvGraphicFramePr>
+          <p:cNvPr id="8" name="Chart 7"/>
+          <p:cNvGraphicFramePr>
+            <a:graphicFrameLocks noGrp="1"/>
+          </p:cNvGraphicFramePr>
+          <p:nvPr/>
+        </p:nvGraphicFramePr>
+        <p:xfrm>
+          <a:off x="777240" y="1828800"/>
+          <a:ext cx="10637215" cy="4114800"/>
+        </p:xfrm>
+        <a:graphic>
+          <a:graphicData uri="http://schemas.openxmlformats.org/drawingml/2006/chart">
+            <c:chart xmlns:c="http://schemas.openxmlformats.org/drawingml/2006/chart" r:id="rId3"/>
+          </a:graphicData>
+        </a:graphic>
+      </p:graphicFrame>
+      <p:sp>
+        <p:nvSpPr>
+          <p:cNvPr id="9" name="TextBox 8"/>
+          <p:cNvSpPr txBox="1"/>
+          <p:nvPr/>
+        </p:nvSpPr>
+        <p:spPr>
+          <a:xfrm>
+            <a:off x="777240" y="6126480"/>
+            <a:ext cx="10058400" cy="365760"/>
+          </a:xfrm>
+          <a:prstGeom prst="rect">
+            <a:avLst/>
+          </a:prstGeom>
+          <a:noFill/>
+        </p:spPr>
+        <p:txBody>
+          <a:bodyPr wrap="square" anchor="t">
+            <a:noAutofit/>
+          </a:bodyPr>
+          <a:lstStyle/>
+          <a:p>
+            <a:pPr algn="l">
+              <a:lnSpc>
+                <a:spcPct val="120000"/>
+              </a:lnSpc>
+            </a:pPr>
+            <a:r>
+              <a:rPr sz="1200" b="0" i="1">
+                <a:solidFill>
+                  <a:srgbClr val="8F5265"/>
+                </a:solidFill>
+                <a:latin typeface="DM Sans"/>
+              </a:rPr>
+              <a:t>Native XY-punktdiagram, uthevet referansepunkt i rødt. Illustrativ data.</a:t>
+            </a:r>
+          </a:p>
+        </p:txBody>
+      </p:sp>
+    </p:spTree>
+  </p:cSld>
+  <p:clrMapOvr>
+    <a:masterClrMapping/>
+  </p:clrMapOvr>
+</p:sld>
+</file>
+
+<file path=ppt/slides/slide19.xml><?xml version="1.0" encoding="utf-8"?>
+<p:sld xmlns:a="http://schemas.openxmlformats.org/drawingml/2006/main" xmlns:p="http://schemas.openxmlformats.org/presentationml/2006/main" xmlns:r="http://schemas.openxmlformats.org/officeDocument/2006/relationships">
+  <p:cSld>
+    <p:bg>
+      <p:bgPr>
+        <a:solidFill>
+          <a:srgbClr val="FBF0E5"/>
+        </a:solidFill>
+        <a:effectLst/>
+      </p:bgPr>
+    </p:bg>
+    <p:spTree>
+      <p:nvGrpSpPr>
+        <p:cNvPr id="1" name=""/>
+        <p:cNvGrpSpPr/>
+        <p:nvPr/>
+      </p:nvGrpSpPr>
+      <p:grpSpPr/>
+      <p:sp>
+        <p:nvSpPr>
+          <p:cNvPr id="2" name="Rounded Rectangle 1"/>
+          <p:cNvSpPr/>
+          <p:nvPr/>
+        </p:nvSpPr>
+        <p:spPr>
+          <a:xfrm>
+            <a:off x="777240" y="502920"/>
+            <a:ext cx="274320" cy="27940"/>
+          </a:xfrm>
+          <a:prstGeom prst="roundRect">
+            <a:avLst/>
+          </a:prstGeom>
+          <a:solidFill>
+            <a:srgbClr val="450D21"/>
+          </a:solidFill>
+          <a:ln>
+            <a:noFill/>
+          </a:ln>
+          <a:effectLst/>
+        </p:spPr>
+        <p:style>
+          <a:lnRef idx="1">
+            <a:schemeClr val="accent1"/>
+          </a:lnRef>
+          <a:fillRef idx="3">
+            <a:schemeClr val="accent1"/>
+          </a:fillRef>
+          <a:effectRef idx="2">
+            <a:schemeClr val="accent1"/>
+          </a:effectRef>
+          <a:fontRef idx="minor">
+            <a:schemeClr val="lt1"/>
+          </a:fontRef>
+        </p:style>
+        <p:txBody>
+          <a:bodyPr rtlCol="0" anchor="ctr"/>
+          <a:lstStyle/>
+          <a:p>
+            <a:pPr algn="ctr"/>
+          </a:p>
+        </p:txBody>
+      </p:sp>
+      <p:sp>
+        <p:nvSpPr>
+          <p:cNvPr id="3" name="Rounded Rectangle 2"/>
+          <p:cNvSpPr/>
+          <p:nvPr/>
+        </p:nvSpPr>
+        <p:spPr>
+          <a:xfrm>
+            <a:off x="777240" y="557784"/>
+            <a:ext cx="274320" cy="27940"/>
+          </a:xfrm>
+          <a:prstGeom prst="roundRect">
+            <a:avLst/>
+          </a:prstGeom>
+          <a:solidFill>
+            <a:srgbClr val="450D21"/>
+          </a:solidFill>
+          <a:ln>
+            <a:noFill/>
+          </a:ln>
+          <a:effectLst/>
+        </p:spPr>
+        <p:style>
+          <a:lnRef idx="1">
+            <a:schemeClr val="accent1"/>
+          </a:lnRef>
+          <a:fillRef idx="3">
+            <a:schemeClr val="accent1"/>
+          </a:fillRef>
+          <a:effectRef idx="2">
+            <a:schemeClr val="accent1"/>
+          </a:effectRef>
+          <a:fontRef idx="minor">
+            <a:schemeClr val="lt1"/>
+          </a:fontRef>
+        </p:style>
+        <p:txBody>
+          <a:bodyPr rtlCol="0" anchor="ctr"/>
+          <a:lstStyle/>
+          <a:p>
+            <a:pPr algn="ctr"/>
+          </a:p>
+        </p:txBody>
+      </p:sp>
+      <p:sp>
+        <p:nvSpPr>
+          <p:cNvPr id="4" name="Rounded Rectangle 3"/>
+          <p:cNvSpPr/>
+          <p:nvPr/>
+        </p:nvSpPr>
+        <p:spPr>
+          <a:xfrm>
+            <a:off x="777240" y="612648"/>
+            <a:ext cx="274320" cy="27940"/>
+          </a:xfrm>
+          <a:prstGeom prst="roundRect">
+            <a:avLst/>
+          </a:prstGeom>
+          <a:solidFill>
+            <a:srgbClr val="450D21"/>
+          </a:solidFill>
+          <a:ln>
+            <a:noFill/>
+          </a:ln>
+          <a:effectLst/>
+        </p:spPr>
+        <p:style>
+          <a:lnRef idx="1">
+            <a:schemeClr val="accent1"/>
+          </a:lnRef>
+          <a:fillRef idx="3">
+            <a:schemeClr val="accent1"/>
+          </a:fillRef>
+          <a:effectRef idx="2">
+            <a:schemeClr val="accent1"/>
+          </a:effectRef>
+          <a:fontRef idx="minor">
+            <a:schemeClr val="lt1"/>
+          </a:fontRef>
+        </p:style>
+        <p:txBody>
+          <a:bodyPr rtlCol="0" anchor="ctr"/>
+          <a:lstStyle/>
+          <a:p>
+            <a:pPr algn="ctr"/>
+          </a:p>
+        </p:txBody>
+      </p:sp>
+      <p:pic>
+        <p:nvPicPr>
+          <p:cNvPr id="5" name="Picture 4" descr="miles-logo-red.png"/>
+          <p:cNvPicPr>
+            <a:picLocks noChangeAspect="1"/>
+          </p:cNvPicPr>
+          <p:nvPr/>
+        </p:nvPicPr>
+        <p:blipFill>
+          <a:blip r:embed="rId2"/>
+          <a:stretch>
+            <a:fillRect/>
+          </a:stretch>
+        </p:blipFill>
+        <p:spPr>
+          <a:xfrm>
+            <a:off x="10362895" y="475488"/>
+            <a:ext cx="1051560" cy="355913"/>
+          </a:xfrm>
+          <a:prstGeom prst="rect">
+            <a:avLst/>
+          </a:prstGeom>
+        </p:spPr>
+      </p:pic>
+      <p:sp>
+        <p:nvSpPr>
+          <p:cNvPr id="6" name="TextBox 5"/>
+          <p:cNvSpPr txBox="1"/>
+          <p:nvPr/>
+        </p:nvSpPr>
+        <p:spPr>
+          <a:xfrm>
+            <a:off x="777240" y="960120"/>
+            <a:ext cx="5486400" cy="457200"/>
+          </a:xfrm>
+          <a:prstGeom prst="rect">
+            <a:avLst/>
+          </a:prstGeom>
+          <a:noFill/>
+        </p:spPr>
+        <p:txBody>
+          <a:bodyPr wrap="square" anchor="t">
+            <a:noAutofit/>
+          </a:bodyPr>
+          <a:lstStyle/>
+          <a:p>
+            <a:pPr algn="l">
+              <a:lnSpc>
+                <a:spcPct val="120000"/>
+              </a:lnSpc>
+            </a:pPr>
+            <a:r>
+              <a:rPr sz="1500" b="0" i="1">
+                <a:solidFill>
+                  <a:srgbClr val="FF303B"/>
+                </a:solidFill>
+                <a:latin typeface="Manrope"/>
+              </a:rPr>
+              <a:t>Mange serier</a:t>
+            </a:r>
+          </a:p>
+        </p:txBody>
+      </p:sp>
+      <p:sp>
+        <p:nvSpPr>
+          <p:cNvPr id="7" name="TextBox 6"/>
+          <p:cNvSpPr txBox="1"/>
+          <p:nvPr/>
+        </p:nvSpPr>
+        <p:spPr>
+          <a:xfrm>
+            <a:off x="777240" y="1344168"/>
+            <a:ext cx="10058400" cy="822960"/>
+          </a:xfrm>
+          <a:prstGeom prst="rect">
+            <a:avLst/>
+          </a:prstGeom>
+          <a:noFill/>
+        </p:spPr>
+        <p:txBody>
+          <a:bodyPr wrap="square" anchor="t">
+            <a:noAutofit/>
+          </a:bodyPr>
+          <a:lstStyle/>
+          <a:p>
+            <a:pPr algn="l">
+              <a:lnSpc>
+                <a:spcPct val="120000"/>
+              </a:lnSpc>
+            </a:pPr>
+            <a:r>
+              <a:rPr sz="3000" b="1" i="0">
+                <a:solidFill>
+                  <a:srgbClr val="450D21"/>
+                </a:solidFill>
+                <a:latin typeface="Manrope"/>
+              </a:rPr>
+              <a:t>Vekst per kontor 2021–2026</a:t>
+            </a:r>
+          </a:p>
+        </p:txBody>
+      </p:sp>
+      <p:sp>
+        <p:nvSpPr>
+          <p:cNvPr id="8" name="TextBox 7"/>
+          <p:cNvSpPr txBox="1"/>
+          <p:nvPr/>
+        </p:nvSpPr>
+        <p:spPr>
+          <a:xfrm>
+            <a:off x="777240" y="2103120"/>
+            <a:ext cx="2468880" cy="274320"/>
+          </a:xfrm>
+          <a:prstGeom prst="rect">
+            <a:avLst/>
+          </a:prstGeom>
+          <a:noFill/>
+        </p:spPr>
+        <p:txBody>
+          <a:bodyPr wrap="square" anchor="t">
+            <a:noAutofit/>
+          </a:bodyPr>
+          <a:lstStyle/>
+          <a:p>
+            <a:pPr algn="l">
+              <a:lnSpc>
+                <a:spcPct val="120000"/>
+              </a:lnSpc>
+            </a:pPr>
+            <a:r>
+              <a:rPr sz="1300" b="1" i="0">
+                <a:solidFill>
+                  <a:srgbClr val="450D21"/>
+                </a:solidFill>
+                <a:latin typeface="DM Sans"/>
+              </a:rPr>
+              <a:t>Oslo</a:t>
+            </a:r>
+          </a:p>
+        </p:txBody>
+      </p:sp>
+      <p:graphicFrame>
+        <p:nvGraphicFramePr>
+          <p:cNvPr id="9" name="Chart 8"/>
+          <p:cNvGraphicFramePr>
+            <a:graphicFrameLocks noGrp="1"/>
+          </p:cNvGraphicFramePr>
+          <p:nvPr/>
+        </p:nvGraphicFramePr>
+        <p:xfrm>
+          <a:off x="777240" y="2395728"/>
+          <a:ext cx="2468880" cy="1325880"/>
+        </p:xfrm>
+        <a:graphic>
+          <a:graphicData uri="http://schemas.openxmlformats.org/drawingml/2006/chart">
+            <c:chart xmlns:c="http://schemas.openxmlformats.org/drawingml/2006/chart" r:id="rId3"/>
+          </a:graphicData>
+        </a:graphic>
+      </p:graphicFrame>
+      <p:sp>
+        <p:nvSpPr>
+          <p:cNvPr id="10" name="TextBox 9"/>
+          <p:cNvSpPr txBox="1"/>
+          <p:nvPr/>
+        </p:nvSpPr>
+        <p:spPr>
+          <a:xfrm>
+            <a:off x="3474720" y="2103120"/>
+            <a:ext cx="2468880" cy="274320"/>
+          </a:xfrm>
+          <a:prstGeom prst="rect">
+            <a:avLst/>
+          </a:prstGeom>
+          <a:noFill/>
+        </p:spPr>
+        <p:txBody>
+          <a:bodyPr wrap="square" anchor="t">
+            <a:noAutofit/>
+          </a:bodyPr>
+          <a:lstStyle/>
+          <a:p>
+            <a:pPr algn="l">
+              <a:lnSpc>
+                <a:spcPct val="120000"/>
+              </a:lnSpc>
+            </a:pPr>
+            <a:r>
+              <a:rPr sz="1300" b="1" i="0">
+                <a:solidFill>
+                  <a:srgbClr val="450D21"/>
+                </a:solidFill>
+                <a:latin typeface="DM Sans"/>
+              </a:rPr>
+              <a:t>Bergen</a:t>
+            </a:r>
+          </a:p>
+        </p:txBody>
+      </p:sp>
+      <p:graphicFrame>
+        <p:nvGraphicFramePr>
+          <p:cNvPr id="11" name="Chart 10"/>
+          <p:cNvGraphicFramePr>
+            <a:graphicFrameLocks noGrp="1"/>
+          </p:cNvGraphicFramePr>
+          <p:nvPr/>
+        </p:nvGraphicFramePr>
+        <p:xfrm>
+          <a:off x="3474720" y="2395728"/>
+          <a:ext cx="2468880" cy="1325880"/>
+        </p:xfrm>
+        <a:graphic>
+          <a:graphicData uri="http://schemas.openxmlformats.org/drawingml/2006/chart">
+            <c:chart xmlns:c="http://schemas.openxmlformats.org/drawingml/2006/chart" r:id="rId4"/>
+          </a:graphicData>
+        </a:graphic>
+      </p:graphicFrame>
+      <p:sp>
+        <p:nvSpPr>
+          <p:cNvPr id="12" name="TextBox 11"/>
+          <p:cNvSpPr txBox="1"/>
+          <p:nvPr/>
+        </p:nvSpPr>
+        <p:spPr>
+          <a:xfrm>
+            <a:off x="6172200" y="2103120"/>
+            <a:ext cx="2468880" cy="274320"/>
+          </a:xfrm>
+          <a:prstGeom prst="rect">
+            <a:avLst/>
+          </a:prstGeom>
+          <a:noFill/>
+        </p:spPr>
+        <p:txBody>
+          <a:bodyPr wrap="square" anchor="t">
+            <a:noAutofit/>
+          </a:bodyPr>
+          <a:lstStyle/>
+          <a:p>
+            <a:pPr algn="l">
+              <a:lnSpc>
+                <a:spcPct val="120000"/>
+              </a:lnSpc>
+            </a:pPr>
+            <a:r>
+              <a:rPr sz="1300" b="1" i="0">
+                <a:solidFill>
+                  <a:srgbClr val="450D21"/>
+                </a:solidFill>
+                <a:latin typeface="DM Sans"/>
+              </a:rPr>
+              <a:t>Trondheim</a:t>
+            </a:r>
+          </a:p>
+        </p:txBody>
+      </p:sp>
+      <p:graphicFrame>
+        <p:nvGraphicFramePr>
+          <p:cNvPr id="13" name="Chart 12"/>
+          <p:cNvGraphicFramePr>
+            <a:graphicFrameLocks noGrp="1"/>
+          </p:cNvGraphicFramePr>
+          <p:nvPr/>
+        </p:nvGraphicFramePr>
+        <p:xfrm>
+          <a:off x="6172200" y="2395728"/>
+          <a:ext cx="2468880" cy="1325880"/>
+        </p:xfrm>
+        <a:graphic>
+          <a:graphicData uri="http://schemas.openxmlformats.org/drawingml/2006/chart">
+            <c:chart xmlns:c="http://schemas.openxmlformats.org/drawingml/2006/chart" r:id="rId5"/>
+          </a:graphicData>
+        </a:graphic>
+      </p:graphicFrame>
+      <p:sp>
+        <p:nvSpPr>
+          <p:cNvPr id="14" name="TextBox 13"/>
+          <p:cNvSpPr txBox="1"/>
+          <p:nvPr/>
+        </p:nvSpPr>
+        <p:spPr>
+          <a:xfrm>
+            <a:off x="8869680" y="2103120"/>
+            <a:ext cx="2468880" cy="274320"/>
+          </a:xfrm>
+          <a:prstGeom prst="rect">
+            <a:avLst/>
+          </a:prstGeom>
+          <a:noFill/>
+        </p:spPr>
+        <p:txBody>
+          <a:bodyPr wrap="square" anchor="t">
+            <a:noAutofit/>
+          </a:bodyPr>
+          <a:lstStyle/>
+          <a:p>
+            <a:pPr algn="l">
+              <a:lnSpc>
+                <a:spcPct val="120000"/>
+              </a:lnSpc>
+            </a:pPr>
+            <a:r>
+              <a:rPr sz="1300" b="1" i="0">
+                <a:solidFill>
+                  <a:srgbClr val="450D21"/>
+                </a:solidFill>
+                <a:latin typeface="DM Sans"/>
+              </a:rPr>
+              <a:t>Stavanger</a:t>
+            </a:r>
+          </a:p>
+        </p:txBody>
+      </p:sp>
+      <p:graphicFrame>
+        <p:nvGraphicFramePr>
+          <p:cNvPr id="15" name="Chart 14"/>
+          <p:cNvGraphicFramePr>
+            <a:graphicFrameLocks noGrp="1"/>
+          </p:cNvGraphicFramePr>
+          <p:nvPr/>
+        </p:nvGraphicFramePr>
+        <p:xfrm>
+          <a:off x="8869680" y="2395728"/>
+          <a:ext cx="2468880" cy="1325880"/>
+        </p:xfrm>
+        <a:graphic>
+          <a:graphicData uri="http://schemas.openxmlformats.org/drawingml/2006/chart">
+            <c:chart xmlns:c="http://schemas.openxmlformats.org/drawingml/2006/chart" r:id="rId6"/>
+          </a:graphicData>
+        </a:graphic>
+      </p:graphicFrame>
+      <p:sp>
+        <p:nvSpPr>
+          <p:cNvPr id="16" name="TextBox 15"/>
+          <p:cNvSpPr txBox="1"/>
+          <p:nvPr/>
+        </p:nvSpPr>
+        <p:spPr>
+          <a:xfrm>
+            <a:off x="777240" y="4251960"/>
+            <a:ext cx="2468880" cy="274320"/>
+          </a:xfrm>
+          <a:prstGeom prst="rect">
+            <a:avLst/>
+          </a:prstGeom>
+          <a:noFill/>
+        </p:spPr>
+        <p:txBody>
+          <a:bodyPr wrap="square" anchor="t">
+            <a:noAutofit/>
+          </a:bodyPr>
+          <a:lstStyle/>
+          <a:p>
+            <a:pPr algn="l">
+              <a:lnSpc>
+                <a:spcPct val="120000"/>
+              </a:lnSpc>
+            </a:pPr>
+            <a:r>
+              <a:rPr sz="1300" b="1" i="0">
+                <a:solidFill>
+                  <a:srgbClr val="450D21"/>
+                </a:solidFill>
+                <a:latin typeface="DM Sans"/>
+              </a:rPr>
+              <a:t>Litauen</a:t>
+            </a:r>
+          </a:p>
+        </p:txBody>
+      </p:sp>
+      <p:graphicFrame>
+        <p:nvGraphicFramePr>
+          <p:cNvPr id="17" name="Chart 16"/>
+          <p:cNvGraphicFramePr>
+            <a:graphicFrameLocks noGrp="1"/>
+          </p:cNvGraphicFramePr>
+          <p:nvPr/>
+        </p:nvGraphicFramePr>
+        <p:xfrm>
+          <a:off x="777240" y="4544568"/>
+          <a:ext cx="2468880" cy="1325880"/>
+        </p:xfrm>
+        <a:graphic>
+          <a:graphicData uri="http://schemas.openxmlformats.org/drawingml/2006/chart">
+            <c:chart xmlns:c="http://schemas.openxmlformats.org/drawingml/2006/chart" r:id="rId7"/>
+          </a:graphicData>
+        </a:graphic>
+      </p:graphicFrame>
+      <p:sp>
+        <p:nvSpPr>
+          <p:cNvPr id="18" name="TextBox 17"/>
+          <p:cNvSpPr txBox="1"/>
+          <p:nvPr/>
+        </p:nvSpPr>
+        <p:spPr>
+          <a:xfrm>
+            <a:off x="3474720" y="4251960"/>
+            <a:ext cx="2468880" cy="274320"/>
+          </a:xfrm>
+          <a:prstGeom prst="rect">
+            <a:avLst/>
+          </a:prstGeom>
+          <a:noFill/>
+        </p:spPr>
+        <p:txBody>
+          <a:bodyPr wrap="square" anchor="t">
+            <a:noAutofit/>
+          </a:bodyPr>
+          <a:lstStyle/>
+          <a:p>
+            <a:pPr algn="l">
+              <a:lnSpc>
+                <a:spcPct val="120000"/>
+              </a:lnSpc>
+            </a:pPr>
+            <a:r>
+              <a:rPr sz="1300" b="1" i="0">
+                <a:solidFill>
+                  <a:srgbClr val="450D21"/>
+                </a:solidFill>
+                <a:latin typeface="DM Sans"/>
+              </a:rPr>
+              <a:t>Ålesund</a:t>
+            </a:r>
+          </a:p>
+        </p:txBody>
+      </p:sp>
+      <p:graphicFrame>
+        <p:nvGraphicFramePr>
+          <p:cNvPr id="19" name="Chart 18"/>
+          <p:cNvGraphicFramePr>
+            <a:graphicFrameLocks noGrp="1"/>
+          </p:cNvGraphicFramePr>
+          <p:nvPr/>
+        </p:nvGraphicFramePr>
+        <p:xfrm>
+          <a:off x="3474720" y="4544568"/>
+          <a:ext cx="2468880" cy="1325880"/>
+        </p:xfrm>
+        <a:graphic>
+          <a:graphicData uri="http://schemas.openxmlformats.org/drawingml/2006/chart">
+            <c:chart xmlns:c="http://schemas.openxmlformats.org/drawingml/2006/chart" r:id="rId8"/>
+          </a:graphicData>
+        </a:graphic>
+      </p:graphicFrame>
+      <p:sp>
+        <p:nvSpPr>
+          <p:cNvPr id="20" name="TextBox 19"/>
+          <p:cNvSpPr txBox="1"/>
+          <p:nvPr/>
+        </p:nvSpPr>
+        <p:spPr>
+          <a:xfrm>
+            <a:off x="6172200" y="4251960"/>
+            <a:ext cx="2468880" cy="274320"/>
+          </a:xfrm>
+          <a:prstGeom prst="rect">
+            <a:avLst/>
+          </a:prstGeom>
+          <a:noFill/>
+        </p:spPr>
+        <p:txBody>
+          <a:bodyPr wrap="square" anchor="t">
+            <a:noAutofit/>
+          </a:bodyPr>
+          <a:lstStyle/>
+          <a:p>
+            <a:pPr algn="l">
+              <a:lnSpc>
+                <a:spcPct val="120000"/>
+              </a:lnSpc>
+            </a:pPr>
+            <a:r>
+              <a:rPr sz="1300" b="1" i="0">
+                <a:solidFill>
+                  <a:srgbClr val="450D21"/>
+                </a:solidFill>
+                <a:latin typeface="DM Sans"/>
+              </a:rPr>
+              <a:t>Haugesund</a:t>
+            </a:r>
+          </a:p>
+        </p:txBody>
+      </p:sp>
+      <p:graphicFrame>
+        <p:nvGraphicFramePr>
+          <p:cNvPr id="21" name="Chart 20"/>
+          <p:cNvGraphicFramePr>
+            <a:graphicFrameLocks noGrp="1"/>
+          </p:cNvGraphicFramePr>
+          <p:nvPr/>
+        </p:nvGraphicFramePr>
+        <p:xfrm>
+          <a:off x="6172200" y="4544568"/>
+          <a:ext cx="2468880" cy="1325880"/>
+        </p:xfrm>
+        <a:graphic>
+          <a:graphicData uri="http://schemas.openxmlformats.org/drawingml/2006/chart">
+            <c:chart xmlns:c="http://schemas.openxmlformats.org/drawingml/2006/chart" r:id="rId9"/>
+          </a:graphicData>
+        </a:graphic>
+      </p:graphicFrame>
+      <p:sp>
+        <p:nvSpPr>
+          <p:cNvPr id="22" name="TextBox 21"/>
+          <p:cNvSpPr txBox="1"/>
+          <p:nvPr/>
+        </p:nvSpPr>
+        <p:spPr>
+          <a:xfrm>
+            <a:off x="8869680" y="4251960"/>
+            <a:ext cx="2468880" cy="274320"/>
+          </a:xfrm>
+          <a:prstGeom prst="rect">
+            <a:avLst/>
+          </a:prstGeom>
+          <a:noFill/>
+        </p:spPr>
+        <p:txBody>
+          <a:bodyPr wrap="square" anchor="t">
+            <a:noAutofit/>
+          </a:bodyPr>
+          <a:lstStyle/>
+          <a:p>
+            <a:pPr algn="l">
+              <a:lnSpc>
+                <a:spcPct val="120000"/>
+              </a:lnSpc>
+            </a:pPr>
+            <a:r>
+              <a:rPr sz="1300" b="1" i="0">
+                <a:solidFill>
+                  <a:srgbClr val="450D21"/>
+                </a:solidFill>
+                <a:latin typeface="DM Sans"/>
+              </a:rPr>
+              <a:t>Innlandet</a:t>
+            </a:r>
+          </a:p>
+        </p:txBody>
+      </p:sp>
+      <p:graphicFrame>
+        <p:nvGraphicFramePr>
+          <p:cNvPr id="23" name="Chart 22"/>
+          <p:cNvGraphicFramePr>
+            <a:graphicFrameLocks noGrp="1"/>
+          </p:cNvGraphicFramePr>
+          <p:nvPr/>
+        </p:nvGraphicFramePr>
+        <p:xfrm>
+          <a:off x="8869680" y="4544568"/>
+          <a:ext cx="2468880" cy="1325880"/>
+        </p:xfrm>
+        <a:graphic>
+          <a:graphicData uri="http://schemas.openxmlformats.org/drawingml/2006/chart">
+            <c:chart xmlns:c="http://schemas.openxmlformats.org/drawingml/2006/chart" r:id="rId10"/>
+          </a:graphicData>
+        </a:graphic>
+      </p:graphicFrame>
+      <p:sp>
+        <p:nvSpPr>
+          <p:cNvPr id="24" name="TextBox 23"/>
+          <p:cNvSpPr txBox="1"/>
+          <p:nvPr/>
+        </p:nvSpPr>
+        <p:spPr>
+          <a:xfrm>
+            <a:off x="777240" y="6126480"/>
+            <a:ext cx="10058400" cy="365760"/>
+          </a:xfrm>
+          <a:prstGeom prst="rect">
+            <a:avLst/>
+          </a:prstGeom>
+          <a:noFill/>
+        </p:spPr>
+        <p:txBody>
+          <a:bodyPr wrap="square" anchor="t">
+            <a:noAutofit/>
+          </a:bodyPr>
+          <a:lstStyle/>
+          <a:p>
+            <a:pPr algn="l">
+              <a:lnSpc>
+                <a:spcPct val="120000"/>
+              </a:lnSpc>
+            </a:pPr>
+            <a:r>
+              <a:rPr sz="1200" b="0" i="1">
+                <a:solidFill>
+                  <a:srgbClr val="8F5265"/>
+                </a:solidFill>
+                <a:latin typeface="DM Sans"/>
+              </a:rPr>
+              <a:t>Small multiples: åtte native mini-linjediagram på felles skala (0–125). Illustrativ data.</a:t>
             </a:r>
           </a:p>
         </p:txBody>
@@ -5033,6 +12498,260 @@
           </a:prstGeom>
         </p:spPr>
       </p:pic>
+    </p:spTree>
+  </p:cSld>
+  <p:clrMapOvr>
+    <a:masterClrMapping/>
+  </p:clrMapOvr>
+</p:sld>
+</file>
+
+<file path=ppt/slides/slide20.xml><?xml version="1.0" encoding="utf-8"?>
+<p:sld xmlns:a="http://schemas.openxmlformats.org/drawingml/2006/main" xmlns:p="http://schemas.openxmlformats.org/presentationml/2006/main" xmlns:r="http://schemas.openxmlformats.org/officeDocument/2006/relationships">
+  <p:cSld>
+    <p:bg>
+      <p:bgPr>
+        <a:solidFill>
+          <a:srgbClr val="FF303B"/>
+        </a:solidFill>
+        <a:effectLst/>
+      </p:bgPr>
+    </p:bg>
+    <p:spTree>
+      <p:nvGrpSpPr>
+        <p:cNvPr id="1" name=""/>
+        <p:cNvGrpSpPr/>
+        <p:nvPr/>
+      </p:nvGrpSpPr>
+      <p:grpSpPr/>
+      <p:pic>
+        <p:nvPicPr>
+          <p:cNvPr id="2" name="Picture 1" descr="miles-logo-cream.png"/>
+          <p:cNvPicPr>
+            <a:picLocks noChangeAspect="1"/>
+          </p:cNvPicPr>
+          <p:nvPr/>
+        </p:nvPicPr>
+        <p:blipFill>
+          <a:blip r:embed="rId2"/>
+          <a:stretch>
+            <a:fillRect/>
+          </a:stretch>
+        </p:blipFill>
+        <p:spPr>
+          <a:xfrm>
+            <a:off x="777240" y="502920"/>
+            <a:ext cx="1463040" cy="459397"/>
+          </a:xfrm>
+          <a:prstGeom prst="rect">
+            <a:avLst/>
+          </a:prstGeom>
+        </p:spPr>
+      </p:pic>
+      <p:sp>
+        <p:nvSpPr>
+          <p:cNvPr id="3" name="TextBox 2"/>
+          <p:cNvSpPr txBox="1"/>
+          <p:nvPr/>
+        </p:nvSpPr>
+        <p:spPr>
+          <a:xfrm>
+            <a:off x="777240" y="3566160"/>
+            <a:ext cx="9144000" cy="1097280"/>
+          </a:xfrm>
+          <a:prstGeom prst="rect">
+            <a:avLst/>
+          </a:prstGeom>
+          <a:noFill/>
+        </p:spPr>
+        <p:txBody>
+          <a:bodyPr wrap="square" anchor="t">
+            <a:noAutofit/>
+          </a:bodyPr>
+          <a:lstStyle/>
+          <a:p>
+            <a:pPr algn="l">
+              <a:lnSpc>
+                <a:spcPct val="120000"/>
+              </a:lnSpc>
+            </a:pPr>
+            <a:r>
+              <a:rPr sz="4800" b="0" i="0">
+                <a:solidFill>
+                  <a:srgbClr val="FBF0E5"/>
+                </a:solidFill>
+                <a:latin typeface="Manrope"/>
+              </a:rPr>
+              <a:t>Takk for tiden din! :)</a:t>
+            </a:r>
+          </a:p>
+        </p:txBody>
+      </p:sp>
+      <p:sp>
+        <p:nvSpPr>
+          <p:cNvPr id="4" name="Rounded Rectangle 3"/>
+          <p:cNvSpPr/>
+          <p:nvPr/>
+        </p:nvSpPr>
+        <p:spPr>
+          <a:xfrm>
+            <a:off x="777240" y="4937760"/>
+            <a:ext cx="1463040" cy="384048"/>
+          </a:xfrm>
+          <a:prstGeom prst="roundRect">
+            <a:avLst>
+              <a:gd name="adj" fmla="val 50000"/>
+            </a:avLst>
+          </a:prstGeom>
+          <a:solidFill>
+            <a:srgbClr val="FBF0E5"/>
+          </a:solidFill>
+          <a:ln>
+            <a:noFill/>
+          </a:ln>
+          <a:effectLst/>
+        </p:spPr>
+        <p:style>
+          <a:lnRef idx="1">
+            <a:schemeClr val="accent1"/>
+          </a:lnRef>
+          <a:fillRef idx="3">
+            <a:schemeClr val="accent1"/>
+          </a:fillRef>
+          <a:effectRef idx="2">
+            <a:schemeClr val="accent1"/>
+          </a:effectRef>
+          <a:fontRef idx="minor">
+            <a:schemeClr val="lt1"/>
+          </a:fontRef>
+        </p:style>
+        <p:txBody>
+          <a:bodyPr rtlCol="0" anchor="ctr" wrap="none"/>
+          <a:lstStyle/>
+          <a:p>
+            <a:pPr algn="ctr"/>
+            <a:r>
+              <a:rPr sz="1300" b="1">
+                <a:solidFill>
+                  <a:srgbClr val="450D21"/>
+                </a:solidFill>
+                <a:latin typeface="DM Sans"/>
+              </a:rPr>
+              <a:t>←  Forside</a:t>
+            </a:r>
+          </a:p>
+        </p:txBody>
+      </p:sp>
+      <p:sp>
+        <p:nvSpPr>
+          <p:cNvPr id="5" name="Rounded Rectangle 4"/>
+          <p:cNvSpPr/>
+          <p:nvPr/>
+        </p:nvSpPr>
+        <p:spPr>
+          <a:xfrm>
+            <a:off x="2468880" y="4937760"/>
+            <a:ext cx="2569464" cy="384048"/>
+          </a:xfrm>
+          <a:prstGeom prst="roundRect">
+            <a:avLst>
+              <a:gd name="adj" fmla="val 50000"/>
+            </a:avLst>
+          </a:prstGeom>
+          <a:solidFill>
+            <a:srgbClr val="FBF0E5"/>
+          </a:solidFill>
+          <a:ln>
+            <a:noFill/>
+          </a:ln>
+          <a:effectLst/>
+        </p:spPr>
+        <p:style>
+          <a:lnRef idx="1">
+            <a:schemeClr val="accent1"/>
+          </a:lnRef>
+          <a:fillRef idx="3">
+            <a:schemeClr val="accent1"/>
+          </a:fillRef>
+          <a:effectRef idx="2">
+            <a:schemeClr val="accent1"/>
+          </a:effectRef>
+          <a:fontRef idx="minor">
+            <a:schemeClr val="lt1"/>
+          </a:fontRef>
+        </p:style>
+        <p:txBody>
+          <a:bodyPr rtlCol="0" anchor="ctr" wrap="none"/>
+          <a:lstStyle/>
+          <a:p>
+            <a:pPr algn="ctr"/>
+            <a:r>
+              <a:rPr sz="1300" b="1">
+                <a:solidFill>
+                  <a:srgbClr val="450D21"/>
+                </a:solidFill>
+                <a:latin typeface="DM Sans"/>
+              </a:rPr>
+              <a:t>←  Innholdsoversikten</a:t>
+            </a:r>
+          </a:p>
+        </p:txBody>
+      </p:sp>
+      <p:sp>
+        <p:nvSpPr>
+          <p:cNvPr id="6" name="Rounded Rectangle 5"/>
+          <p:cNvSpPr/>
+          <p:nvPr/>
+        </p:nvSpPr>
+        <p:spPr>
+          <a:xfrm>
+            <a:off x="5266944" y="4937760"/>
+            <a:ext cx="2971800" cy="384048"/>
+          </a:xfrm>
+          <a:prstGeom prst="roundRect">
+            <a:avLst>
+              <a:gd name="adj" fmla="val 50000"/>
+            </a:avLst>
+          </a:prstGeom>
+          <a:solidFill>
+            <a:srgbClr val="FBF0E5"/>
+          </a:solidFill>
+          <a:ln>
+            <a:noFill/>
+          </a:ln>
+          <a:effectLst/>
+        </p:spPr>
+        <p:style>
+          <a:lnRef idx="1">
+            <a:schemeClr val="accent1"/>
+          </a:lnRef>
+          <a:fillRef idx="3">
+            <a:schemeClr val="accent1"/>
+          </a:fillRef>
+          <a:effectRef idx="2">
+            <a:schemeClr val="accent1"/>
+          </a:effectRef>
+          <a:fontRef idx="minor">
+            <a:schemeClr val="lt1"/>
+          </a:fontRef>
+        </p:style>
+        <p:txBody>
+          <a:bodyPr rtlCol="0" anchor="ctr" wrap="none"/>
+          <a:lstStyle/>
+          <a:p>
+            <a:pPr algn="ctr"/>
+            <a:r>
+              <a:rPr sz="1300" b="1">
+                <a:solidFill>
+                  <a:srgbClr val="450D21"/>
+                </a:solidFill>
+                <a:latin typeface="DM Sans"/>
+              </a:rPr>
+              <a:t>←  Har du noe på hjertet?</a:t>
+            </a:r>
+          </a:p>
+        </p:txBody>
+      </p:sp>
     </p:spTree>
   </p:cSld>
   <p:clrMapOvr>
